--- a/exam-cram-scheduler/docs/presentation/기획서.pptx
+++ b/exam-cram-scheduler/docs/presentation/기획서.pptx
@@ -4,6 +4,9 @@
   <p:sldMasterIdLst>
     <p:sldMasterId id="2147483648" r:id="rId1"/>
   </p:sldMasterIdLst>
+  <p:notesMasterIdLst>
+    <p:notesMasterId r:id="rId9"/>
+  </p:notesMasterIdLst>
   <p:sldIdLst>
     <p:sldId id="256" r:id="rId2"/>
     <p:sldId id="257" r:id="rId3"/>
@@ -12,13 +15,8 @@
     <p:sldId id="260" r:id="rId6"/>
     <p:sldId id="261" r:id="rId7"/>
     <p:sldId id="262" r:id="rId8"/>
-    <p:sldId id="263" r:id="rId9"/>
-    <p:sldId id="264" r:id="rId10"/>
   </p:sldIdLst>
-  <p:notesMasterIdLst>
-    <p:notesMasterId r:id="rId11"/>
-  </p:notesMasterIdLst>
-  <p:sldSz cx="9144000" cy="5143500"/>
+  <p:sldSz cx="9144000" cy="5143500" type="screen16x9"/>
   <p:notesSz cx="5143500" cy="9144000"/>
   <p:defaultTextStyle>
     <a:lvl1pPr marL="0" algn="l" defTabSz="914400" rtl="0" eaLnBrk="1" latinLnBrk="0" hangingPunct="1">
@@ -112,6 +110,11 @@
       </a:defRPr>
     </a:lvl9pPr>
   </p:defaultTextStyle>
+  <p:extLst>
+    <p:ext uri="{EFAFB233-063F-42B5-8137-9DF3F51BA10A}">
+      <p15:sldGuideLst xmlns:p15="http://schemas.microsoft.com/office/powerpoint/2012/main"/>
+    </p:ext>
+  </p:extLst>
 </p:presentation>
 </file>
 
@@ -137,240 +140,16 @@
           <a:chExt cx="0" cy="0"/>
         </a:xfrm>
       </p:grpSpPr>
-      <p:sp>
-        <p:nvSpPr>
-          <p:cNvPr id="2" name="Header Placeholder 1"/>
-          <p:cNvSpPr>
-            <a:spLocks noGrp="1"/>
-          </p:cNvSpPr>
-          <p:nvPr>
-            <p:ph type="hdr" sz="quarter"/>
-          </p:nvPr>
-        </p:nvSpPr>
-        <p:spPr>
-          <a:xfrm>
-            <a:off x="0" y="0"/>
-            <a:ext cx="2971800" cy="458788"/>
-          </a:xfrm>
-          <a:prstGeom prst="rect">
-            <a:avLst/>
-          </a:prstGeom>
-        </p:spPr>
-        <p:txBody>
-          <a:bodyPr vert="horz" lIns="91440" tIns="45720" rIns="91440" bIns="45720" rtlCol="0"/>
-          <a:lstStyle>
-            <a:lvl1pPr algn="l">
-              <a:defRPr sz="1200"/>
-            </a:lvl1pPr>
-          </a:lstStyle>
-          <a:p>
-            <a:endParaRPr lang="en-US"/>
-          </a:p>
-        </p:txBody>
-      </p:sp>
-      <p:sp>
-        <p:nvSpPr>
-          <p:cNvPr id="3" name="Date Placeholder 2"/>
-          <p:cNvSpPr>
-            <a:spLocks noGrp="1"/>
-          </p:cNvSpPr>
-          <p:nvPr>
-            <p:ph type="dt" idx="1"/>
-          </p:nvPr>
-        </p:nvSpPr>
-        <p:spPr>
-          <a:xfrm>
-            <a:off x="3884613" y="0"/>
-            <a:ext cx="2971800" cy="458788"/>
-          </a:xfrm>
-          <a:prstGeom prst="rect">
-            <a:avLst/>
-          </a:prstGeom>
-        </p:spPr>
-        <p:txBody>
-          <a:bodyPr vert="horz" lIns="91440" tIns="45720" rIns="91440" bIns="45720" rtlCol="0"/>
-          <a:lstStyle>
-            <a:lvl1pPr algn="r">
-              <a:defRPr sz="1200"/>
-            </a:lvl1pPr>
-          </a:lstStyle>
-          <a:p>
-            <a:fld id="{5282F153-3F37-0F45-9E97-73ACFA13230C}" type="datetimeFigureOut">
-              <a:rPr lang="en-US"/>
-              <a:t>7/23/19</a:t>
-            </a:fld>
-            <a:endParaRPr lang="en-US"/>
-          </a:p>
-        </p:txBody>
-      </p:sp>
-      <p:sp>
-        <p:nvSpPr>
-          <p:cNvPr id="4" name="Slide Image Placeholder 3"/>
-          <p:cNvSpPr>
-            <a:spLocks noGrp="1" noRot="1" noChangeAspect="1"/>
-          </p:cNvSpPr>
-          <p:nvPr>
-            <p:ph type="sldImg" idx="2"/>
-          </p:nvPr>
-        </p:nvSpPr>
-        <p:spPr>
-          <a:xfrm>
-            <a:off x="685800" y="1143000"/>
-            <a:ext cx="5486400" cy="3086100"/>
-          </a:xfrm>
-          <a:prstGeom prst="rect">
-            <a:avLst/>
-          </a:prstGeom>
-          <a:noFill/>
-          <a:ln w="12700">
-            <a:solidFill>
-              <a:prstClr val="black"/>
-            </a:solidFill>
-          </a:ln>
-        </p:spPr>
-        <p:txBody>
-          <a:bodyPr vert="horz" lIns="91440" tIns="45720" rIns="91440" bIns="45720" rtlCol="0" anchor="ctr"/>
-          <a:lstStyle/>
-          <a:p>
-            <a:endParaRPr lang="en-US"/>
-          </a:p>
-        </p:txBody>
-      </p:sp>
-      <p:sp>
-        <p:nvSpPr>
-          <p:cNvPr id="5" name="Notes Placeholder 4"/>
-          <p:cNvSpPr>
-            <a:spLocks noGrp="1"/>
-          </p:cNvSpPr>
-          <p:nvPr>
-            <p:ph type="body" sz="quarter" idx="3"/>
-          </p:nvPr>
-        </p:nvSpPr>
-        <p:spPr>
-          <a:xfrm>
-            <a:off x="685800" y="4400550"/>
-            <a:ext cx="5486400" cy="3600450"/>
-          </a:xfrm>
-          <a:prstGeom prst="rect">
-            <a:avLst/>
-          </a:prstGeom>
-        </p:spPr>
-        <p:txBody>
-          <a:bodyPr vert="horz" lIns="91440" tIns="45720" rIns="91440" bIns="45720" rtlCol="0"/>
-          <a:lstStyle/>
-          <a:p>
-            <a:pPr lvl="0"/>
-            <a:r>
-              <a:rPr lang="en-US"/>
-              <a:t>Click to edit Master text styles</a:t>
-            </a:r>
-          </a:p>
-          <a:p>
-            <a:pPr lvl="1"/>
-            <a:r>
-              <a:rPr lang="en-US"/>
-              <a:t>Second level</a:t>
-            </a:r>
-          </a:p>
-          <a:p>
-            <a:pPr lvl="2"/>
-            <a:r>
-              <a:rPr lang="en-US"/>
-              <a:t>Third level</a:t>
-            </a:r>
-          </a:p>
-          <a:p>
-            <a:pPr lvl="3"/>
-            <a:r>
-              <a:rPr lang="en-US"/>
-              <a:t>Fourth level</a:t>
-            </a:r>
-          </a:p>
-          <a:p>
-            <a:pPr lvl="4"/>
-            <a:r>
-              <a:rPr lang="en-US"/>
-              <a:t>Fifth level</a:t>
-            </a:r>
-          </a:p>
-        </p:txBody>
-      </p:sp>
-      <p:sp>
-        <p:nvSpPr>
-          <p:cNvPr id="6" name="Footer Placeholder 5"/>
-          <p:cNvSpPr>
-            <a:spLocks noGrp="1"/>
-          </p:cNvSpPr>
-          <p:nvPr>
-            <p:ph type="ftr" sz="quarter" idx="4"/>
-          </p:nvPr>
-        </p:nvSpPr>
-        <p:spPr>
-          <a:xfrm>
-            <a:off x="0" y="8685213"/>
-            <a:ext cx="2971800" cy="458787"/>
-          </a:xfrm>
-          <a:prstGeom prst="rect">
-            <a:avLst/>
-          </a:prstGeom>
-        </p:spPr>
-        <p:txBody>
-          <a:bodyPr vert="horz" lIns="91440" tIns="45720" rIns="91440" bIns="45720" rtlCol="0" anchor="b"/>
-          <a:lstStyle>
-            <a:lvl1pPr algn="l">
-              <a:defRPr sz="1200"/>
-            </a:lvl1pPr>
-          </a:lstStyle>
-          <a:p>
-            <a:endParaRPr lang="en-US"/>
-          </a:p>
-        </p:txBody>
-      </p:sp>
-      <p:sp>
-        <p:nvSpPr>
-          <p:cNvPr id="7" name="Slide Number Placeholder 6"/>
-          <p:cNvSpPr>
-            <a:spLocks noGrp="1"/>
-          </p:cNvSpPr>
-          <p:nvPr>
-            <p:ph type="sldNum" sz="quarter" idx="5"/>
-          </p:nvPr>
-        </p:nvSpPr>
-        <p:spPr>
-          <a:xfrm>
-            <a:off x="3884613" y="8685213"/>
-            <a:ext cx="2971800" cy="458787"/>
-          </a:xfrm>
-          <a:prstGeom prst="rect">
-            <a:avLst/>
-          </a:prstGeom>
-        </p:spPr>
-        <p:txBody>
-          <a:bodyPr vert="horz" lIns="91440" tIns="45720" rIns="91440" bIns="45720" rtlCol="0" anchor="b"/>
-          <a:lstStyle>
-            <a:lvl1pPr algn="r">
-              <a:defRPr sz="1200"/>
-            </a:lvl1pPr>
-          </a:lstStyle>
-          <a:p>
-            <a:fld id="{CE5E9CC1-C706-0F49-92D6-E571CC5EEA8F}" type="slidenum">
-              <a:rPr lang="en-US"/>
-              <a:t>‹#›</a:t>
-            </a:fld>
-            <a:endParaRPr lang="en-US"/>
-          </a:p>
-        </p:txBody>
-      </p:sp>
     </p:spTree>
     <p:extLst>
       <p:ext uri="{BB962C8B-B14F-4D97-AF65-F5344CB8AC3E}">
-        <p14:creationId xmlns:p14="http://schemas.microsoft.com/office/powerpoint/2010/main" val="1024086991"/>
+        <p14:creationId xmlns:p14="http://schemas.microsoft.com/office/powerpoint/2010/main" val="2342583301"/>
       </p:ext>
     </p:extLst>
   </p:cSld>
   <p:clrMap bg1="lt1" tx1="dk1" bg2="lt2" tx2="dk2" accent1="accent1" accent2="accent2" accent3="accent3" accent4="accent4" accent5="accent5" accent6="accent6" hlink="hlink" folHlink="folHlink"/>
   <p:notesStyle>
-    <a:lvl1pPr marL="0" algn="l" defTabSz="914400" rtl="0" eaLnBrk="1" latinLnBrk="0" hangingPunct="1">
+    <a:lvl1pPr marL="0" algn="l" defTabSz="914400" rtl="0" eaLnBrk="1" latinLnBrk="1" hangingPunct="1">
       <a:defRPr sz="1200" kern="1200">
         <a:solidFill>
           <a:schemeClr val="tx1"/>
@@ -380,7 +159,7 @@
         <a:cs typeface="+mn-cs"/>
       </a:defRPr>
     </a:lvl1pPr>
-    <a:lvl2pPr marL="457200" algn="l" defTabSz="914400" rtl="0" eaLnBrk="1" latinLnBrk="0" hangingPunct="1">
+    <a:lvl2pPr marL="457200" algn="l" defTabSz="914400" rtl="0" eaLnBrk="1" latinLnBrk="1" hangingPunct="1">
       <a:defRPr sz="1200" kern="1200">
         <a:solidFill>
           <a:schemeClr val="tx1"/>
@@ -390,7 +169,7 @@
         <a:cs typeface="+mn-cs"/>
       </a:defRPr>
     </a:lvl2pPr>
-    <a:lvl3pPr marL="914400" algn="l" defTabSz="914400" rtl="0" eaLnBrk="1" latinLnBrk="0" hangingPunct="1">
+    <a:lvl3pPr marL="914400" algn="l" defTabSz="914400" rtl="0" eaLnBrk="1" latinLnBrk="1" hangingPunct="1">
       <a:defRPr sz="1200" kern="1200">
         <a:solidFill>
           <a:schemeClr val="tx1"/>
@@ -400,7 +179,7 @@
         <a:cs typeface="+mn-cs"/>
       </a:defRPr>
     </a:lvl3pPr>
-    <a:lvl4pPr marL="1371600" algn="l" defTabSz="914400" rtl="0" eaLnBrk="1" latinLnBrk="0" hangingPunct="1">
+    <a:lvl4pPr marL="1371600" algn="l" defTabSz="914400" rtl="0" eaLnBrk="1" latinLnBrk="1" hangingPunct="1">
       <a:defRPr sz="1200" kern="1200">
         <a:solidFill>
           <a:schemeClr val="tx1"/>
@@ -410,7 +189,7 @@
         <a:cs typeface="+mn-cs"/>
       </a:defRPr>
     </a:lvl4pPr>
-    <a:lvl5pPr marL="1828800" algn="l" defTabSz="914400" rtl="0" eaLnBrk="1" latinLnBrk="0" hangingPunct="1">
+    <a:lvl5pPr marL="1828800" algn="l" defTabSz="914400" rtl="0" eaLnBrk="1" latinLnBrk="1" hangingPunct="1">
       <a:defRPr sz="1200" kern="1200">
         <a:solidFill>
           <a:schemeClr val="tx1"/>
@@ -420,7 +199,7 @@
         <a:cs typeface="+mn-cs"/>
       </a:defRPr>
     </a:lvl5pPr>
-    <a:lvl6pPr marL="2286000" algn="l" defTabSz="914400" rtl="0" eaLnBrk="1" latinLnBrk="0" hangingPunct="1">
+    <a:lvl6pPr marL="2286000" algn="l" defTabSz="914400" rtl="0" eaLnBrk="1" latinLnBrk="1" hangingPunct="1">
       <a:defRPr sz="1200" kern="1200">
         <a:solidFill>
           <a:schemeClr val="tx1"/>
@@ -430,7 +209,7 @@
         <a:cs typeface="+mn-cs"/>
       </a:defRPr>
     </a:lvl6pPr>
-    <a:lvl7pPr marL="2743200" algn="l" defTabSz="914400" rtl="0" eaLnBrk="1" latinLnBrk="0" hangingPunct="1">
+    <a:lvl7pPr marL="2743200" algn="l" defTabSz="914400" rtl="0" eaLnBrk="1" latinLnBrk="1" hangingPunct="1">
       <a:defRPr sz="1200" kern="1200">
         <a:solidFill>
           <a:schemeClr val="tx1"/>
@@ -440,7 +219,7 @@
         <a:cs typeface="+mn-cs"/>
       </a:defRPr>
     </a:lvl7pPr>
-    <a:lvl8pPr marL="3200400" algn="l" defTabSz="914400" rtl="0" eaLnBrk="1" latinLnBrk="0" hangingPunct="1">
+    <a:lvl8pPr marL="3200400" algn="l" defTabSz="914400" rtl="0" eaLnBrk="1" latinLnBrk="1" hangingPunct="1">
       <a:defRPr sz="1200" kern="1200">
         <a:solidFill>
           <a:schemeClr val="tx1"/>
@@ -450,7 +229,7 @@
         <a:cs typeface="+mn-cs"/>
       </a:defRPr>
     </a:lvl8pPr>
-    <a:lvl9pPr marL="3657600" algn="l" defTabSz="914400" rtl="0" eaLnBrk="1" latinLnBrk="0" hangingPunct="1">
+    <a:lvl9pPr marL="3657600" algn="l" defTabSz="914400" rtl="0" eaLnBrk="1" latinLnBrk="1" hangingPunct="1">
       <a:defRPr sz="1200" kern="1200">
         <a:solidFill>
           <a:schemeClr val="tx1"/>
@@ -508,10 +287,6 @@
           <a:bodyPr/>
           <a:lstStyle/>
           <a:p>
-            <a:r>
-              <a:rPr lang="en-US" dirty="0"/>
-              <a:t/>
-            </a:r>
             <a:endParaRPr lang="en-US" dirty="0"/>
           </a:p>
         </p:txBody>
@@ -596,10 +371,6 @@
           <a:bodyPr/>
           <a:lstStyle/>
           <a:p>
-            <a:r>
-              <a:rPr lang="en-US" dirty="0"/>
-              <a:t/>
-            </a:r>
             <a:endParaRPr lang="en-US" dirty="0"/>
           </a:p>
         </p:txBody>
@@ -684,10 +455,6 @@
           <a:bodyPr/>
           <a:lstStyle/>
           <a:p>
-            <a:r>
-              <a:rPr lang="en-US" dirty="0"/>
-              <a:t/>
-            </a:r>
             <a:endParaRPr lang="en-US" dirty="0"/>
           </a:p>
         </p:txBody>
@@ -772,10 +539,6 @@
           <a:bodyPr/>
           <a:lstStyle/>
           <a:p>
-            <a:r>
-              <a:rPr lang="en-US" dirty="0"/>
-              <a:t/>
-            </a:r>
             <a:endParaRPr lang="en-US" dirty="0"/>
           </a:p>
         </p:txBody>
@@ -860,10 +623,6 @@
           <a:bodyPr/>
           <a:lstStyle/>
           <a:p>
-            <a:r>
-              <a:rPr lang="en-US" dirty="0"/>
-              <a:t/>
-            </a:r>
             <a:endParaRPr lang="en-US" dirty="0"/>
           </a:p>
         </p:txBody>
@@ -948,10 +707,6 @@
           <a:bodyPr/>
           <a:lstStyle/>
           <a:p>
-            <a:r>
-              <a:rPr lang="en-US" dirty="0"/>
-              <a:t/>
-            </a:r>
             <a:endParaRPr lang="en-US" dirty="0"/>
           </a:p>
         </p:txBody>
@@ -1036,10 +791,6 @@
           <a:bodyPr/>
           <a:lstStyle/>
           <a:p>
-            <a:r>
-              <a:rPr lang="en-US" dirty="0"/>
-              <a:t/>
-            </a:r>
             <a:endParaRPr lang="en-US" dirty="0"/>
           </a:p>
         </p:txBody>
@@ -1062,182 +813,6 @@
             <a:fld id="{F7021451-1387-4CA6-816F-3879F97B5CBC}" type="slidenum">
               <a:rPr lang="en-US"/>
               <a:t>7</a:t>
-            </a:fld>
-            <a:endParaRPr lang="en-US"/>
-          </a:p>
-        </p:txBody>
-      </p:sp>
-    </p:spTree>
-    <p:extLst>
-      <p:ext uri="{BB962C8B-B14F-4D97-AF65-F5344CB8AC3E}">
-        <p14:creationId xmlns:p14="http://schemas.microsoft.com/office/powerpoint/2010/main" val="1024086991"/>
-      </p:ext>
-    </p:extLst>
-  </p:cSld>
-  <p:clrMapOvr>
-    <a:masterClrMapping/>
-  </p:clrMapOvr>
-</p:notes>
-</file>
-
-<file path=ppt/notesSlides/notesSlide8.xml><?xml version="1.0" encoding="utf-8"?>
-<p:notes xmlns:a="http://schemas.openxmlformats.org/drawingml/2006/main" xmlns:r="http://schemas.openxmlformats.org/officeDocument/2006/relationships" xmlns:p="http://schemas.openxmlformats.org/presentationml/2006/main">
-  <p:cSld>
-    <p:spTree>
-      <p:nvGrpSpPr>
-        <p:cNvPr id="1" name=""/>
-        <p:cNvGrpSpPr/>
-        <p:nvPr/>
-      </p:nvGrpSpPr>
-      <p:grpSpPr>
-        <a:xfrm>
-          <a:off x="0" y="0"/>
-          <a:ext cx="0" cy="0"/>
-          <a:chOff x="0" y="0"/>
-          <a:chExt cx="0" cy="0"/>
-        </a:xfrm>
-      </p:grpSpPr>
-      <p:sp>
-        <p:nvSpPr>
-          <p:cNvPr id="2" name="Slide Image Placeholder 1"/>
-          <p:cNvSpPr>
-            <a:spLocks noGrp="1" noRot="1" noChangeAspect="1"/>
-          </p:cNvSpPr>
-          <p:nvPr>
-            <p:ph type="sldImg"/>
-          </p:nvPr>
-        </p:nvSpPr>
-        <p:spPr/>
-      </p:sp>
-      <p:sp>
-        <p:nvSpPr>
-          <p:cNvPr id="3" name="Notes Placeholder 2"/>
-          <p:cNvSpPr>
-            <a:spLocks noGrp="1"/>
-          </p:cNvSpPr>
-          <p:nvPr>
-            <p:ph type="body" idx="1"/>
-          </p:nvPr>
-        </p:nvSpPr>
-        <p:spPr/>
-        <p:txBody>
-          <a:bodyPr/>
-          <a:lstStyle/>
-          <a:p>
-            <a:r>
-              <a:rPr lang="en-US" dirty="0"/>
-              <a:t/>
-            </a:r>
-            <a:endParaRPr lang="en-US" dirty="0"/>
-          </a:p>
-        </p:txBody>
-      </p:sp>
-      <p:sp>
-        <p:nvSpPr>
-          <p:cNvPr id="4" name="Slide Number Placeholder 3"/>
-          <p:cNvSpPr>
-            <a:spLocks noGrp="1"/>
-          </p:cNvSpPr>
-          <p:nvPr>
-            <p:ph type="sldNum" sz="quarter" idx="10"/>
-          </p:nvPr>
-        </p:nvSpPr>
-        <p:spPr/>
-        <p:txBody>
-          <a:bodyPr/>
-          <a:lstStyle/>
-          <a:p>
-            <a:fld id="{F7021451-1387-4CA6-816F-3879F97B5CBC}" type="slidenum">
-              <a:rPr lang="en-US"/>
-              <a:t>8</a:t>
-            </a:fld>
-            <a:endParaRPr lang="en-US"/>
-          </a:p>
-        </p:txBody>
-      </p:sp>
-    </p:spTree>
-    <p:extLst>
-      <p:ext uri="{BB962C8B-B14F-4D97-AF65-F5344CB8AC3E}">
-        <p14:creationId xmlns:p14="http://schemas.microsoft.com/office/powerpoint/2010/main" val="1024086991"/>
-      </p:ext>
-    </p:extLst>
-  </p:cSld>
-  <p:clrMapOvr>
-    <a:masterClrMapping/>
-  </p:clrMapOvr>
-</p:notes>
-</file>
-
-<file path=ppt/notesSlides/notesSlide9.xml><?xml version="1.0" encoding="utf-8"?>
-<p:notes xmlns:a="http://schemas.openxmlformats.org/drawingml/2006/main" xmlns:r="http://schemas.openxmlformats.org/officeDocument/2006/relationships" xmlns:p="http://schemas.openxmlformats.org/presentationml/2006/main">
-  <p:cSld>
-    <p:spTree>
-      <p:nvGrpSpPr>
-        <p:cNvPr id="1" name=""/>
-        <p:cNvGrpSpPr/>
-        <p:nvPr/>
-      </p:nvGrpSpPr>
-      <p:grpSpPr>
-        <a:xfrm>
-          <a:off x="0" y="0"/>
-          <a:ext cx="0" cy="0"/>
-          <a:chOff x="0" y="0"/>
-          <a:chExt cx="0" cy="0"/>
-        </a:xfrm>
-      </p:grpSpPr>
-      <p:sp>
-        <p:nvSpPr>
-          <p:cNvPr id="2" name="Slide Image Placeholder 1"/>
-          <p:cNvSpPr>
-            <a:spLocks noGrp="1" noRot="1" noChangeAspect="1"/>
-          </p:cNvSpPr>
-          <p:nvPr>
-            <p:ph type="sldImg"/>
-          </p:nvPr>
-        </p:nvSpPr>
-        <p:spPr/>
-      </p:sp>
-      <p:sp>
-        <p:nvSpPr>
-          <p:cNvPr id="3" name="Notes Placeholder 2"/>
-          <p:cNvSpPr>
-            <a:spLocks noGrp="1"/>
-          </p:cNvSpPr>
-          <p:nvPr>
-            <p:ph type="body" idx="1"/>
-          </p:nvPr>
-        </p:nvSpPr>
-        <p:spPr/>
-        <p:txBody>
-          <a:bodyPr/>
-          <a:lstStyle/>
-          <a:p>
-            <a:r>
-              <a:rPr lang="en-US" dirty="0"/>
-              <a:t/>
-            </a:r>
-            <a:endParaRPr lang="en-US" dirty="0"/>
-          </a:p>
-        </p:txBody>
-      </p:sp>
-      <p:sp>
-        <p:nvSpPr>
-          <p:cNvPr id="4" name="Slide Number Placeholder 3"/>
-          <p:cNvSpPr>
-            <a:spLocks noGrp="1"/>
-          </p:cNvSpPr>
-          <p:nvPr>
-            <p:ph type="sldNum" sz="quarter" idx="10"/>
-          </p:nvPr>
-        </p:nvSpPr>
-        <p:spPr/>
-        <p:txBody>
-          <a:bodyPr/>
-          <a:lstStyle/>
-          <a:p>
-            <a:fld id="{F7021451-1387-4CA6-816F-3879F97B5CBC}" type="slidenum">
-              <a:rPr lang="en-US"/>
-              <a:t>9</a:t>
             </a:fld>
             <a:endParaRPr lang="en-US"/>
           </a:p>
@@ -1289,6 +864,11 @@
 <file path=ppt/slideMasters/slideMaster1.xml><?xml version="1.0" encoding="utf-8"?>
 <p:sldMaster xmlns:a="http://schemas.openxmlformats.org/drawingml/2006/main" xmlns:r="http://schemas.openxmlformats.org/officeDocument/2006/relationships" xmlns:p="http://schemas.openxmlformats.org/presentationml/2006/main">
   <p:cSld>
+    <p:bg>
+      <p:bgRef idx="1001">
+        <a:schemeClr val="bg1"/>
+      </p:bgRef>
+    </p:bg>
     <p:spTree>
       <p:nvGrpSpPr>
         <p:cNvPr id="1" name=""/>
@@ -1571,6 +1151,7 @@
         <a:solidFill>
           <a:srgbClr val="2E1A0F"/>
         </a:solidFill>
+        <a:effectLst/>
       </p:bgPr>
     </p:bg>
     <p:spTree>
@@ -1587,43 +1168,49 @@
           <a:chExt cx="0" cy="0"/>
         </a:xfrm>
       </p:grpSpPr>
-      <p:sp>
-        <p:nvSpPr>
-          <p:cNvPr id="2" name="Shape 0"/>
-          <p:cNvSpPr/>
-          <p:nvPr/>
-        </p:nvSpPr>
-        <p:spPr>
-          <a:xfrm>
-            <a:off x="4069080" y="685800"/>
-            <a:ext cx="1005840" cy="1005840"/>
-          </a:xfrm>
-          <a:prstGeom prst="ellipse">
-            <a:avLst/>
-          </a:prstGeom>
-          <a:solidFill>
-            <a:srgbClr val="241309"/>
-          </a:solidFill>
-          <a:ln/>
-        </p:spPr>
-      </p:sp>
       <p:pic>
         <p:nvPicPr>
-          <p:cNvPr id="3" name="Image 0" descr="preencoded.png">    </p:cNvPr>
+          <p:cNvPr id="2" name="Image 0" descr="preencoded.png"/>
           <p:cNvPicPr>
             <a:picLocks noChangeAspect="1"/>
           </p:cNvPicPr>
           <p:nvPr/>
         </p:nvPicPr>
         <p:blipFill>
-          <a:blip r:embed="rId1"/>
+          <a:blip r:embed="rId3">
+            <a:alphaModFix amt="13000"/>
+          </a:blip>
           <a:stretch>
             <a:fillRect/>
           </a:stretch>
         </p:blipFill>
         <p:spPr>
           <a:xfrm>
-            <a:off x="4315968" y="932688"/>
+            <a:off x="-320040" y="342900"/>
+            <a:ext cx="5852160" cy="4800600"/>
+          </a:xfrm>
+          <a:prstGeom prst="rect">
+            <a:avLst/>
+          </a:prstGeom>
+        </p:spPr>
+      </p:pic>
+      <p:pic>
+        <p:nvPicPr>
+          <p:cNvPr id="4" name="Image 1" descr="preencoded.png"/>
+          <p:cNvPicPr>
+            <a:picLocks noChangeAspect="1"/>
+          </p:cNvPicPr>
+          <p:nvPr/>
+        </p:nvPicPr>
+        <p:blipFill>
+          <a:blip r:embed="rId4"/>
+          <a:stretch>
+            <a:fillRect/>
+          </a:stretch>
+        </p:blipFill>
+        <p:spPr>
+          <a:xfrm>
+            <a:off x="7221093" y="2100834"/>
             <a:ext cx="512064" cy="512064"/>
           </a:xfrm>
           <a:prstGeom prst="rect">
@@ -1633,13 +1220,13 @@
       </p:pic>
       <p:sp>
         <p:nvSpPr>
-          <p:cNvPr id="4" name="Text 1"/>
-          <p:cNvSpPr/>
-          <p:nvPr/>
-        </p:nvSpPr>
-        <p:spPr>
-          <a:xfrm>
-            <a:off x="457200" y="1965960"/>
+          <p:cNvPr id="5" name="Text 1"/>
+          <p:cNvSpPr/>
+          <p:nvPr/>
+        </p:nvSpPr>
+        <p:spPr>
+          <a:xfrm>
+            <a:off x="276225" y="1965960"/>
             <a:ext cx="8229600" cy="822960"/>
           </a:xfrm>
           <a:prstGeom prst="rect">
@@ -1652,7 +1239,7 @@
           <a:bodyPr wrap="square" rtlCol="0" anchor="ctr"/>
           <a:lstStyle/>
           <a:p>
-            <a:pPr algn="ctr" indent="0" marL="0">
+            <a:pPr marL="0" indent="0" algn="ctr">
               <a:buNone/>
             </a:pPr>
             <a:r>
@@ -1660,9 +1247,9 @@
                 <a:solidFill>
                   <a:srgbClr val="EDE0D0"/>
                 </a:solidFill>
-                <a:latin typeface="Cambria" pitchFamily="34" charset="0"/>
-                <a:ea typeface="Cambria" pitchFamily="34" charset="-122"/>
-                <a:cs typeface="Cambria" pitchFamily="34" charset="-120"/>
+                <a:latin typeface="HYSinMyeongJo-Medium" pitchFamily="34" charset="0"/>
+                <a:ea typeface="HYSinMyeongJo-Medium" pitchFamily="34" charset="-122"/>
+                <a:cs typeface="HYSinMyeongJo-Medium" pitchFamily="34" charset="-120"/>
               </a:rPr>
               <a:t>시험 벼락치기 스케줄러</a:t>
             </a:r>
@@ -1672,7 +1259,7 @@
       </p:sp>
       <p:sp>
         <p:nvSpPr>
-          <p:cNvPr id="5" name="Text 2"/>
+          <p:cNvPr id="6" name="Text 2"/>
           <p:cNvSpPr/>
           <p:nvPr/>
         </p:nvSpPr>
@@ -1691,7 +1278,7 @@
           <a:bodyPr wrap="square" rtlCol="0" anchor="ctr"/>
           <a:lstStyle/>
           <a:p>
-            <a:pPr algn="ctr" indent="0" marL="0">
+            <a:pPr marL="0" indent="0" algn="ctr">
               <a:buNone/>
             </a:pPr>
             <a:r>
@@ -1699,9 +1286,9 @@
                 <a:solidFill>
                   <a:srgbClr val="C9B8A4"/>
                 </a:solidFill>
-                <a:latin typeface="Calibri" pitchFamily="34" charset="0"/>
-                <a:ea typeface="Calibri" pitchFamily="34" charset="-122"/>
-                <a:cs typeface="Calibri" pitchFamily="34" charset="-120"/>
+                <a:latin typeface="HYSinMyeongJo-Medium" pitchFamily="34" charset="0"/>
+                <a:ea typeface="HYSinMyeongJo-Medium" pitchFamily="34" charset="-122"/>
+                <a:cs typeface="HYSinMyeongJo-Medium" pitchFamily="34" charset="-120"/>
               </a:rPr>
               <a:t>시험기간 대학생의 벼락치기 수면·카페인 스케줄을 최적화하는 도구</a:t>
             </a:r>
@@ -1711,7 +1298,7 @@
       </p:sp>
       <p:sp>
         <p:nvSpPr>
-          <p:cNvPr id="6" name="Text 3"/>
+          <p:cNvPr id="7" name="Text 3"/>
           <p:cNvSpPr/>
           <p:nvPr/>
         </p:nvSpPr>
@@ -1730,7 +1317,7 @@
           <a:bodyPr wrap="square" rtlCol="0" anchor="ctr"/>
           <a:lstStyle/>
           <a:p>
-            <a:pPr algn="ctr" indent="0" marL="0">
+            <a:pPr marL="0" indent="0" algn="ctr">
               <a:buNone/>
             </a:pPr>
             <a:r>
@@ -1738,9 +1325,9 @@
                 <a:solidFill>
                   <a:srgbClr val="C9B8A4"/>
                 </a:solidFill>
-                <a:latin typeface="Calibri" pitchFamily="34" charset="0"/>
-                <a:ea typeface="Calibri" pitchFamily="34" charset="-122"/>
-                <a:cs typeface="Calibri" pitchFamily="34" charset="-120"/>
+                <a:latin typeface="HYSinMyeongJo-Medium" pitchFamily="34" charset="0"/>
+                <a:ea typeface="HYSinMyeongJo-Medium" pitchFamily="34" charset="-122"/>
+                <a:cs typeface="HYSinMyeongJo-Medium" pitchFamily="34" charset="-120"/>
               </a:rPr>
               <a:t>N110_안정연</a:t>
             </a:r>
@@ -1762,8 +1349,9 @@
     <p:bg>
       <p:bgPr>
         <a:solidFill>
-          <a:srgbClr val="FBF7F2"/>
+          <a:srgbClr val="2E1A0F"/>
         </a:solidFill>
+        <a:effectLst/>
       </p:bgPr>
     </p:bg>
     <p:spTree>
@@ -1801,19 +1389,19 @@
           <a:bodyPr wrap="square" lIns="0" tIns="0" rIns="0" bIns="0" rtlCol="0" anchor="ctr"/>
           <a:lstStyle/>
           <a:p>
-            <a:pPr algn="l" indent="0" marL="0">
+            <a:pPr marL="0" indent="0" algn="l">
               <a:buNone/>
             </a:pPr>
             <a:r>
               <a:rPr lang="en-US" sz="3000" b="1" dirty="0">
                 <a:solidFill>
-                  <a:srgbClr val="2E1A0F"/>
-                </a:solidFill>
-                <a:latin typeface="Cambria" pitchFamily="34" charset="0"/>
-                <a:ea typeface="Cambria" pitchFamily="34" charset="-122"/>
-                <a:cs typeface="Cambria" pitchFamily="34" charset="-120"/>
-              </a:rPr>
-              <a:t>무엇을, 어떻게 해결하는가</a:t>
+                  <a:srgbClr val="EDE0D0"/>
+                </a:solidFill>
+                <a:latin typeface="HYSinMyeongJo-Medium" pitchFamily="34" charset="0"/>
+                <a:ea typeface="HYSinMyeongJo-Medium" pitchFamily="34" charset="-122"/>
+                <a:cs typeface="HYSinMyeongJo-Medium" pitchFamily="34" charset="-120"/>
+              </a:rPr>
+              <a:t>무엇을, 어떻게 해결하는가?</a:t>
             </a:r>
             <a:endParaRPr lang="en-US" sz="3000" dirty="0"/>
           </a:p>
@@ -1836,16 +1424,9 @@
             </a:avLst>
           </a:prstGeom>
           <a:solidFill>
-            <a:srgbClr val="F3E7D6"/>
+            <a:srgbClr val="F7EEE0"/>
           </a:solidFill>
           <a:ln/>
-          <a:effectLst>
-            <a:outerShdw sx="100000" sy="100000" kx="0" ky="0" algn="bl" rotWithShape="0" blurRad="101600" dist="38100" dir="5400000">
-              <a:srgbClr val="000000">
-                <a:alpha val="10000"/>
-              </a:srgbClr>
-            </a:outerShdw>
-          </a:effectLst>
         </p:spPr>
       </p:sp>
       <p:sp>
@@ -1865,7 +1446,7 @@
             </a:avLst>
           </a:prstGeom>
           <a:solidFill>
-            <a:srgbClr val="FBF5EB"/>
+            <a:srgbClr val="FFFFFF"/>
           </a:solidFill>
           <a:ln/>
         </p:spPr>
@@ -1892,14 +1473,14 @@
       </p:sp>
       <p:pic>
         <p:nvPicPr>
-          <p:cNvPr id="6" name="Image 0" descr="preencoded.png">    </p:cNvPr>
+          <p:cNvPr id="6" name="Image 0" descr="preencoded.png"/>
           <p:cNvPicPr>
             <a:picLocks noChangeAspect="1"/>
           </p:cNvPicPr>
           <p:nvPr/>
         </p:nvPicPr>
         <p:blipFill>
-          <a:blip r:embed="rId1"/>
+          <a:blip r:embed="rId3"/>
           <a:stretch>
             <a:fillRect/>
           </a:stretch>
@@ -1935,7 +1516,7 @@
           <a:bodyPr wrap="square" lIns="0" tIns="0" rIns="0" bIns="0" rtlCol="0" anchor="ctr"/>
           <a:lstStyle/>
           <a:p>
-            <a:pPr algn="ctr" indent="0" marL="0">
+            <a:pPr marL="0" indent="0" algn="ctr">
               <a:buNone/>
             </a:pPr>
             <a:r>
@@ -1943,9 +1524,9 @@
                 <a:solidFill>
                   <a:srgbClr val="2E1A0F"/>
                 </a:solidFill>
-                <a:latin typeface="Cambria" pitchFamily="34" charset="0"/>
-                <a:ea typeface="Cambria" pitchFamily="34" charset="-122"/>
-                <a:cs typeface="Cambria" pitchFamily="34" charset="-120"/>
+                <a:latin typeface="HYSinMyeongJo-Medium" pitchFamily="34" charset="0"/>
+                <a:ea typeface="HYSinMyeongJo-Medium" pitchFamily="34" charset="-122"/>
+                <a:cs typeface="HYSinMyeongJo-Medium" pitchFamily="34" charset="-120"/>
               </a:rPr>
               <a:t>문제</a:t>
             </a:r>
@@ -1974,19 +1555,133 @@
           <a:bodyPr wrap="square" rtlCol="0" anchor="t"/>
           <a:lstStyle/>
           <a:p>
-            <a:pPr algn="l" indent="0" marL="0">
-              <a:buNone/>
-            </a:pPr>
+            <a:pPr marL="0" indent="0" algn="ctr">
+              <a:buNone/>
+            </a:pPr>
+            <a:r>
+              <a:rPr lang="en-US" sz="1400" dirty="0" err="1">
+                <a:solidFill>
+                  <a:srgbClr val="2E1A0F"/>
+                </a:solidFill>
+                <a:latin typeface="HYSinMyeongJo-Medium" pitchFamily="34" charset="0"/>
+                <a:ea typeface="HYSinMyeongJo-Medium" pitchFamily="34" charset="-122"/>
+                <a:cs typeface="HYSinMyeongJo-Medium" pitchFamily="34" charset="-120"/>
+              </a:rPr>
+              <a:t>수면·카페인을</a:t>
+            </a:r>
             <a:r>
               <a:rPr lang="en-US" sz="1400" dirty="0">
                 <a:solidFill>
                   <a:srgbClr val="2E1A0F"/>
                 </a:solidFill>
-                <a:latin typeface="Calibri" pitchFamily="34" charset="0"/>
-                <a:ea typeface="Calibri" pitchFamily="34" charset="-122"/>
-                <a:cs typeface="Calibri" pitchFamily="34" charset="-120"/>
-              </a:rPr>
-              <a:t>수면·카페인을 감으로 조절하다가 컨디션이 무너지고, 정작 시험 당일 상태가 안 좋아짐</a:t>
+                <a:latin typeface="HYSinMyeongJo-Medium" pitchFamily="34" charset="0"/>
+                <a:ea typeface="HYSinMyeongJo-Medium" pitchFamily="34" charset="-122"/>
+                <a:cs typeface="HYSinMyeongJo-Medium" pitchFamily="34" charset="-120"/>
+              </a:rPr>
+              <a:t> </a:t>
+            </a:r>
+          </a:p>
+          <a:p>
+            <a:pPr marL="0" indent="0" algn="ctr">
+              <a:buNone/>
+            </a:pPr>
+            <a:r>
+              <a:rPr lang="en-US" sz="1400" dirty="0" err="1">
+                <a:solidFill>
+                  <a:srgbClr val="2E1A0F"/>
+                </a:solidFill>
+                <a:latin typeface="HYSinMyeongJo-Medium" pitchFamily="34" charset="0"/>
+                <a:ea typeface="HYSinMyeongJo-Medium" pitchFamily="34" charset="-122"/>
+                <a:cs typeface="HYSinMyeongJo-Medium" pitchFamily="34" charset="-120"/>
+              </a:rPr>
+              <a:t>감으로</a:t>
+            </a:r>
+            <a:r>
+              <a:rPr lang="en-US" sz="1400" dirty="0">
+                <a:solidFill>
+                  <a:srgbClr val="2E1A0F"/>
+                </a:solidFill>
+                <a:latin typeface="HYSinMyeongJo-Medium" pitchFamily="34" charset="0"/>
+                <a:ea typeface="HYSinMyeongJo-Medium" pitchFamily="34" charset="-122"/>
+                <a:cs typeface="HYSinMyeongJo-Medium" pitchFamily="34" charset="-120"/>
+              </a:rPr>
+              <a:t> </a:t>
+            </a:r>
+            <a:r>
+              <a:rPr lang="en-US" sz="1400" dirty="0" err="1">
+                <a:solidFill>
+                  <a:srgbClr val="2E1A0F"/>
+                </a:solidFill>
+                <a:latin typeface="HYSinMyeongJo-Medium" pitchFamily="34" charset="0"/>
+                <a:ea typeface="HYSinMyeongJo-Medium" pitchFamily="34" charset="-122"/>
+                <a:cs typeface="HYSinMyeongJo-Medium" pitchFamily="34" charset="-120"/>
+              </a:rPr>
+              <a:t>조절하다가</a:t>
+            </a:r>
+            <a:r>
+              <a:rPr lang="en-US" sz="1400" dirty="0">
+                <a:solidFill>
+                  <a:srgbClr val="2E1A0F"/>
+                </a:solidFill>
+                <a:latin typeface="HYSinMyeongJo-Medium" pitchFamily="34" charset="0"/>
+                <a:ea typeface="HYSinMyeongJo-Medium" pitchFamily="34" charset="-122"/>
+                <a:cs typeface="HYSinMyeongJo-Medium" pitchFamily="34" charset="-120"/>
+              </a:rPr>
+              <a:t> </a:t>
+            </a:r>
+          </a:p>
+          <a:p>
+            <a:pPr marL="0" indent="0" algn="ctr">
+              <a:buNone/>
+            </a:pPr>
+            <a:r>
+              <a:rPr lang="en-US" sz="1400" dirty="0" err="1">
+                <a:solidFill>
+                  <a:srgbClr val="2E1A0F"/>
+                </a:solidFill>
+                <a:latin typeface="HYSinMyeongJo-Medium" pitchFamily="34" charset="0"/>
+                <a:ea typeface="HYSinMyeongJo-Medium" pitchFamily="34" charset="-122"/>
+                <a:cs typeface="HYSinMyeongJo-Medium" pitchFamily="34" charset="-120"/>
+              </a:rPr>
+              <a:t>컨디션이</a:t>
+            </a:r>
+            <a:r>
+              <a:rPr lang="en-US" sz="1400" dirty="0">
+                <a:solidFill>
+                  <a:srgbClr val="2E1A0F"/>
+                </a:solidFill>
+                <a:latin typeface="HYSinMyeongJo-Medium" pitchFamily="34" charset="0"/>
+                <a:ea typeface="HYSinMyeongJo-Medium" pitchFamily="34" charset="-122"/>
+                <a:cs typeface="HYSinMyeongJo-Medium" pitchFamily="34" charset="-120"/>
+              </a:rPr>
+              <a:t> 무너지고, </a:t>
+            </a:r>
+          </a:p>
+          <a:p>
+            <a:pPr marL="0" indent="0" algn="ctr">
+              <a:buNone/>
+            </a:pPr>
+            <a:r>
+              <a:rPr lang="en-US" sz="1400" dirty="0" err="1">
+                <a:solidFill>
+                  <a:srgbClr val="2E1A0F"/>
+                </a:solidFill>
+                <a:latin typeface="HYSinMyeongJo-Medium" pitchFamily="34" charset="0"/>
+                <a:ea typeface="HYSinMyeongJo-Medium" pitchFamily="34" charset="-122"/>
+                <a:cs typeface="HYSinMyeongJo-Medium" pitchFamily="34" charset="-120"/>
+              </a:rPr>
+              <a:t>정작</a:t>
+            </a:r>
+            <a:r>
+              <a:rPr lang="en-US" sz="1400" dirty="0">
+                <a:solidFill>
+                  <a:srgbClr val="2E1A0F"/>
+                </a:solidFill>
+                <a:latin typeface="HYSinMyeongJo-Medium" pitchFamily="34" charset="0"/>
+                <a:ea typeface="HYSinMyeongJo-Medium" pitchFamily="34" charset="-122"/>
+                <a:cs typeface="HYSinMyeongJo-Medium" pitchFamily="34" charset="-120"/>
+              </a:rPr>
+              <a:t> 시험 당일 상태가 안 좋아짐</a:t>
             </a:r>
             <a:endParaRPr lang="en-US" sz="1400" dirty="0"/>
           </a:p>
@@ -2009,7 +1704,7 @@
             </a:avLst>
           </a:prstGeom>
           <a:solidFill>
-            <a:srgbClr val="FBF5EB"/>
+            <a:srgbClr val="FFFFFF"/>
           </a:solidFill>
           <a:ln/>
         </p:spPr>
@@ -2036,14 +1731,14 @@
       </p:sp>
       <p:pic>
         <p:nvPicPr>
-          <p:cNvPr id="11" name="Image 1" descr="preencoded.png">    </p:cNvPr>
+          <p:cNvPr id="11" name="Image 1" descr="preencoded.png"/>
           <p:cNvPicPr>
             <a:picLocks noChangeAspect="1"/>
           </p:cNvPicPr>
           <p:nvPr/>
         </p:nvPicPr>
         <p:blipFill>
-          <a:blip r:embed="rId2"/>
+          <a:blip r:embed="rId4"/>
           <a:stretch>
             <a:fillRect/>
           </a:stretch>
@@ -2079,7 +1774,7 @@
           <a:bodyPr wrap="square" lIns="0" tIns="0" rIns="0" bIns="0" rtlCol="0" anchor="ctr"/>
           <a:lstStyle/>
           <a:p>
-            <a:pPr algn="ctr" indent="0" marL="0">
+            <a:pPr marL="0" indent="0" algn="ctr">
               <a:buNone/>
             </a:pPr>
             <a:r>
@@ -2087,9 +1782,9 @@
                 <a:solidFill>
                   <a:srgbClr val="2E1A0F"/>
                 </a:solidFill>
-                <a:latin typeface="Cambria" pitchFamily="34" charset="0"/>
-                <a:ea typeface="Cambria" pitchFamily="34" charset="-122"/>
-                <a:cs typeface="Cambria" pitchFamily="34" charset="-120"/>
+                <a:latin typeface="HYSinMyeongJo-Medium" pitchFamily="34" charset="0"/>
+                <a:ea typeface="HYSinMyeongJo-Medium" pitchFamily="34" charset="-122"/>
+                <a:cs typeface="HYSinMyeongJo-Medium" pitchFamily="34" charset="-120"/>
               </a:rPr>
               <a:t>해결</a:t>
             </a:r>
@@ -2118,7 +1813,7 @@
           <a:bodyPr wrap="square" rtlCol="0" anchor="t"/>
           <a:lstStyle/>
           <a:p>
-            <a:pPr algn="l" indent="0" marL="0">
+            <a:pPr marL="0" indent="0" algn="ctr">
               <a:buNone/>
             </a:pPr>
             <a:r>
@@ -2126,11 +1821,196 @@
                 <a:solidFill>
                   <a:srgbClr val="2E1A0F"/>
                 </a:solidFill>
-                <a:latin typeface="Calibri" pitchFamily="34" charset="0"/>
-                <a:ea typeface="Calibri" pitchFamily="34" charset="-122"/>
-                <a:cs typeface="Calibri" pitchFamily="34" charset="-120"/>
-              </a:rPr>
-              <a:t>자연어로 상황을 설명하면, 검증된 수면과학 모델로 시험 시작 시각 각성도를 최대화하는 스케줄을 계산</a:t>
+                <a:latin typeface="HYSinMyeongJo-Medium" pitchFamily="34" charset="0"/>
+                <a:ea typeface="HYSinMyeongJo-Medium" pitchFamily="34" charset="-122"/>
+                <a:cs typeface="HYSinMyeongJo-Medium" pitchFamily="34" charset="-120"/>
+              </a:rPr>
+              <a:t>자연어로 상황을 </a:t>
+            </a:r>
+            <a:r>
+              <a:rPr lang="en-US" sz="1400" dirty="0" err="1">
+                <a:solidFill>
+                  <a:srgbClr val="2E1A0F"/>
+                </a:solidFill>
+                <a:latin typeface="HYSinMyeongJo-Medium" pitchFamily="34" charset="0"/>
+                <a:ea typeface="HYSinMyeongJo-Medium" pitchFamily="34" charset="-122"/>
+                <a:cs typeface="HYSinMyeongJo-Medium" pitchFamily="34" charset="-120"/>
+              </a:rPr>
+              <a:t>설명하면</a:t>
+            </a:r>
+            <a:r>
+              <a:rPr lang="en-US" sz="1400" dirty="0">
+                <a:solidFill>
+                  <a:srgbClr val="2E1A0F"/>
+                </a:solidFill>
+                <a:latin typeface="HYSinMyeongJo-Medium" pitchFamily="34" charset="0"/>
+                <a:ea typeface="HYSinMyeongJo-Medium" pitchFamily="34" charset="-122"/>
+                <a:cs typeface="HYSinMyeongJo-Medium" pitchFamily="34" charset="-120"/>
+              </a:rPr>
+              <a:t>,</a:t>
+            </a:r>
+          </a:p>
+          <a:p>
+            <a:pPr marL="0" indent="0" algn="ctr">
+              <a:buNone/>
+            </a:pPr>
+            <a:r>
+              <a:rPr lang="en-US" sz="1400" dirty="0" err="1">
+                <a:solidFill>
+                  <a:srgbClr val="2E1A0F"/>
+                </a:solidFill>
+                <a:latin typeface="HYSinMyeongJo-Medium" pitchFamily="34" charset="0"/>
+                <a:ea typeface="HYSinMyeongJo-Medium" pitchFamily="34" charset="-122"/>
+                <a:cs typeface="HYSinMyeongJo-Medium" pitchFamily="34" charset="-120"/>
+              </a:rPr>
+              <a:t>검증된</a:t>
+            </a:r>
+            <a:r>
+              <a:rPr lang="en-US" sz="1400" dirty="0">
+                <a:solidFill>
+                  <a:srgbClr val="2E1A0F"/>
+                </a:solidFill>
+                <a:latin typeface="HYSinMyeongJo-Medium" pitchFamily="34" charset="0"/>
+                <a:ea typeface="HYSinMyeongJo-Medium" pitchFamily="34" charset="-122"/>
+                <a:cs typeface="HYSinMyeongJo-Medium" pitchFamily="34" charset="-120"/>
+              </a:rPr>
+              <a:t> </a:t>
+            </a:r>
+            <a:r>
+              <a:rPr lang="en-US" sz="1400" dirty="0" err="1">
+                <a:solidFill>
+                  <a:srgbClr val="2E1A0F"/>
+                </a:solidFill>
+                <a:latin typeface="HYSinMyeongJo-Medium" pitchFamily="34" charset="0"/>
+                <a:ea typeface="HYSinMyeongJo-Medium" pitchFamily="34" charset="-122"/>
+                <a:cs typeface="HYSinMyeongJo-Medium" pitchFamily="34" charset="-120"/>
+              </a:rPr>
+              <a:t>수면과학</a:t>
+            </a:r>
+            <a:r>
+              <a:rPr lang="en-US" sz="1400" dirty="0">
+                <a:solidFill>
+                  <a:srgbClr val="2E1A0F"/>
+                </a:solidFill>
+                <a:latin typeface="HYSinMyeongJo-Medium" pitchFamily="34" charset="0"/>
+                <a:ea typeface="HYSinMyeongJo-Medium" pitchFamily="34" charset="-122"/>
+                <a:cs typeface="HYSinMyeongJo-Medium" pitchFamily="34" charset="-120"/>
+              </a:rPr>
+              <a:t> </a:t>
+            </a:r>
+            <a:r>
+              <a:rPr lang="en-US" sz="1400" dirty="0" err="1">
+                <a:solidFill>
+                  <a:srgbClr val="2E1A0F"/>
+                </a:solidFill>
+                <a:latin typeface="HYSinMyeongJo-Medium" pitchFamily="34" charset="0"/>
+                <a:ea typeface="HYSinMyeongJo-Medium" pitchFamily="34" charset="-122"/>
+                <a:cs typeface="HYSinMyeongJo-Medium" pitchFamily="34" charset="-120"/>
+              </a:rPr>
+              <a:t>모델로</a:t>
+            </a:r>
+            <a:endParaRPr lang="en-US" sz="1400" dirty="0">
+              <a:solidFill>
+                <a:srgbClr val="2E1A0F"/>
+              </a:solidFill>
+              <a:latin typeface="HYSinMyeongJo-Medium" pitchFamily="34" charset="0"/>
+              <a:ea typeface="HYSinMyeongJo-Medium" pitchFamily="34" charset="-122"/>
+              <a:cs typeface="HYSinMyeongJo-Medium" pitchFamily="34" charset="-120"/>
+            </a:endParaRPr>
+          </a:p>
+          <a:p>
+            <a:pPr marL="0" indent="0" algn="ctr">
+              <a:buNone/>
+            </a:pPr>
+            <a:r>
+              <a:rPr lang="en-US" sz="1400" dirty="0" err="1">
+                <a:solidFill>
+                  <a:srgbClr val="2E1A0F"/>
+                </a:solidFill>
+                <a:latin typeface="HYSinMyeongJo-Medium" pitchFamily="34" charset="0"/>
+                <a:ea typeface="HYSinMyeongJo-Medium" pitchFamily="34" charset="-122"/>
+                <a:cs typeface="HYSinMyeongJo-Medium" pitchFamily="34" charset="-120"/>
+              </a:rPr>
+              <a:t>시험</a:t>
+            </a:r>
+            <a:r>
+              <a:rPr lang="en-US" sz="1400" dirty="0">
+                <a:solidFill>
+                  <a:srgbClr val="2E1A0F"/>
+                </a:solidFill>
+                <a:latin typeface="HYSinMyeongJo-Medium" pitchFamily="34" charset="0"/>
+                <a:ea typeface="HYSinMyeongJo-Medium" pitchFamily="34" charset="-122"/>
+                <a:cs typeface="HYSinMyeongJo-Medium" pitchFamily="34" charset="-120"/>
+              </a:rPr>
+              <a:t> 시작 </a:t>
+            </a:r>
+            <a:r>
+              <a:rPr lang="en-US" sz="1400" dirty="0" err="1">
+                <a:solidFill>
+                  <a:srgbClr val="2E1A0F"/>
+                </a:solidFill>
+                <a:latin typeface="HYSinMyeongJo-Medium" pitchFamily="34" charset="0"/>
+                <a:ea typeface="HYSinMyeongJo-Medium" pitchFamily="34" charset="-122"/>
+                <a:cs typeface="HYSinMyeongJo-Medium" pitchFamily="34" charset="-120"/>
+              </a:rPr>
+              <a:t>시각</a:t>
+            </a:r>
+            <a:r>
+              <a:rPr lang="en-US" sz="1400" dirty="0">
+                <a:solidFill>
+                  <a:srgbClr val="2E1A0F"/>
+                </a:solidFill>
+                <a:latin typeface="HYSinMyeongJo-Medium" pitchFamily="34" charset="0"/>
+                <a:ea typeface="HYSinMyeongJo-Medium" pitchFamily="34" charset="-122"/>
+                <a:cs typeface="HYSinMyeongJo-Medium" pitchFamily="34" charset="-120"/>
+              </a:rPr>
+              <a:t> </a:t>
+            </a:r>
+            <a:r>
+              <a:rPr lang="en-US" sz="1400" dirty="0" err="1">
+                <a:solidFill>
+                  <a:srgbClr val="2E1A0F"/>
+                </a:solidFill>
+                <a:latin typeface="HYSinMyeongJo-Medium" pitchFamily="34" charset="0"/>
+                <a:ea typeface="HYSinMyeongJo-Medium" pitchFamily="34" charset="-122"/>
+                <a:cs typeface="HYSinMyeongJo-Medium" pitchFamily="34" charset="-120"/>
+              </a:rPr>
+              <a:t>각성도를</a:t>
+            </a:r>
+            <a:endParaRPr lang="en-US" sz="1400" dirty="0">
+              <a:solidFill>
+                <a:srgbClr val="2E1A0F"/>
+              </a:solidFill>
+              <a:latin typeface="HYSinMyeongJo-Medium" pitchFamily="34" charset="0"/>
+              <a:ea typeface="HYSinMyeongJo-Medium" pitchFamily="34" charset="-122"/>
+              <a:cs typeface="HYSinMyeongJo-Medium" pitchFamily="34" charset="-120"/>
+            </a:endParaRPr>
+          </a:p>
+          <a:p>
+            <a:pPr marL="0" indent="0" algn="ctr">
+              <a:buNone/>
+            </a:pPr>
+            <a:r>
+              <a:rPr lang="en-US" sz="1400" dirty="0" err="1">
+                <a:solidFill>
+                  <a:srgbClr val="2E1A0F"/>
+                </a:solidFill>
+                <a:latin typeface="HYSinMyeongJo-Medium" pitchFamily="34" charset="0"/>
+                <a:ea typeface="HYSinMyeongJo-Medium" pitchFamily="34" charset="-122"/>
+                <a:cs typeface="HYSinMyeongJo-Medium" pitchFamily="34" charset="-120"/>
+              </a:rPr>
+              <a:t>최대화하는</a:t>
+            </a:r>
+            <a:r>
+              <a:rPr lang="en-US" sz="1400" dirty="0">
+                <a:solidFill>
+                  <a:srgbClr val="2E1A0F"/>
+                </a:solidFill>
+                <a:latin typeface="HYSinMyeongJo-Medium" pitchFamily="34" charset="0"/>
+                <a:ea typeface="HYSinMyeongJo-Medium" pitchFamily="34" charset="-122"/>
+                <a:cs typeface="HYSinMyeongJo-Medium" pitchFamily="34" charset="-120"/>
+              </a:rPr>
+              <a:t> 스케줄을 계산</a:t>
             </a:r>
             <a:endParaRPr lang="en-US" sz="1400" dirty="0"/>
           </a:p>
@@ -2150,8 +2030,9 @@
     <p:bg>
       <p:bgPr>
         <a:solidFill>
-          <a:srgbClr val="FBF7F2"/>
+          <a:srgbClr val="2E1A0F"/>
         </a:solidFill>
+        <a:effectLst/>
       </p:bgPr>
     </p:bg>
     <p:spTree>
@@ -2189,17 +2070,17 @@
           <a:bodyPr wrap="square" lIns="0" tIns="0" rIns="0" bIns="0" rtlCol="0" anchor="ctr"/>
           <a:lstStyle/>
           <a:p>
-            <a:pPr algn="l" indent="0" marL="0">
+            <a:pPr marL="0" indent="0" algn="l">
               <a:buNone/>
             </a:pPr>
             <a:r>
               <a:rPr lang="en-US" sz="3000" b="1" dirty="0">
                 <a:solidFill>
-                  <a:srgbClr val="2E1A0F"/>
-                </a:solidFill>
-                <a:latin typeface="Cambria" pitchFamily="34" charset="0"/>
-                <a:ea typeface="Cambria" pitchFamily="34" charset="-122"/>
-                <a:cs typeface="Cambria" pitchFamily="34" charset="-120"/>
+                  <a:srgbClr val="EDE0D0"/>
+                </a:solidFill>
+                <a:latin typeface="HYSinMyeongJo-Medium" pitchFamily="34" charset="0"/>
+                <a:ea typeface="HYSinMyeongJo-Medium" pitchFamily="34" charset="-122"/>
+                <a:cs typeface="HYSinMyeongJo-Medium" pitchFamily="34" charset="-120"/>
               </a:rPr>
               <a:t>화면 흐름</a:t>
             </a:r>
@@ -2224,16 +2105,9 @@
             </a:avLst>
           </a:prstGeom>
           <a:solidFill>
-            <a:srgbClr val="F3E7D6"/>
+            <a:srgbClr val="F7EEE0"/>
           </a:solidFill>
           <a:ln/>
-          <a:effectLst>
-            <a:outerShdw sx="100000" sy="100000" kx="0" ky="0" algn="bl" rotWithShape="0" blurRad="101600" dist="38100" dir="5400000">
-              <a:srgbClr val="000000">
-                <a:alpha val="10000"/>
-              </a:srgbClr>
-            </a:outerShdw>
-          </a:effectLst>
         </p:spPr>
       </p:sp>
       <p:sp>
@@ -2253,7 +2127,7 @@
             </a:avLst>
           </a:prstGeom>
           <a:solidFill>
-            <a:srgbClr val="FBF5EB"/>
+            <a:srgbClr val="FFFFFF"/>
           </a:solidFill>
           <a:ln/>
         </p:spPr>
@@ -2279,7 +2153,7 @@
           <a:bodyPr wrap="square" lIns="0" tIns="0" rIns="0" bIns="0" rtlCol="0" anchor="ctr"/>
           <a:lstStyle/>
           <a:p>
-            <a:pPr algn="ctr" indent="0" marL="0">
+            <a:pPr marL="0" indent="0" algn="ctr">
               <a:buNone/>
             </a:pPr>
             <a:r>
@@ -2287,9 +2161,9 @@
                 <a:solidFill>
                   <a:srgbClr val="C17F3E"/>
                 </a:solidFill>
-                <a:latin typeface="Calibri" pitchFamily="34" charset="0"/>
-                <a:ea typeface="Calibri" pitchFamily="34" charset="-122"/>
-                <a:cs typeface="Calibri" pitchFamily="34" charset="-120"/>
+                <a:latin typeface="HYSinMyeongJo-Medium" pitchFamily="34" charset="0"/>
+                <a:ea typeface="HYSinMyeongJo-Medium" pitchFamily="34" charset="-122"/>
+                <a:cs typeface="HYSinMyeongJo-Medium" pitchFamily="34" charset="-120"/>
               </a:rPr>
               <a:t>1</a:t>
             </a:r>
@@ -2318,7 +2192,7 @@
           <a:bodyPr wrap="square" lIns="0" tIns="0" rIns="0" bIns="0" rtlCol="0" anchor="ctr"/>
           <a:lstStyle/>
           <a:p>
-            <a:pPr algn="ctr" indent="0" marL="0">
+            <a:pPr marL="0" indent="0" algn="ctr">
               <a:buNone/>
             </a:pPr>
             <a:r>
@@ -2326,9 +2200,9 @@
                 <a:solidFill>
                   <a:srgbClr val="2E1A0F"/>
                 </a:solidFill>
-                <a:latin typeface="Cambria" pitchFamily="34" charset="0"/>
-                <a:ea typeface="Cambria" pitchFamily="34" charset="-122"/>
-                <a:cs typeface="Cambria" pitchFamily="34" charset="-120"/>
+                <a:latin typeface="HYSinMyeongJo-Medium" pitchFamily="34" charset="0"/>
+                <a:ea typeface="HYSinMyeongJo-Medium" pitchFamily="34" charset="-122"/>
+                <a:cs typeface="HYSinMyeongJo-Medium" pitchFamily="34" charset="-120"/>
               </a:rPr>
               <a:t>홈</a:t>
             </a:r>
@@ -2357,19 +2231,65 @@
           <a:bodyPr wrap="square" lIns="0" tIns="0" rIns="0" bIns="0" rtlCol="0" anchor="ctr"/>
           <a:lstStyle/>
           <a:p>
-            <a:pPr algn="ctr" indent="0" marL="0">
-              <a:buNone/>
-            </a:pPr>
+            <a:pPr marL="0" indent="0" algn="ctr">
+              <a:buNone/>
+            </a:pPr>
+            <a:r>
+              <a:rPr lang="en-US" sz="900" dirty="0" err="1">
+                <a:solidFill>
+                  <a:srgbClr val="2E1A0F"/>
+                </a:solidFill>
+                <a:latin typeface="HYSinMyeongJo-Medium" pitchFamily="34" charset="0"/>
+                <a:ea typeface="HYSinMyeongJo-Medium" pitchFamily="34" charset="-122"/>
+                <a:cs typeface="HYSinMyeongJo-Medium" pitchFamily="34" charset="-120"/>
+              </a:rPr>
+              <a:t>서비스</a:t>
+            </a:r>
             <a:r>
               <a:rPr lang="en-US" sz="900" dirty="0">
                 <a:solidFill>
                   <a:srgbClr val="2E1A0F"/>
                 </a:solidFill>
-                <a:latin typeface="Calibri" pitchFamily="34" charset="0"/>
-                <a:ea typeface="Calibri" pitchFamily="34" charset="-122"/>
-                <a:cs typeface="Calibri" pitchFamily="34" charset="-120"/>
-              </a:rPr>
-              <a:t>서비스 소개, 시작하기</a:t>
+                <a:latin typeface="HYSinMyeongJo-Medium" pitchFamily="34" charset="0"/>
+                <a:ea typeface="HYSinMyeongJo-Medium" pitchFamily="34" charset="-122"/>
+                <a:cs typeface="HYSinMyeongJo-Medium" pitchFamily="34" charset="-120"/>
+              </a:rPr>
+              <a:t> </a:t>
+            </a:r>
+            <a:r>
+              <a:rPr lang="en-US" sz="900" dirty="0" err="1">
+                <a:solidFill>
+                  <a:srgbClr val="2E1A0F"/>
+                </a:solidFill>
+                <a:latin typeface="HYSinMyeongJo-Medium" pitchFamily="34" charset="0"/>
+                <a:ea typeface="HYSinMyeongJo-Medium" pitchFamily="34" charset="-122"/>
+                <a:cs typeface="HYSinMyeongJo-Medium" pitchFamily="34" charset="-120"/>
+              </a:rPr>
+              <a:t>소개</a:t>
+            </a:r>
+            <a:endParaRPr lang="en-US" sz="900" dirty="0">
+              <a:solidFill>
+                <a:srgbClr val="2E1A0F"/>
+              </a:solidFill>
+              <a:latin typeface="HYSinMyeongJo-Medium" pitchFamily="34" charset="0"/>
+              <a:ea typeface="HYSinMyeongJo-Medium" pitchFamily="34" charset="-122"/>
+              <a:cs typeface="HYSinMyeongJo-Medium" pitchFamily="34" charset="-120"/>
+            </a:endParaRPr>
+          </a:p>
+          <a:p>
+            <a:pPr marL="0" indent="0" algn="ctr">
+              <a:buNone/>
+            </a:pPr>
+            <a:r>
+              <a:rPr lang="en-US" sz="900" dirty="0" err="1">
+                <a:solidFill>
+                  <a:srgbClr val="2E1A0F"/>
+                </a:solidFill>
+                <a:latin typeface="HYSinMyeongJo-Medium" pitchFamily="34" charset="0"/>
+                <a:ea typeface="HYSinMyeongJo-Medium" pitchFamily="34" charset="-122"/>
+                <a:cs typeface="HYSinMyeongJo-Medium" pitchFamily="34" charset="-120"/>
+              </a:rPr>
+              <a:t>시작하기</a:t>
             </a:r>
             <a:endParaRPr lang="en-US" sz="900" dirty="0"/>
           </a:p>
@@ -2416,7 +2336,7 @@
             </a:avLst>
           </a:prstGeom>
           <a:solidFill>
-            <a:srgbClr val="FBF5EB"/>
+            <a:srgbClr val="FFFFFF"/>
           </a:solidFill>
           <a:ln/>
         </p:spPr>
@@ -2442,7 +2362,7 @@
           <a:bodyPr wrap="square" lIns="0" tIns="0" rIns="0" bIns="0" rtlCol="0" anchor="ctr"/>
           <a:lstStyle/>
           <a:p>
-            <a:pPr algn="ctr" indent="0" marL="0">
+            <a:pPr marL="0" indent="0" algn="ctr">
               <a:buNone/>
             </a:pPr>
             <a:r>
@@ -2450,9 +2370,9 @@
                 <a:solidFill>
                   <a:srgbClr val="C17F3E"/>
                 </a:solidFill>
-                <a:latin typeface="Calibri" pitchFamily="34" charset="0"/>
-                <a:ea typeface="Calibri" pitchFamily="34" charset="-122"/>
-                <a:cs typeface="Calibri" pitchFamily="34" charset="-120"/>
+                <a:latin typeface="HYSinMyeongJo-Medium" pitchFamily="34" charset="0"/>
+                <a:ea typeface="HYSinMyeongJo-Medium" pitchFamily="34" charset="-122"/>
+                <a:cs typeface="HYSinMyeongJo-Medium" pitchFamily="34" charset="-120"/>
               </a:rPr>
               <a:t>2</a:t>
             </a:r>
@@ -2481,7 +2401,7 @@
           <a:bodyPr wrap="square" lIns="0" tIns="0" rIns="0" bIns="0" rtlCol="0" anchor="ctr"/>
           <a:lstStyle/>
           <a:p>
-            <a:pPr algn="ctr" indent="0" marL="0">
+            <a:pPr marL="0" indent="0" algn="ctr">
               <a:buNone/>
             </a:pPr>
             <a:r>
@@ -2489,9 +2409,9 @@
                 <a:solidFill>
                   <a:srgbClr val="2E1A0F"/>
                 </a:solidFill>
-                <a:latin typeface="Cambria" pitchFamily="34" charset="0"/>
-                <a:ea typeface="Cambria" pitchFamily="34" charset="-122"/>
-                <a:cs typeface="Cambria" pitchFamily="34" charset="-120"/>
+                <a:latin typeface="HYSinMyeongJo-Medium" pitchFamily="34" charset="0"/>
+                <a:ea typeface="HYSinMyeongJo-Medium" pitchFamily="34" charset="-122"/>
+                <a:cs typeface="HYSinMyeongJo-Medium" pitchFamily="34" charset="-120"/>
               </a:rPr>
               <a:t>정보 입력</a:t>
             </a:r>
@@ -2520,7 +2440,7 @@
           <a:bodyPr wrap="square" lIns="0" tIns="0" rIns="0" bIns="0" rtlCol="0" anchor="ctr"/>
           <a:lstStyle/>
           <a:p>
-            <a:pPr algn="ctr" indent="0" marL="0">
+            <a:pPr marL="0" indent="0" algn="ctr">
               <a:buNone/>
             </a:pPr>
             <a:r>
@@ -2528,9 +2448,9 @@
                 <a:solidFill>
                   <a:srgbClr val="2E1A0F"/>
                 </a:solidFill>
-                <a:latin typeface="Calibri" pitchFamily="34" charset="0"/>
-                <a:ea typeface="Calibri" pitchFamily="34" charset="-122"/>
-                <a:cs typeface="Calibri" pitchFamily="34" charset="-120"/>
+                <a:latin typeface="HYSinMyeongJo-Medium" pitchFamily="34" charset="0"/>
+                <a:ea typeface="HYSinMyeongJo-Medium" pitchFamily="34" charset="-122"/>
+                <a:cs typeface="HYSinMyeongJo-Medium" pitchFamily="34" charset="-120"/>
               </a:rPr>
               <a:t>자연어 + 조건 입력</a:t>
             </a:r>
@@ -2579,7 +2499,7 @@
             </a:avLst>
           </a:prstGeom>
           <a:solidFill>
-            <a:srgbClr val="FBF5EB"/>
+            <a:srgbClr val="FFFFFF"/>
           </a:solidFill>
           <a:ln/>
         </p:spPr>
@@ -2605,7 +2525,7 @@
           <a:bodyPr wrap="square" lIns="0" tIns="0" rIns="0" bIns="0" rtlCol="0" anchor="ctr"/>
           <a:lstStyle/>
           <a:p>
-            <a:pPr algn="ctr" indent="0" marL="0">
+            <a:pPr marL="0" indent="0" algn="ctr">
               <a:buNone/>
             </a:pPr>
             <a:r>
@@ -2613,9 +2533,9 @@
                 <a:solidFill>
                   <a:srgbClr val="C17F3E"/>
                 </a:solidFill>
-                <a:latin typeface="Calibri" pitchFamily="34" charset="0"/>
-                <a:ea typeface="Calibri" pitchFamily="34" charset="-122"/>
-                <a:cs typeface="Calibri" pitchFamily="34" charset="-120"/>
+                <a:latin typeface="HYSinMyeongJo-Medium" pitchFamily="34" charset="0"/>
+                <a:ea typeface="HYSinMyeongJo-Medium" pitchFamily="34" charset="-122"/>
+                <a:cs typeface="HYSinMyeongJo-Medium" pitchFamily="34" charset="-120"/>
               </a:rPr>
               <a:t>3</a:t>
             </a:r>
@@ -2644,7 +2564,7 @@
           <a:bodyPr wrap="square" lIns="0" tIns="0" rIns="0" bIns="0" rtlCol="0" anchor="ctr"/>
           <a:lstStyle/>
           <a:p>
-            <a:pPr algn="ctr" indent="0" marL="0">
+            <a:pPr marL="0" indent="0" algn="ctr">
               <a:buNone/>
             </a:pPr>
             <a:r>
@@ -2652,9 +2572,9 @@
                 <a:solidFill>
                   <a:srgbClr val="2E1A0F"/>
                 </a:solidFill>
-                <a:latin typeface="Cambria" pitchFamily="34" charset="0"/>
-                <a:ea typeface="Cambria" pitchFamily="34" charset="-122"/>
-                <a:cs typeface="Cambria" pitchFamily="34" charset="-120"/>
+                <a:latin typeface="HYSinMyeongJo-Medium" pitchFamily="34" charset="0"/>
+                <a:ea typeface="HYSinMyeongJo-Medium" pitchFamily="34" charset="-122"/>
+                <a:cs typeface="HYSinMyeongJo-Medium" pitchFamily="34" charset="-120"/>
               </a:rPr>
               <a:t>처리 중</a:t>
             </a:r>
@@ -2683,7 +2603,7 @@
           <a:bodyPr wrap="square" lIns="0" tIns="0" rIns="0" bIns="0" rtlCol="0" anchor="ctr"/>
           <a:lstStyle/>
           <a:p>
-            <a:pPr algn="ctr" indent="0" marL="0">
+            <a:pPr marL="0" indent="0" algn="ctr">
               <a:buNone/>
             </a:pPr>
             <a:r>
@@ -2691,9 +2611,9 @@
                 <a:solidFill>
                   <a:srgbClr val="2E1A0F"/>
                 </a:solidFill>
-                <a:latin typeface="Calibri" pitchFamily="34" charset="0"/>
-                <a:ea typeface="Calibri" pitchFamily="34" charset="-122"/>
-                <a:cs typeface="Calibri" pitchFamily="34" charset="-120"/>
+                <a:latin typeface="HYSinMyeongJo-Medium" pitchFamily="34" charset="0"/>
+                <a:ea typeface="HYSinMyeongJo-Medium" pitchFamily="34" charset="-122"/>
+                <a:cs typeface="HYSinMyeongJo-Medium" pitchFamily="34" charset="-120"/>
               </a:rPr>
               <a:t>모델 계산 진행</a:t>
             </a:r>
@@ -2742,7 +2662,7 @@
             </a:avLst>
           </a:prstGeom>
           <a:solidFill>
-            <a:srgbClr val="FBF5EB"/>
+            <a:srgbClr val="FFFFFF"/>
           </a:solidFill>
           <a:ln/>
         </p:spPr>
@@ -2768,7 +2688,7 @@
           <a:bodyPr wrap="square" lIns="0" tIns="0" rIns="0" bIns="0" rtlCol="0" anchor="ctr"/>
           <a:lstStyle/>
           <a:p>
-            <a:pPr algn="ctr" indent="0" marL="0">
+            <a:pPr marL="0" indent="0" algn="ctr">
               <a:buNone/>
             </a:pPr>
             <a:r>
@@ -2776,9 +2696,9 @@
                 <a:solidFill>
                   <a:srgbClr val="C17F3E"/>
                 </a:solidFill>
-                <a:latin typeface="Calibri" pitchFamily="34" charset="0"/>
-                <a:ea typeface="Calibri" pitchFamily="34" charset="-122"/>
-                <a:cs typeface="Calibri" pitchFamily="34" charset="-120"/>
+                <a:latin typeface="HYSinMyeongJo-Medium" pitchFamily="34" charset="0"/>
+                <a:ea typeface="HYSinMyeongJo-Medium" pitchFamily="34" charset="-122"/>
+                <a:cs typeface="HYSinMyeongJo-Medium" pitchFamily="34" charset="-120"/>
               </a:rPr>
               <a:t>4</a:t>
             </a:r>
@@ -2807,7 +2727,7 @@
           <a:bodyPr wrap="square" lIns="0" tIns="0" rIns="0" bIns="0" rtlCol="0" anchor="ctr"/>
           <a:lstStyle/>
           <a:p>
-            <a:pPr algn="ctr" indent="0" marL="0">
+            <a:pPr marL="0" indent="0" algn="ctr">
               <a:buNone/>
             </a:pPr>
             <a:r>
@@ -2815,9 +2735,9 @@
                 <a:solidFill>
                   <a:srgbClr val="2E1A0F"/>
                 </a:solidFill>
-                <a:latin typeface="Cambria" pitchFamily="34" charset="0"/>
-                <a:ea typeface="Cambria" pitchFamily="34" charset="-122"/>
-                <a:cs typeface="Cambria" pitchFamily="34" charset="-120"/>
+                <a:latin typeface="HYSinMyeongJo-Medium" pitchFamily="34" charset="0"/>
+                <a:ea typeface="HYSinMyeongJo-Medium" pitchFamily="34" charset="-122"/>
+                <a:cs typeface="HYSinMyeongJo-Medium" pitchFamily="34" charset="-120"/>
               </a:rPr>
               <a:t>결과</a:t>
             </a:r>
@@ -2846,7 +2766,7 @@
           <a:bodyPr wrap="square" lIns="0" tIns="0" rIns="0" bIns="0" rtlCol="0" anchor="ctr"/>
           <a:lstStyle/>
           <a:p>
-            <a:pPr algn="ctr" indent="0" marL="0">
+            <a:pPr marL="0" indent="0" algn="ctr">
               <a:buNone/>
             </a:pPr>
             <a:r>
@@ -2854,9 +2774,9 @@
                 <a:solidFill>
                   <a:srgbClr val="2E1A0F"/>
                 </a:solidFill>
-                <a:latin typeface="Calibri" pitchFamily="34" charset="0"/>
-                <a:ea typeface="Calibri" pitchFamily="34" charset="-122"/>
-                <a:cs typeface="Calibri" pitchFamily="34" charset="-120"/>
+                <a:latin typeface="HYSinMyeongJo-Medium" pitchFamily="34" charset="0"/>
+                <a:ea typeface="HYSinMyeongJo-Medium" pitchFamily="34" charset="-122"/>
+                <a:cs typeface="HYSinMyeongJo-Medium" pitchFamily="34" charset="-120"/>
               </a:rPr>
               <a:t>각성도 그래프 + 추천</a:t>
             </a:r>
@@ -2905,7 +2825,7 @@
             </a:avLst>
           </a:prstGeom>
           <a:solidFill>
-            <a:srgbClr val="FBF5EB"/>
+            <a:srgbClr val="FFFFFF"/>
           </a:solidFill>
           <a:ln/>
         </p:spPr>
@@ -2931,7 +2851,7 @@
           <a:bodyPr wrap="square" lIns="0" tIns="0" rIns="0" bIns="0" rtlCol="0" anchor="ctr"/>
           <a:lstStyle/>
           <a:p>
-            <a:pPr algn="ctr" indent="0" marL="0">
+            <a:pPr marL="0" indent="0" algn="ctr">
               <a:buNone/>
             </a:pPr>
             <a:r>
@@ -2939,9 +2859,9 @@
                 <a:solidFill>
                   <a:srgbClr val="C17F3E"/>
                 </a:solidFill>
-                <a:latin typeface="Calibri" pitchFamily="34" charset="0"/>
-                <a:ea typeface="Calibri" pitchFamily="34" charset="-122"/>
-                <a:cs typeface="Calibri" pitchFamily="34" charset="-120"/>
+                <a:latin typeface="HYSinMyeongJo-Medium" pitchFamily="34" charset="0"/>
+                <a:ea typeface="HYSinMyeongJo-Medium" pitchFamily="34" charset="-122"/>
+                <a:cs typeface="HYSinMyeongJo-Medium" pitchFamily="34" charset="-120"/>
               </a:rPr>
               <a:t>5</a:t>
             </a:r>
@@ -2970,7 +2890,7 @@
           <a:bodyPr wrap="square" lIns="0" tIns="0" rIns="0" bIns="0" rtlCol="0" anchor="ctr"/>
           <a:lstStyle/>
           <a:p>
-            <a:pPr algn="ctr" indent="0" marL="0">
+            <a:pPr marL="0" indent="0" algn="ctr">
               <a:buNone/>
             </a:pPr>
             <a:r>
@@ -2978,9 +2898,9 @@
                 <a:solidFill>
                   <a:srgbClr val="2E1A0F"/>
                 </a:solidFill>
-                <a:latin typeface="Cambria" pitchFamily="34" charset="0"/>
-                <a:ea typeface="Cambria" pitchFamily="34" charset="-122"/>
-                <a:cs typeface="Cambria" pitchFamily="34" charset="-120"/>
+                <a:latin typeface="HYSinMyeongJo-Medium" pitchFamily="34" charset="0"/>
+                <a:ea typeface="HYSinMyeongJo-Medium" pitchFamily="34" charset="-122"/>
+                <a:cs typeface="HYSinMyeongJo-Medium" pitchFamily="34" charset="-120"/>
               </a:rPr>
               <a:t>스케줄 조정</a:t>
             </a:r>
@@ -3009,7 +2929,7 @@
           <a:bodyPr wrap="square" lIns="0" tIns="0" rIns="0" bIns="0" rtlCol="0" anchor="ctr"/>
           <a:lstStyle/>
           <a:p>
-            <a:pPr algn="ctr" indent="0" marL="0">
+            <a:pPr marL="0" indent="0" algn="ctr">
               <a:buNone/>
             </a:pPr>
             <a:r>
@@ -3017,9 +2937,9 @@
                 <a:solidFill>
                   <a:srgbClr val="2E1A0F"/>
                 </a:solidFill>
-                <a:latin typeface="Calibri" pitchFamily="34" charset="0"/>
-                <a:ea typeface="Calibri" pitchFamily="34" charset="-122"/>
-                <a:cs typeface="Calibri" pitchFamily="34" charset="-120"/>
+                <a:latin typeface="HYSinMyeongJo-Medium" pitchFamily="34" charset="0"/>
+                <a:ea typeface="HYSinMyeongJo-Medium" pitchFamily="34" charset="-122"/>
+                <a:cs typeface="HYSinMyeongJo-Medium" pitchFamily="34" charset="-120"/>
               </a:rPr>
               <a:t>슬라이더로 직접 조정</a:t>
             </a:r>
@@ -3029,22 +2949,22 @@
       </p:sp>
       <p:pic>
         <p:nvPicPr>
-          <p:cNvPr id="28" name="Image 0" descr="preencoded.png">    </p:cNvPr>
+          <p:cNvPr id="28" name="Image 0" descr="preencoded.png"/>
           <p:cNvPicPr>
             <a:picLocks noChangeAspect="1"/>
           </p:cNvPicPr>
           <p:nvPr/>
         </p:nvPicPr>
         <p:blipFill>
-          <a:blip r:embed="rId1"/>
+          <a:blip r:embed="rId3"/>
           <a:stretch>
             <a:fillRect/>
           </a:stretch>
         </p:blipFill>
         <p:spPr>
           <a:xfrm>
-            <a:off x="4389120" y="3273552"/>
-            <a:ext cx="3474720" cy="781812"/>
+            <a:off x="4389120" y="3255264"/>
+            <a:ext cx="3474720" cy="521208"/>
           </a:xfrm>
           <a:prstGeom prst="rect">
             <a:avLst/>
@@ -3059,8 +2979,8 @@
         </p:nvSpPr>
         <p:spPr>
           <a:xfrm>
-            <a:off x="457200" y="4101084"/>
-            <a:ext cx="8229600" cy="320040"/>
+            <a:off x="457200" y="3803904"/>
+            <a:ext cx="8229600" cy="274320"/>
           </a:xfrm>
           <a:prstGeom prst="rect">
             <a:avLst/>
@@ -3072,7 +2992,7 @@
           <a:bodyPr wrap="square" lIns="0" tIns="0" rIns="0" bIns="0" rtlCol="0" anchor="ctr"/>
           <a:lstStyle/>
           <a:p>
-            <a:pPr algn="ctr" indent="0" marL="0">
+            <a:pPr marL="0" indent="0" algn="ctr">
               <a:buNone/>
             </a:pPr>
             <a:r>
@@ -3080,13 +3000,74 @@
                 <a:solidFill>
                   <a:srgbClr val="8A6C52"/>
                 </a:solidFill>
-                <a:latin typeface="Calibri" pitchFamily="34" charset="0"/>
-                <a:ea typeface="Calibri" pitchFamily="34" charset="-122"/>
-                <a:cs typeface="Calibri" pitchFamily="34" charset="-120"/>
+                <a:latin typeface="HYSinMyeongJo-Medium" pitchFamily="34" charset="0"/>
+                <a:ea typeface="HYSinMyeongJo-Medium" pitchFamily="34" charset="-122"/>
+                <a:cs typeface="HYSinMyeongJo-Medium" pitchFamily="34" charset="-120"/>
               </a:rPr>
               <a:t>스케줄 조정에서 조건을 바꾸면 처리 중으로 돌아가 재계산</a:t>
             </a:r>
             <a:endParaRPr lang="en-US" sz="1100" dirty="0"/>
+          </a:p>
+        </p:txBody>
+      </p:sp>
+      <p:sp>
+        <p:nvSpPr>
+          <p:cNvPr id="30" name="Shape 27"/>
+          <p:cNvSpPr/>
+          <p:nvPr/>
+        </p:nvSpPr>
+        <p:spPr>
+          <a:xfrm>
+            <a:off x="822960" y="4151376"/>
+            <a:ext cx="7498080" cy="457200"/>
+          </a:xfrm>
+          <a:prstGeom prst="roundRect">
+            <a:avLst>
+              <a:gd name="adj" fmla="val 16000"/>
+            </a:avLst>
+          </a:prstGeom>
+          <a:solidFill>
+            <a:srgbClr val="FFFFFF"/>
+          </a:solidFill>
+          <a:ln/>
+        </p:spPr>
+      </p:sp>
+      <p:sp>
+        <p:nvSpPr>
+          <p:cNvPr id="31" name="Text 28"/>
+          <p:cNvSpPr/>
+          <p:nvPr/>
+        </p:nvSpPr>
+        <p:spPr>
+          <a:xfrm>
+            <a:off x="822960" y="4151376"/>
+            <a:ext cx="7498080" cy="457200"/>
+          </a:xfrm>
+          <a:prstGeom prst="rect">
+            <a:avLst/>
+          </a:prstGeom>
+          <a:noFill/>
+          <a:ln/>
+        </p:spPr>
+        <p:txBody>
+          <a:bodyPr wrap="square" lIns="0" tIns="0" rIns="0" bIns="0" rtlCol="0" anchor="ctr"/>
+          <a:lstStyle/>
+          <a:p>
+            <a:pPr marL="0" indent="0" algn="ctr">
+              <a:buNone/>
+            </a:pPr>
+            <a:r>
+              <a:rPr lang="en-US" sz="1200" b="1" dirty="0">
+                <a:solidFill>
+                  <a:srgbClr val="2E1A0F"/>
+                </a:solidFill>
+                <a:latin typeface="HYSinMyeongJo-Medium" pitchFamily="34" charset="0"/>
+                <a:ea typeface="HYSinMyeongJo-Medium" pitchFamily="34" charset="-122"/>
+                <a:cs typeface="HYSinMyeongJo-Medium" pitchFamily="34" charset="-120"/>
+              </a:rPr>
+              <a:t>개인별 데이터를 축적하여 더 정확한 모델로 점점 발전</a:t>
+            </a:r>
+            <a:endParaRPr lang="en-US" sz="1200" dirty="0"/>
           </a:p>
         </p:txBody>
       </p:sp>
@@ -3104,8 +3085,9 @@
     <p:bg>
       <p:bgPr>
         <a:solidFill>
-          <a:srgbClr val="FBF7F2"/>
+          <a:srgbClr val="2E1A0F"/>
         </a:solidFill>
+        <a:effectLst/>
       </p:bgPr>
     </p:bg>
     <p:spTree>
@@ -3143,19 +3125,19 @@
           <a:bodyPr wrap="square" lIns="0" tIns="0" rIns="0" bIns="0" rtlCol="0" anchor="ctr"/>
           <a:lstStyle/>
           <a:p>
-            <a:pPr algn="l" indent="0" marL="0">
+            <a:pPr marL="0" indent="0" algn="l">
               <a:buNone/>
             </a:pPr>
             <a:r>
               <a:rPr lang="en-US" sz="3000" b="1" dirty="0">
                 <a:solidFill>
-                  <a:srgbClr val="2E1A0F"/>
-                </a:solidFill>
-                <a:latin typeface="Cambria" pitchFamily="34" charset="0"/>
-                <a:ea typeface="Cambria" pitchFamily="34" charset="-122"/>
-                <a:cs typeface="Cambria" pitchFamily="34" charset="-120"/>
-              </a:rPr>
-              <a:t>화면 목록</a:t>
+                  <a:srgbClr val="EDE0D0"/>
+                </a:solidFill>
+                <a:latin typeface="HYSinMyeongJo-Medium" pitchFamily="34" charset="0"/>
+                <a:ea typeface="HYSinMyeongJo-Medium" pitchFamily="34" charset="-122"/>
+                <a:cs typeface="HYSinMyeongJo-Medium" pitchFamily="34" charset="-120"/>
+              </a:rPr>
+              <a:t>와이어프레임 · 홈 / 정보 입력</a:t>
             </a:r>
             <a:endParaRPr lang="en-US" sz="3000" dirty="0"/>
           </a:p>
@@ -3178,70 +3160,21 @@
             </a:avLst>
           </a:prstGeom>
           <a:solidFill>
-            <a:srgbClr val="F3E7D6"/>
+            <a:srgbClr val="F7EEE0"/>
           </a:solidFill>
           <a:ln/>
-          <a:effectLst>
-            <a:outerShdw sx="100000" sy="100000" kx="0" ky="0" algn="bl" rotWithShape="0" blurRad="101600" dist="38100" dir="5400000">
-              <a:srgbClr val="000000">
-                <a:alpha val="10000"/>
-              </a:srgbClr>
-            </a:outerShdw>
-          </a:effectLst>
-        </p:spPr>
-      </p:sp>
-      <p:sp>
-        <p:nvSpPr>
-          <p:cNvPr id="4" name="Shape 2"/>
-          <p:cNvSpPr/>
-          <p:nvPr/>
-        </p:nvSpPr>
-        <p:spPr>
-          <a:xfrm>
-            <a:off x="822960" y="1417320"/>
-            <a:ext cx="7040880" cy="502920"/>
-          </a:xfrm>
-          <a:prstGeom prst="roundRect">
-            <a:avLst>
-              <a:gd name="adj" fmla="val 14545"/>
-            </a:avLst>
-          </a:prstGeom>
-          <a:solidFill>
-            <a:srgbClr val="FBF5EB"/>
-          </a:solidFill>
-          <a:ln/>
-        </p:spPr>
-      </p:sp>
-      <p:sp>
-        <p:nvSpPr>
-          <p:cNvPr id="5" name="Shape 3"/>
-          <p:cNvSpPr/>
-          <p:nvPr/>
-        </p:nvSpPr>
-        <p:spPr>
-          <a:xfrm>
-            <a:off x="1051560" y="1499616"/>
-            <a:ext cx="338328" cy="338328"/>
-          </a:xfrm>
-          <a:prstGeom prst="ellipse">
-            <a:avLst/>
-          </a:prstGeom>
-          <a:solidFill>
-            <a:srgbClr val="C17F3E"/>
-          </a:solidFill>
-          <a:ln/>
-        </p:spPr>
-      </p:sp>
-      <p:sp>
-        <p:nvSpPr>
-          <p:cNvPr id="6" name="Text 4"/>
-          <p:cNvSpPr/>
-          <p:nvPr/>
-        </p:nvSpPr>
-        <p:spPr>
-          <a:xfrm>
-            <a:off x="1051560" y="1499616"/>
-            <a:ext cx="338328" cy="338328"/>
+        </p:spPr>
+      </p:sp>
+      <p:sp>
+        <p:nvSpPr>
+          <p:cNvPr id="4" name="Text 2"/>
+          <p:cNvSpPr/>
+          <p:nvPr/>
+        </p:nvSpPr>
+        <p:spPr>
+          <a:xfrm>
+            <a:off x="822960" y="1188720"/>
+            <a:ext cx="3657600" cy="320040"/>
           </a:xfrm>
           <a:prstGeom prst="rect">
             <a:avLst/>
@@ -3253,34 +3186,90 @@
           <a:bodyPr wrap="square" lIns="0" tIns="0" rIns="0" bIns="0" rtlCol="0" anchor="ctr"/>
           <a:lstStyle/>
           <a:p>
-            <a:pPr algn="ctr" indent="0" marL="0">
-              <a:buNone/>
-            </a:pPr>
-            <a:r>
-              <a:rPr lang="en-US" sz="1200" b="1" dirty="0">
-                <a:solidFill>
-                  <a:srgbClr val="FBF7F2"/>
-                </a:solidFill>
-                <a:latin typeface="Calibri" pitchFamily="34" charset="0"/>
-                <a:ea typeface="Calibri" pitchFamily="34" charset="-122"/>
-                <a:cs typeface="Calibri" pitchFamily="34" charset="-120"/>
-              </a:rPr>
-              <a:t>1</a:t>
-            </a:r>
-            <a:endParaRPr lang="en-US" sz="1200" dirty="0"/>
-          </a:p>
-        </p:txBody>
-      </p:sp>
-      <p:sp>
-        <p:nvSpPr>
-          <p:cNvPr id="7" name="Text 5"/>
-          <p:cNvSpPr/>
-          <p:nvPr/>
-        </p:nvSpPr>
-        <p:spPr>
-          <a:xfrm>
-            <a:off x="1554480" y="1417320"/>
-            <a:ext cx="2011680" cy="502920"/>
+            <a:pPr marL="0" indent="0" algn="ctr">
+              <a:buNone/>
+            </a:pPr>
+            <a:r>
+              <a:rPr lang="en-US" sz="1600" b="1" dirty="0">
+                <a:solidFill>
+                  <a:srgbClr val="2E1A0F"/>
+                </a:solidFill>
+                <a:latin typeface="HYSinMyeongJo-Medium" pitchFamily="34" charset="0"/>
+                <a:ea typeface="HYSinMyeongJo-Medium" pitchFamily="34" charset="-122"/>
+                <a:cs typeface="HYSinMyeongJo-Medium" pitchFamily="34" charset="-120"/>
+              </a:rPr>
+              <a:t>① 홈</a:t>
+            </a:r>
+            <a:endParaRPr lang="en-US" sz="1600" dirty="0"/>
+          </a:p>
+        </p:txBody>
+      </p:sp>
+      <p:sp>
+        <p:nvSpPr>
+          <p:cNvPr id="6" name="Text 3"/>
+          <p:cNvSpPr/>
+          <p:nvPr/>
+        </p:nvSpPr>
+        <p:spPr>
+          <a:xfrm>
+            <a:off x="981047" y="4138206"/>
+            <a:ext cx="3474720" cy="470916"/>
+          </a:xfrm>
+          <a:prstGeom prst="rect">
+            <a:avLst/>
+          </a:prstGeom>
+          <a:noFill/>
+          <a:ln/>
+        </p:spPr>
+        <p:txBody>
+          <a:bodyPr wrap="square" lIns="0" tIns="0" rIns="0" bIns="0" rtlCol="0" anchor="t"/>
+          <a:lstStyle/>
+          <a:p>
+            <a:pPr marL="0" indent="0" algn="ctr">
+              <a:buNone/>
+            </a:pPr>
+            <a:r>
+              <a:rPr lang="en-US" sz="950" b="1" dirty="0">
+                <a:solidFill>
+                  <a:srgbClr val="8A6C52"/>
+                </a:solidFill>
+                <a:latin typeface="HYSinMyeongJo-Medium" pitchFamily="34" charset="0"/>
+                <a:ea typeface="HYSinMyeongJo-Medium" pitchFamily="34" charset="-122"/>
+                <a:cs typeface="HYSinMyeongJo-Medium" pitchFamily="34" charset="-120"/>
+              </a:rPr>
+              <a:t>사용자가 처음으로 만나는 화면</a:t>
+            </a:r>
+            <a:endParaRPr lang="en-US" sz="950" dirty="0"/>
+          </a:p>
+          <a:p>
+            <a:pPr marL="0" indent="0" algn="ctr">
+              <a:buNone/>
+            </a:pPr>
+            <a:r>
+              <a:rPr lang="en-US" sz="950" dirty="0">
+                <a:solidFill>
+                  <a:srgbClr val="8A6C52"/>
+                </a:solidFill>
+                <a:latin typeface="HYSinMyeongJo-Medium" pitchFamily="34" charset="0"/>
+                <a:ea typeface="HYSinMyeongJo-Medium" pitchFamily="34" charset="-122"/>
+                <a:cs typeface="HYSinMyeongJo-Medium" pitchFamily="34" charset="-120"/>
+              </a:rPr>
+              <a:t>서비스 소개, 이전 계산 결과</a:t>
+            </a:r>
+            <a:endParaRPr lang="en-US" sz="950" dirty="0"/>
+          </a:p>
+        </p:txBody>
+      </p:sp>
+      <p:sp>
+        <p:nvSpPr>
+          <p:cNvPr id="7" name="Text 4"/>
+          <p:cNvSpPr/>
+          <p:nvPr/>
+        </p:nvSpPr>
+        <p:spPr>
+          <a:xfrm>
+            <a:off x="4663440" y="1188720"/>
+            <a:ext cx="3657600" cy="320040"/>
           </a:xfrm>
           <a:prstGeom prst="rect">
             <a:avLst/>
@@ -3292,699 +3281,183 @@
           <a:bodyPr wrap="square" lIns="0" tIns="0" rIns="0" bIns="0" rtlCol="0" anchor="ctr"/>
           <a:lstStyle/>
           <a:p>
-            <a:pPr algn="l" indent="0" marL="0">
-              <a:buNone/>
-            </a:pPr>
-            <a:r>
-              <a:rPr lang="en-US" sz="1500" b="1" dirty="0">
-                <a:solidFill>
-                  <a:srgbClr val="2E1A0F"/>
-                </a:solidFill>
-                <a:latin typeface="Cambria" pitchFamily="34" charset="0"/>
-                <a:ea typeface="Cambria" pitchFamily="34" charset="-122"/>
-                <a:cs typeface="Cambria" pitchFamily="34" charset="-120"/>
-              </a:rPr>
-              <a:t>홈</a:t>
-            </a:r>
-            <a:endParaRPr lang="en-US" sz="1500" dirty="0"/>
-          </a:p>
-        </p:txBody>
-      </p:sp>
-      <p:sp>
-        <p:nvSpPr>
-          <p:cNvPr id="8" name="Text 6"/>
-          <p:cNvSpPr/>
-          <p:nvPr/>
-        </p:nvSpPr>
-        <p:spPr>
-          <a:xfrm>
-            <a:off x="3657600" y="1417320"/>
-            <a:ext cx="4023360" cy="502920"/>
-          </a:xfrm>
-          <a:prstGeom prst="rect">
-            <a:avLst/>
-          </a:prstGeom>
-          <a:noFill/>
-          <a:ln/>
-        </p:spPr>
-        <p:txBody>
-          <a:bodyPr wrap="square" lIns="0" tIns="0" rIns="0" bIns="0" rtlCol="0" anchor="ctr"/>
-          <a:lstStyle/>
-          <a:p>
-            <a:pPr algn="l" indent="0" marL="0">
-              <a:buNone/>
-            </a:pPr>
-            <a:r>
-              <a:rPr lang="en-US" sz="1200" dirty="0">
+            <a:pPr marL="0" indent="0" algn="ctr">
+              <a:buNone/>
+            </a:pPr>
+            <a:r>
+              <a:rPr lang="en-US" sz="1600" b="1" dirty="0">
+                <a:solidFill>
+                  <a:srgbClr val="2E1A0F"/>
+                </a:solidFill>
+                <a:latin typeface="HYSinMyeongJo-Medium" pitchFamily="34" charset="0"/>
+                <a:ea typeface="HYSinMyeongJo-Medium" pitchFamily="34" charset="-122"/>
+                <a:cs typeface="HYSinMyeongJo-Medium" pitchFamily="34" charset="-120"/>
+              </a:rPr>
+              <a:t>② 정보 입력</a:t>
+            </a:r>
+            <a:endParaRPr lang="en-US" sz="1600" dirty="0"/>
+          </a:p>
+        </p:txBody>
+      </p:sp>
+      <p:pic>
+        <p:nvPicPr>
+          <p:cNvPr id="8" name="Image 1" descr="../screens/input-screen.png"/>
+          <p:cNvPicPr>
+            <a:picLocks noChangeAspect="1"/>
+          </p:cNvPicPr>
+          <p:nvPr/>
+        </p:nvPicPr>
+        <p:blipFill>
+          <a:blip r:embed="rId3"/>
+          <a:stretch>
+            <a:fillRect/>
+          </a:stretch>
+        </p:blipFill>
+        <p:spPr>
+          <a:xfrm>
+            <a:off x="5789322" y="1536192"/>
+            <a:ext cx="1588715" cy="2417610"/>
+          </a:xfrm>
+          <a:prstGeom prst="rect">
+            <a:avLst/>
+          </a:prstGeom>
+        </p:spPr>
+      </p:pic>
+      <p:sp>
+        <p:nvSpPr>
+          <p:cNvPr id="9" name="Text 5"/>
+          <p:cNvSpPr/>
+          <p:nvPr/>
+        </p:nvSpPr>
+        <p:spPr>
+          <a:xfrm>
+            <a:off x="4846320" y="4083939"/>
+            <a:ext cx="3474720" cy="517182"/>
+          </a:xfrm>
+          <a:prstGeom prst="rect">
+            <a:avLst/>
+          </a:prstGeom>
+          <a:noFill/>
+          <a:ln/>
+        </p:spPr>
+        <p:txBody>
+          <a:bodyPr wrap="square" lIns="0" tIns="0" rIns="0" bIns="0" rtlCol="0" anchor="t"/>
+          <a:lstStyle/>
+          <a:p>
+            <a:pPr marL="0" indent="0" algn="ctr">
+              <a:buNone/>
+            </a:pPr>
+            <a:r>
+              <a:rPr lang="en-US" sz="950" b="1" dirty="0">
                 <a:solidFill>
                   <a:srgbClr val="8A6C52"/>
                 </a:solidFill>
-                <a:latin typeface="Calibri" pitchFamily="34" charset="0"/>
-                <a:ea typeface="Calibri" pitchFamily="34" charset="-122"/>
-                <a:cs typeface="Calibri" pitchFamily="34" charset="-120"/>
-              </a:rPr>
-              <a:t>서비스 소개, 시작하기</a:t>
-            </a:r>
-            <a:endParaRPr lang="en-US" sz="1200" dirty="0"/>
-          </a:p>
-        </p:txBody>
-      </p:sp>
-      <p:sp>
-        <p:nvSpPr>
-          <p:cNvPr id="9" name="Shape 7"/>
-          <p:cNvSpPr/>
-          <p:nvPr/>
-        </p:nvSpPr>
-        <p:spPr>
-          <a:xfrm>
-            <a:off x="822960" y="2029968"/>
-            <a:ext cx="7040880" cy="502920"/>
-          </a:xfrm>
-          <a:prstGeom prst="roundRect">
-            <a:avLst>
-              <a:gd name="adj" fmla="val 14545"/>
-            </a:avLst>
-          </a:prstGeom>
-          <a:solidFill>
-            <a:srgbClr val="FBF5EB"/>
-          </a:solidFill>
-          <a:ln/>
-        </p:spPr>
-      </p:sp>
-      <p:sp>
-        <p:nvSpPr>
-          <p:cNvPr id="10" name="Shape 8"/>
-          <p:cNvSpPr/>
-          <p:nvPr/>
-        </p:nvSpPr>
-        <p:spPr>
-          <a:xfrm>
-            <a:off x="1051560" y="2112264"/>
-            <a:ext cx="338328" cy="338328"/>
-          </a:xfrm>
-          <a:prstGeom prst="ellipse">
-            <a:avLst/>
-          </a:prstGeom>
-          <a:solidFill>
-            <a:srgbClr val="C17F3E"/>
-          </a:solidFill>
-          <a:ln/>
-        </p:spPr>
-      </p:sp>
-      <p:sp>
-        <p:nvSpPr>
-          <p:cNvPr id="11" name="Text 9"/>
-          <p:cNvSpPr/>
-          <p:nvPr/>
-        </p:nvSpPr>
-        <p:spPr>
-          <a:xfrm>
-            <a:off x="1051560" y="2112264"/>
-            <a:ext cx="338328" cy="338328"/>
-          </a:xfrm>
-          <a:prstGeom prst="rect">
-            <a:avLst/>
-          </a:prstGeom>
-          <a:noFill/>
-          <a:ln/>
-        </p:spPr>
-        <p:txBody>
-          <a:bodyPr wrap="square" lIns="0" tIns="0" rIns="0" bIns="0" rtlCol="0" anchor="ctr"/>
-          <a:lstStyle/>
-          <a:p>
-            <a:pPr algn="ctr" indent="0" marL="0">
-              <a:buNone/>
-            </a:pPr>
-            <a:r>
-              <a:rPr lang="en-US" sz="1200" b="1" dirty="0">
-                <a:solidFill>
-                  <a:srgbClr val="FBF7F2"/>
-                </a:solidFill>
-                <a:latin typeface="Calibri" pitchFamily="34" charset="0"/>
-                <a:ea typeface="Calibri" pitchFamily="34" charset="-122"/>
-                <a:cs typeface="Calibri" pitchFamily="34" charset="-120"/>
-              </a:rPr>
-              <a:t>2</a:t>
-            </a:r>
-            <a:endParaRPr lang="en-US" sz="1200" dirty="0"/>
-          </a:p>
-        </p:txBody>
-      </p:sp>
-      <p:sp>
-        <p:nvSpPr>
-          <p:cNvPr id="12" name="Text 10"/>
-          <p:cNvSpPr/>
-          <p:nvPr/>
-        </p:nvSpPr>
-        <p:spPr>
-          <a:xfrm>
-            <a:off x="1554480" y="2029968"/>
-            <a:ext cx="2011680" cy="502920"/>
-          </a:xfrm>
-          <a:prstGeom prst="rect">
-            <a:avLst/>
-          </a:prstGeom>
-          <a:noFill/>
-          <a:ln/>
-        </p:spPr>
-        <p:txBody>
-          <a:bodyPr wrap="square" lIns="0" tIns="0" rIns="0" bIns="0" rtlCol="0" anchor="ctr"/>
-          <a:lstStyle/>
-          <a:p>
-            <a:pPr algn="l" indent="0" marL="0">
-              <a:buNone/>
-            </a:pPr>
-            <a:r>
-              <a:rPr lang="en-US" sz="1500" b="1" dirty="0">
-                <a:solidFill>
-                  <a:srgbClr val="2E1A0F"/>
-                </a:solidFill>
-                <a:latin typeface="Cambria" pitchFamily="34" charset="0"/>
-                <a:ea typeface="Cambria" pitchFamily="34" charset="-122"/>
-                <a:cs typeface="Cambria" pitchFamily="34" charset="-120"/>
-              </a:rPr>
-              <a:t>정보 입력</a:t>
-            </a:r>
-            <a:endParaRPr lang="en-US" sz="1500" dirty="0"/>
-          </a:p>
-        </p:txBody>
-      </p:sp>
-      <p:sp>
-        <p:nvSpPr>
-          <p:cNvPr id="13" name="Text 11"/>
-          <p:cNvSpPr/>
-          <p:nvPr/>
-        </p:nvSpPr>
-        <p:spPr>
-          <a:xfrm>
-            <a:off x="3657600" y="2029968"/>
-            <a:ext cx="4023360" cy="502920"/>
-          </a:xfrm>
-          <a:prstGeom prst="rect">
-            <a:avLst/>
-          </a:prstGeom>
-          <a:noFill/>
-          <a:ln/>
-        </p:spPr>
-        <p:txBody>
-          <a:bodyPr wrap="square" lIns="0" tIns="0" rIns="0" bIns="0" rtlCol="0" anchor="ctr"/>
-          <a:lstStyle/>
-          <a:p>
-            <a:pPr algn="l" indent="0" marL="0">
-              <a:buNone/>
-            </a:pPr>
-            <a:r>
-              <a:rPr lang="en-US" sz="1200" dirty="0">
+                <a:latin typeface="HYSinMyeongJo-Medium" pitchFamily="34" charset="0"/>
+                <a:ea typeface="HYSinMyeongJo-Medium" pitchFamily="34" charset="-122"/>
+                <a:cs typeface="HYSinMyeongJo-Medium" pitchFamily="34" charset="-120"/>
+              </a:rPr>
+              <a:t>수면 패턴, 섭취 카페인 입력</a:t>
+            </a:r>
+            <a:endParaRPr lang="en-US" sz="950" dirty="0"/>
+          </a:p>
+          <a:p>
+            <a:pPr marL="0" indent="0" algn="ctr">
+              <a:buNone/>
+            </a:pPr>
+            <a:r>
+              <a:rPr lang="en-US" sz="950" dirty="0">
                 <a:solidFill>
                   <a:srgbClr val="8A6C52"/>
                 </a:solidFill>
-                <a:latin typeface="Calibri" pitchFamily="34" charset="0"/>
-                <a:ea typeface="Calibri" pitchFamily="34" charset="-122"/>
-                <a:cs typeface="Calibri" pitchFamily="34" charset="-120"/>
-              </a:rPr>
-              <a:t>자연어 + 조건 입력</a:t>
-            </a:r>
-            <a:endParaRPr lang="en-US" sz="1200" dirty="0"/>
-          </a:p>
-        </p:txBody>
-      </p:sp>
-      <p:sp>
-        <p:nvSpPr>
-          <p:cNvPr id="14" name="Shape 12"/>
-          <p:cNvSpPr/>
-          <p:nvPr/>
-        </p:nvSpPr>
-        <p:spPr>
-          <a:xfrm>
-            <a:off x="822960" y="2642616"/>
-            <a:ext cx="7040880" cy="502920"/>
-          </a:xfrm>
-          <a:prstGeom prst="roundRect">
-            <a:avLst>
-              <a:gd name="adj" fmla="val 14545"/>
-            </a:avLst>
-          </a:prstGeom>
-          <a:solidFill>
-            <a:srgbClr val="FBF5EB"/>
-          </a:solidFill>
-          <a:ln/>
-        </p:spPr>
-      </p:sp>
-      <p:sp>
-        <p:nvSpPr>
-          <p:cNvPr id="15" name="Shape 13"/>
-          <p:cNvSpPr/>
-          <p:nvPr/>
-        </p:nvSpPr>
-        <p:spPr>
-          <a:xfrm>
-            <a:off x="1051560" y="2724912"/>
-            <a:ext cx="338328" cy="338328"/>
-          </a:xfrm>
-          <a:prstGeom prst="ellipse">
-            <a:avLst/>
-          </a:prstGeom>
-          <a:solidFill>
-            <a:srgbClr val="C17F3E"/>
-          </a:solidFill>
-          <a:ln/>
-        </p:spPr>
-      </p:sp>
-      <p:sp>
-        <p:nvSpPr>
-          <p:cNvPr id="16" name="Text 14"/>
-          <p:cNvSpPr/>
-          <p:nvPr/>
-        </p:nvSpPr>
-        <p:spPr>
-          <a:xfrm>
-            <a:off x="1051560" y="2724912"/>
-            <a:ext cx="338328" cy="338328"/>
-          </a:xfrm>
-          <a:prstGeom prst="rect">
-            <a:avLst/>
-          </a:prstGeom>
-          <a:noFill/>
-          <a:ln/>
-        </p:spPr>
-        <p:txBody>
-          <a:bodyPr wrap="square" lIns="0" tIns="0" rIns="0" bIns="0" rtlCol="0" anchor="ctr"/>
-          <a:lstStyle/>
-          <a:p>
-            <a:pPr algn="ctr" indent="0" marL="0">
-              <a:buNone/>
-            </a:pPr>
-            <a:r>
-              <a:rPr lang="en-US" sz="1200" b="1" dirty="0">
-                <a:solidFill>
-                  <a:srgbClr val="FBF7F2"/>
-                </a:solidFill>
-                <a:latin typeface="Calibri" pitchFamily="34" charset="0"/>
-                <a:ea typeface="Calibri" pitchFamily="34" charset="-122"/>
-                <a:cs typeface="Calibri" pitchFamily="34" charset="-120"/>
-              </a:rPr>
-              <a:t>3</a:t>
-            </a:r>
-            <a:endParaRPr lang="en-US" sz="1200" dirty="0"/>
-          </a:p>
-        </p:txBody>
-      </p:sp>
-      <p:sp>
-        <p:nvSpPr>
-          <p:cNvPr id="17" name="Text 15"/>
-          <p:cNvSpPr/>
-          <p:nvPr/>
-        </p:nvSpPr>
-        <p:spPr>
-          <a:xfrm>
-            <a:off x="1554480" y="2642616"/>
-            <a:ext cx="2011680" cy="502920"/>
-          </a:xfrm>
-          <a:prstGeom prst="rect">
-            <a:avLst/>
-          </a:prstGeom>
-          <a:noFill/>
-          <a:ln/>
-        </p:spPr>
-        <p:txBody>
-          <a:bodyPr wrap="square" lIns="0" tIns="0" rIns="0" bIns="0" rtlCol="0" anchor="ctr"/>
-          <a:lstStyle/>
-          <a:p>
-            <a:pPr algn="l" indent="0" marL="0">
-              <a:buNone/>
-            </a:pPr>
-            <a:r>
-              <a:rPr lang="en-US" sz="1500" b="1" dirty="0">
-                <a:solidFill>
-                  <a:srgbClr val="2E1A0F"/>
-                </a:solidFill>
-                <a:latin typeface="Cambria" pitchFamily="34" charset="0"/>
-                <a:ea typeface="Cambria" pitchFamily="34" charset="-122"/>
-                <a:cs typeface="Cambria" pitchFamily="34" charset="-120"/>
-              </a:rPr>
-              <a:t>처리 중</a:t>
-            </a:r>
-            <a:endParaRPr lang="en-US" sz="1500" dirty="0"/>
-          </a:p>
-        </p:txBody>
-      </p:sp>
-      <p:sp>
-        <p:nvSpPr>
-          <p:cNvPr id="18" name="Text 16"/>
-          <p:cNvSpPr/>
-          <p:nvPr/>
-        </p:nvSpPr>
-        <p:spPr>
-          <a:xfrm>
-            <a:off x="3657600" y="2642616"/>
-            <a:ext cx="4023360" cy="502920"/>
-          </a:xfrm>
-          <a:prstGeom prst="rect">
-            <a:avLst/>
-          </a:prstGeom>
-          <a:noFill/>
-          <a:ln/>
-        </p:spPr>
-        <p:txBody>
-          <a:bodyPr wrap="square" lIns="0" tIns="0" rIns="0" bIns="0" rtlCol="0" anchor="ctr"/>
-          <a:lstStyle/>
-          <a:p>
-            <a:pPr algn="l" indent="0" marL="0">
-              <a:buNone/>
-            </a:pPr>
-            <a:r>
-              <a:rPr lang="en-US" sz="1200" dirty="0">
+                <a:latin typeface="HYSinMyeongJo-Medium" pitchFamily="34" charset="0"/>
+                <a:ea typeface="HYSinMyeongJo-Medium" pitchFamily="34" charset="-122"/>
+                <a:cs typeface="HYSinMyeongJo-Medium" pitchFamily="34" charset="-120"/>
+              </a:rPr>
+              <a:t>자연어로 추가 상황 설명 가능, 평소 취침 및 기상 </a:t>
+            </a:r>
+            <a:r>
+              <a:rPr lang="en-US" sz="950" dirty="0" err="1">
                 <a:solidFill>
                   <a:srgbClr val="8A6C52"/>
                 </a:solidFill>
-                <a:latin typeface="Calibri" pitchFamily="34" charset="0"/>
-                <a:ea typeface="Calibri" pitchFamily="34" charset="-122"/>
-                <a:cs typeface="Calibri" pitchFamily="34" charset="-120"/>
-              </a:rPr>
-              <a:t>모델 계산 진행</a:t>
-            </a:r>
-            <a:endParaRPr lang="en-US" sz="1200" dirty="0"/>
-          </a:p>
-        </p:txBody>
-      </p:sp>
-      <p:sp>
-        <p:nvSpPr>
-          <p:cNvPr id="19" name="Shape 17"/>
-          <p:cNvSpPr/>
-          <p:nvPr/>
-        </p:nvSpPr>
-        <p:spPr>
-          <a:xfrm>
-            <a:off x="822960" y="3255264"/>
-            <a:ext cx="7040880" cy="502920"/>
-          </a:xfrm>
-          <a:prstGeom prst="roundRect">
-            <a:avLst>
-              <a:gd name="adj" fmla="val 14545"/>
-            </a:avLst>
-          </a:prstGeom>
-          <a:solidFill>
-            <a:srgbClr val="FBF5EB"/>
-          </a:solidFill>
-          <a:ln/>
-        </p:spPr>
-      </p:sp>
-      <p:sp>
-        <p:nvSpPr>
-          <p:cNvPr id="20" name="Shape 18"/>
-          <p:cNvSpPr/>
-          <p:nvPr/>
-        </p:nvSpPr>
-        <p:spPr>
-          <a:xfrm>
-            <a:off x="1051560" y="3337560"/>
-            <a:ext cx="338328" cy="338328"/>
-          </a:xfrm>
-          <a:prstGeom prst="ellipse">
-            <a:avLst/>
-          </a:prstGeom>
-          <a:solidFill>
-            <a:srgbClr val="C17F3E"/>
-          </a:solidFill>
-          <a:ln/>
-        </p:spPr>
-      </p:sp>
-      <p:sp>
-        <p:nvSpPr>
-          <p:cNvPr id="21" name="Text 19"/>
-          <p:cNvSpPr/>
-          <p:nvPr/>
-        </p:nvSpPr>
-        <p:spPr>
-          <a:xfrm>
-            <a:off x="1051560" y="3337560"/>
-            <a:ext cx="338328" cy="338328"/>
-          </a:xfrm>
-          <a:prstGeom prst="rect">
-            <a:avLst/>
-          </a:prstGeom>
-          <a:noFill/>
-          <a:ln/>
-        </p:spPr>
-        <p:txBody>
-          <a:bodyPr wrap="square" lIns="0" tIns="0" rIns="0" bIns="0" rtlCol="0" anchor="ctr"/>
-          <a:lstStyle/>
-          <a:p>
-            <a:pPr algn="ctr" indent="0" marL="0">
-              <a:buNone/>
-            </a:pPr>
-            <a:r>
-              <a:rPr lang="en-US" sz="1200" b="1" dirty="0">
-                <a:solidFill>
-                  <a:srgbClr val="FBF7F2"/>
-                </a:solidFill>
-                <a:latin typeface="Calibri" pitchFamily="34" charset="0"/>
-                <a:ea typeface="Calibri" pitchFamily="34" charset="-122"/>
-                <a:cs typeface="Calibri" pitchFamily="34" charset="-120"/>
-              </a:rPr>
-              <a:t>4</a:t>
-            </a:r>
-            <a:endParaRPr lang="en-US" sz="1200" dirty="0"/>
-          </a:p>
-        </p:txBody>
-      </p:sp>
-      <p:sp>
-        <p:nvSpPr>
-          <p:cNvPr id="22" name="Text 20"/>
-          <p:cNvSpPr/>
-          <p:nvPr/>
-        </p:nvSpPr>
-        <p:spPr>
-          <a:xfrm>
-            <a:off x="1554480" y="3255264"/>
-            <a:ext cx="2011680" cy="502920"/>
-          </a:xfrm>
-          <a:prstGeom prst="rect">
-            <a:avLst/>
-          </a:prstGeom>
-          <a:noFill/>
-          <a:ln/>
-        </p:spPr>
-        <p:txBody>
-          <a:bodyPr wrap="square" lIns="0" tIns="0" rIns="0" bIns="0" rtlCol="0" anchor="ctr"/>
-          <a:lstStyle/>
-          <a:p>
-            <a:pPr algn="l" indent="0" marL="0">
-              <a:buNone/>
-            </a:pPr>
-            <a:r>
-              <a:rPr lang="en-US" sz="1500" b="1" dirty="0">
-                <a:solidFill>
-                  <a:srgbClr val="2E1A0F"/>
-                </a:solidFill>
-                <a:latin typeface="Cambria" pitchFamily="34" charset="0"/>
-                <a:ea typeface="Cambria" pitchFamily="34" charset="-122"/>
-                <a:cs typeface="Cambria" pitchFamily="34" charset="-120"/>
-              </a:rPr>
-              <a:t>결과</a:t>
-            </a:r>
-            <a:endParaRPr lang="en-US" sz="1500" dirty="0"/>
-          </a:p>
-        </p:txBody>
-      </p:sp>
-      <p:sp>
-        <p:nvSpPr>
-          <p:cNvPr id="23" name="Text 21"/>
-          <p:cNvSpPr/>
-          <p:nvPr/>
-        </p:nvSpPr>
-        <p:spPr>
-          <a:xfrm>
-            <a:off x="3657600" y="3255264"/>
-            <a:ext cx="4023360" cy="502920"/>
-          </a:xfrm>
-          <a:prstGeom prst="rect">
-            <a:avLst/>
-          </a:prstGeom>
-          <a:noFill/>
-          <a:ln/>
-        </p:spPr>
-        <p:txBody>
-          <a:bodyPr wrap="square" lIns="0" tIns="0" rIns="0" bIns="0" rtlCol="0" anchor="ctr"/>
-          <a:lstStyle/>
-          <a:p>
-            <a:pPr algn="l" indent="0" marL="0">
-              <a:buNone/>
-            </a:pPr>
-            <a:r>
-              <a:rPr lang="en-US" sz="1200" dirty="0">
+                <a:latin typeface="HYSinMyeongJo-Medium" pitchFamily="34" charset="0"/>
+                <a:ea typeface="HYSinMyeongJo-Medium" pitchFamily="34" charset="-122"/>
+                <a:cs typeface="HYSinMyeongJo-Medium" pitchFamily="34" charset="-120"/>
+              </a:rPr>
+              <a:t>시간</a:t>
+            </a:r>
+            <a:r>
+              <a:rPr lang="en-US" sz="950" dirty="0">
                 <a:solidFill>
                   <a:srgbClr val="8A6C52"/>
                 </a:solidFill>
-                <a:latin typeface="Calibri" pitchFamily="34" charset="0"/>
-                <a:ea typeface="Calibri" pitchFamily="34" charset="-122"/>
-                <a:cs typeface="Calibri" pitchFamily="34" charset="-120"/>
-              </a:rPr>
-              <a:t>각성도 그래프 + 추천</a:t>
-            </a:r>
-            <a:endParaRPr lang="en-US" sz="1200" dirty="0"/>
-          </a:p>
-        </p:txBody>
-      </p:sp>
-      <p:sp>
-        <p:nvSpPr>
-          <p:cNvPr id="24" name="Shape 22"/>
-          <p:cNvSpPr/>
-          <p:nvPr/>
-        </p:nvSpPr>
-        <p:spPr>
-          <a:xfrm>
-            <a:off x="822960" y="3867912"/>
-            <a:ext cx="7040880" cy="502920"/>
-          </a:xfrm>
-          <a:prstGeom prst="roundRect">
-            <a:avLst>
-              <a:gd name="adj" fmla="val 14545"/>
-            </a:avLst>
-          </a:prstGeom>
-          <a:solidFill>
-            <a:srgbClr val="FBF5EB"/>
-          </a:solidFill>
-          <a:ln/>
-        </p:spPr>
-      </p:sp>
-      <p:sp>
-        <p:nvSpPr>
-          <p:cNvPr id="25" name="Shape 23"/>
-          <p:cNvSpPr/>
-          <p:nvPr/>
-        </p:nvSpPr>
-        <p:spPr>
-          <a:xfrm>
-            <a:off x="1051560" y="3950208"/>
-            <a:ext cx="338328" cy="338328"/>
-          </a:xfrm>
-          <a:prstGeom prst="ellipse">
-            <a:avLst/>
-          </a:prstGeom>
-          <a:solidFill>
-            <a:srgbClr val="C17F3E"/>
-          </a:solidFill>
-          <a:ln/>
-        </p:spPr>
-      </p:sp>
-      <p:sp>
-        <p:nvSpPr>
-          <p:cNvPr id="26" name="Text 24"/>
-          <p:cNvSpPr/>
-          <p:nvPr/>
-        </p:nvSpPr>
-        <p:spPr>
-          <a:xfrm>
-            <a:off x="1051560" y="3950208"/>
-            <a:ext cx="338328" cy="338328"/>
-          </a:xfrm>
-          <a:prstGeom prst="rect">
-            <a:avLst/>
-          </a:prstGeom>
-          <a:noFill/>
-          <a:ln/>
-        </p:spPr>
-        <p:txBody>
-          <a:bodyPr wrap="square" lIns="0" tIns="0" rIns="0" bIns="0" rtlCol="0" anchor="ctr"/>
-          <a:lstStyle/>
-          <a:p>
-            <a:pPr algn="ctr" indent="0" marL="0">
-              <a:buNone/>
-            </a:pPr>
-            <a:r>
-              <a:rPr lang="en-US" sz="1200" b="1" dirty="0">
-                <a:solidFill>
-                  <a:srgbClr val="FBF7F2"/>
-                </a:solidFill>
-                <a:latin typeface="Calibri" pitchFamily="34" charset="0"/>
-                <a:ea typeface="Calibri" pitchFamily="34" charset="-122"/>
-                <a:cs typeface="Calibri" pitchFamily="34" charset="-120"/>
-              </a:rPr>
-              <a:t>5</a:t>
-            </a:r>
-            <a:endParaRPr lang="en-US" sz="1200" dirty="0"/>
-          </a:p>
-        </p:txBody>
-      </p:sp>
-      <p:sp>
-        <p:nvSpPr>
-          <p:cNvPr id="27" name="Text 25"/>
-          <p:cNvSpPr/>
-          <p:nvPr/>
-        </p:nvSpPr>
-        <p:spPr>
-          <a:xfrm>
-            <a:off x="1554480" y="3867912"/>
-            <a:ext cx="2011680" cy="502920"/>
-          </a:xfrm>
-          <a:prstGeom prst="rect">
-            <a:avLst/>
-          </a:prstGeom>
-          <a:noFill/>
-          <a:ln/>
-        </p:spPr>
-        <p:txBody>
-          <a:bodyPr wrap="square" lIns="0" tIns="0" rIns="0" bIns="0" rtlCol="0" anchor="ctr"/>
-          <a:lstStyle/>
-          <a:p>
-            <a:pPr algn="l" indent="0" marL="0">
-              <a:buNone/>
-            </a:pPr>
-            <a:r>
-              <a:rPr lang="en-US" sz="1500" b="1" dirty="0">
-                <a:solidFill>
-                  <a:srgbClr val="2E1A0F"/>
-                </a:solidFill>
-                <a:latin typeface="Cambria" pitchFamily="34" charset="0"/>
-                <a:ea typeface="Cambria" pitchFamily="34" charset="-122"/>
-                <a:cs typeface="Cambria" pitchFamily="34" charset="-120"/>
-              </a:rPr>
-              <a:t>스케줄 조정</a:t>
-            </a:r>
-            <a:endParaRPr lang="en-US" sz="1500" dirty="0"/>
-          </a:p>
-        </p:txBody>
-      </p:sp>
-      <p:sp>
-        <p:nvSpPr>
-          <p:cNvPr id="28" name="Text 26"/>
-          <p:cNvSpPr/>
-          <p:nvPr/>
-        </p:nvSpPr>
-        <p:spPr>
-          <a:xfrm>
-            <a:off x="3657600" y="3867912"/>
-            <a:ext cx="4023360" cy="502920"/>
-          </a:xfrm>
-          <a:prstGeom prst="rect">
-            <a:avLst/>
-          </a:prstGeom>
-          <a:noFill/>
-          <a:ln/>
-        </p:spPr>
-        <p:txBody>
-          <a:bodyPr wrap="square" lIns="0" tIns="0" rIns="0" bIns="0" rtlCol="0" anchor="ctr"/>
-          <a:lstStyle/>
-          <a:p>
-            <a:pPr algn="l" indent="0" marL="0">
-              <a:buNone/>
-            </a:pPr>
-            <a:r>
-              <a:rPr lang="en-US" sz="1200" dirty="0">
+                <a:latin typeface="HYSinMyeongJo-Medium" pitchFamily="34" charset="0"/>
+                <a:ea typeface="HYSinMyeongJo-Medium" pitchFamily="34" charset="-122"/>
+                <a:cs typeface="HYSinMyeongJo-Medium" pitchFamily="34" charset="-120"/>
+              </a:rPr>
+              <a:t>,</a:t>
+            </a:r>
+          </a:p>
+          <a:p>
+            <a:pPr marL="0" indent="0" algn="ctr">
+              <a:buNone/>
+            </a:pPr>
+            <a:r>
+              <a:rPr lang="en-US" sz="950" dirty="0" err="1">
                 <a:solidFill>
                   <a:srgbClr val="8A6C52"/>
                 </a:solidFill>
-                <a:latin typeface="Calibri" pitchFamily="34" charset="0"/>
-                <a:ea typeface="Calibri" pitchFamily="34" charset="-122"/>
-                <a:cs typeface="Calibri" pitchFamily="34" charset="-120"/>
-              </a:rPr>
-              <a:t>슬라이더로 직접 조정</a:t>
-            </a:r>
-            <a:endParaRPr lang="en-US" sz="1200" dirty="0"/>
-          </a:p>
-        </p:txBody>
-      </p:sp>
+                <a:latin typeface="HYSinMyeongJo-Medium" pitchFamily="34" charset="0"/>
+                <a:ea typeface="HYSinMyeongJo-Medium" pitchFamily="34" charset="-122"/>
+                <a:cs typeface="HYSinMyeongJo-Medium" pitchFamily="34" charset="-120"/>
+              </a:rPr>
+              <a:t>시험</a:t>
+            </a:r>
+            <a:r>
+              <a:rPr lang="en-US" sz="950" dirty="0">
+                <a:solidFill>
+                  <a:srgbClr val="8A6C52"/>
+                </a:solidFill>
+                <a:latin typeface="HYSinMyeongJo-Medium" pitchFamily="34" charset="0"/>
+                <a:ea typeface="HYSinMyeongJo-Medium" pitchFamily="34" charset="-122"/>
+                <a:cs typeface="HYSinMyeongJo-Medium" pitchFamily="34" charset="-120"/>
+              </a:rPr>
+              <a:t> 일시, 남은 공부 시간, 카페인 민감도, 수면압 등을 입력</a:t>
+            </a:r>
+            <a:endParaRPr lang="en-US" sz="950" dirty="0"/>
+          </a:p>
+        </p:txBody>
+      </p:sp>
+      <p:pic>
+        <p:nvPicPr>
+          <p:cNvPr id="11" name="Image 0" descr="../screens/home-screen.png">
+            <a:extLst>
+              <a:ext uri="{FF2B5EF4-FFF2-40B4-BE49-F238E27FC236}">
+                <a16:creationId xmlns:a16="http://schemas.microsoft.com/office/drawing/2014/main" id="{2D6FE489-C01F-73C7-8E1C-8D03B5781716}"/>
+              </a:ext>
+            </a:extLst>
+          </p:cNvPr>
+          <p:cNvPicPr>
+            <a:picLocks noChangeAspect="1"/>
+          </p:cNvPicPr>
+          <p:nvPr/>
+        </p:nvPicPr>
+        <p:blipFill>
+          <a:blip r:embed="rId4"/>
+          <a:stretch>
+            <a:fillRect/>
+          </a:stretch>
+        </p:blipFill>
+        <p:spPr>
+          <a:xfrm>
+            <a:off x="1924050" y="1536192"/>
+            <a:ext cx="1588715" cy="2417610"/>
+          </a:xfrm>
+          <a:prstGeom prst="rect">
+            <a:avLst/>
+          </a:prstGeom>
+        </p:spPr>
+      </p:pic>
     </p:spTree>
   </p:cSld>
   <p:clrMapOvr>
@@ -3999,8 +3472,9 @@
     <p:bg>
       <p:bgPr>
         <a:solidFill>
-          <a:srgbClr val="FBF7F2"/>
+          <a:srgbClr val="2E1A0F"/>
         </a:solidFill>
+        <a:effectLst/>
       </p:bgPr>
     </p:bg>
     <p:spTree>
@@ -4038,19 +3512,19 @@
           <a:bodyPr wrap="square" lIns="0" tIns="0" rIns="0" bIns="0" rtlCol="0" anchor="ctr"/>
           <a:lstStyle/>
           <a:p>
-            <a:pPr algn="l" indent="0" marL="0">
+            <a:pPr marL="0" indent="0" algn="l">
               <a:buNone/>
             </a:pPr>
             <a:r>
               <a:rPr lang="en-US" sz="3000" b="1" dirty="0">
                 <a:solidFill>
-                  <a:srgbClr val="2E1A0F"/>
-                </a:solidFill>
-                <a:latin typeface="Cambria" pitchFamily="34" charset="0"/>
-                <a:ea typeface="Cambria" pitchFamily="34" charset="-122"/>
-                <a:cs typeface="Cambria" pitchFamily="34" charset="-120"/>
-              </a:rPr>
-              <a:t>와이어프레임 · 홈 / 정보 입력</a:t>
+                  <a:srgbClr val="EDE0D0"/>
+                </a:solidFill>
+                <a:latin typeface="HYSinMyeongJo-Medium" pitchFamily="34" charset="0"/>
+                <a:ea typeface="HYSinMyeongJo-Medium" pitchFamily="34" charset="-122"/>
+                <a:cs typeface="HYSinMyeongJo-Medium" pitchFamily="34" charset="-120"/>
+              </a:rPr>
+              <a:t>와이어프레임 · 처리 중 / 결과 / 스케줄 조정</a:t>
             </a:r>
             <a:endParaRPr lang="en-US" sz="3000" dirty="0"/>
           </a:p>
@@ -4073,16 +3547,9 @@
             </a:avLst>
           </a:prstGeom>
           <a:solidFill>
-            <a:srgbClr val="F3E7D6"/>
+            <a:srgbClr val="F7EEE0"/>
           </a:solidFill>
           <a:ln/>
-          <a:effectLst>
-            <a:outerShdw sx="100000" sy="100000" kx="0" ky="0" algn="bl" rotWithShape="0" blurRad="101600" dist="38100" dir="5400000">
-              <a:srgbClr val="000000">
-                <a:alpha val="10000"/>
-              </a:srgbClr>
-            </a:outerShdw>
-          </a:effectLst>
         </p:spPr>
       </p:sp>
       <p:sp>
@@ -4093,8 +3560,8 @@
         </p:nvSpPr>
         <p:spPr>
           <a:xfrm>
-            <a:off x="822960" y="1234440"/>
-            <a:ext cx="3657600" cy="365760"/>
+            <a:off x="822960" y="1188720"/>
+            <a:ext cx="2377440" cy="320040"/>
           </a:xfrm>
           <a:prstGeom prst="rect">
             <a:avLst/>
@@ -4106,7 +3573,7 @@
           <a:bodyPr wrap="square" lIns="0" tIns="0" rIns="0" bIns="0" rtlCol="0" anchor="ctr"/>
           <a:lstStyle/>
           <a:p>
-            <a:pPr algn="ctr" indent="0" marL="0">
+            <a:pPr marL="0" indent="0" algn="ctr">
               <a:buNone/>
             </a:pPr>
             <a:r>
@@ -4114,11 +3581,11 @@
                 <a:solidFill>
                   <a:srgbClr val="2E1A0F"/>
                 </a:solidFill>
-                <a:latin typeface="Cambria" pitchFamily="34" charset="0"/>
-                <a:ea typeface="Cambria" pitchFamily="34" charset="-122"/>
-                <a:cs typeface="Cambria" pitchFamily="34" charset="-120"/>
-              </a:rPr>
-              <a:t>① 홈</a:t>
+                <a:latin typeface="HYSinMyeongJo-Medium" pitchFamily="34" charset="0"/>
+                <a:ea typeface="HYSinMyeongJo-Medium" pitchFamily="34" charset="-122"/>
+                <a:cs typeface="HYSinMyeongJo-Medium" pitchFamily="34" charset="-120"/>
+              </a:rPr>
+              <a:t>③ 처리 중</a:t>
             </a:r>
             <a:endParaRPr lang="en-US" sz="1600" dirty="0"/>
           </a:p>
@@ -4126,22 +3593,22 @@
       </p:sp>
       <p:pic>
         <p:nvPicPr>
-          <p:cNvPr id="5" name="Image 0" descr="../screens/home-screen.png">    </p:cNvPr>
+          <p:cNvPr id="5" name="Image 0" descr="../screens/processing-screen.png"/>
           <p:cNvPicPr>
             <a:picLocks noChangeAspect="1"/>
           </p:cNvPicPr>
           <p:nvPr/>
         </p:nvPicPr>
         <p:blipFill>
-          <a:blip r:embed="rId1"/>
+          <a:blip r:embed="rId3"/>
           <a:stretch>
             <a:fillRect/>
           </a:stretch>
         </p:blipFill>
         <p:spPr>
           <a:xfrm>
-            <a:off x="1720378" y="1691640"/>
-            <a:ext cx="1862763" cy="2834640"/>
+            <a:off x="1217322" y="1508760"/>
+            <a:ext cx="1588715" cy="2417610"/>
           </a:xfrm>
           <a:prstGeom prst="rect">
             <a:avLst/>
@@ -4156,8 +3623,64 @@
         </p:nvSpPr>
         <p:spPr>
           <a:xfrm>
-            <a:off x="4663440" y="1234440"/>
-            <a:ext cx="3657600" cy="365760"/>
+            <a:off x="914400" y="4033647"/>
+            <a:ext cx="2194560" cy="333756"/>
+          </a:xfrm>
+          <a:prstGeom prst="rect">
+            <a:avLst/>
+          </a:prstGeom>
+          <a:noFill/>
+          <a:ln/>
+        </p:spPr>
+        <p:txBody>
+          <a:bodyPr wrap="square" lIns="0" tIns="0" rIns="0" bIns="0" rtlCol="0" anchor="t"/>
+          <a:lstStyle/>
+          <a:p>
+            <a:pPr marL="0" indent="0" algn="ctr">
+              <a:buNone/>
+            </a:pPr>
+            <a:r>
+              <a:rPr lang="en-US" sz="950" b="1" dirty="0">
+                <a:solidFill>
+                  <a:srgbClr val="8A6C52"/>
+                </a:solidFill>
+                <a:latin typeface="HYSinMyeongJo-Medium" pitchFamily="34" charset="0"/>
+                <a:ea typeface="HYSinMyeongJo-Medium" pitchFamily="34" charset="-122"/>
+                <a:cs typeface="HYSinMyeongJo-Medium" pitchFamily="34" charset="-120"/>
+              </a:rPr>
+              <a:t>계산 중 디스플레이</a:t>
+            </a:r>
+            <a:endParaRPr lang="en-US" sz="950" dirty="0"/>
+          </a:p>
+          <a:p>
+            <a:pPr marL="0" indent="0" algn="ctr">
+              <a:buNone/>
+            </a:pPr>
+            <a:r>
+              <a:rPr lang="en-US" sz="950" dirty="0">
+                <a:solidFill>
+                  <a:srgbClr val="8A6C52"/>
+                </a:solidFill>
+                <a:latin typeface="HYSinMyeongJo-Medium" pitchFamily="34" charset="0"/>
+                <a:ea typeface="HYSinMyeongJo-Medium" pitchFamily="34" charset="-122"/>
+                <a:cs typeface="HYSinMyeongJo-Medium" pitchFamily="34" charset="-120"/>
+              </a:rPr>
+              <a:t>계산 후 결과 화면으로 넘어감</a:t>
+            </a:r>
+            <a:endParaRPr lang="en-US" sz="950" dirty="0"/>
+          </a:p>
+        </p:txBody>
+      </p:sp>
+      <p:sp>
+        <p:nvSpPr>
+          <p:cNvPr id="7" name="Text 4"/>
+          <p:cNvSpPr/>
+          <p:nvPr/>
+        </p:nvSpPr>
+        <p:spPr>
+          <a:xfrm>
+            <a:off x="3383280" y="1188720"/>
+            <a:ext cx="2377440" cy="320040"/>
           </a:xfrm>
           <a:prstGeom prst="rect">
             <a:avLst/>
@@ -4169,7 +3692,7 @@
           <a:bodyPr wrap="square" lIns="0" tIns="0" rIns="0" bIns="0" rtlCol="0" anchor="ctr"/>
           <a:lstStyle/>
           <a:p>
-            <a:pPr algn="ctr" indent="0" marL="0">
+            <a:pPr marL="0" indent="0" algn="ctr">
               <a:buNone/>
             </a:pPr>
             <a:r>
@@ -4177,11 +3700,11 @@
                 <a:solidFill>
                   <a:srgbClr val="2E1A0F"/>
                 </a:solidFill>
-                <a:latin typeface="Cambria" pitchFamily="34" charset="0"/>
-                <a:ea typeface="Cambria" pitchFamily="34" charset="-122"/>
-                <a:cs typeface="Cambria" pitchFamily="34" charset="-120"/>
-              </a:rPr>
-              <a:t>② 정보 입력</a:t>
+                <a:latin typeface="HYSinMyeongJo-Medium" pitchFamily="34" charset="0"/>
+                <a:ea typeface="HYSinMyeongJo-Medium" pitchFamily="34" charset="-122"/>
+                <a:cs typeface="HYSinMyeongJo-Medium" pitchFamily="34" charset="-120"/>
+              </a:rPr>
+              <a:t>④ 결과</a:t>
             </a:r>
             <a:endParaRPr lang="en-US" sz="1600" dirty="0"/>
           </a:p>
@@ -4189,28 +3712,271 @@
       </p:sp>
       <p:pic>
         <p:nvPicPr>
-          <p:cNvPr id="7" name="Image 1" descr="../screens/input-screen.png">    </p:cNvPr>
+          <p:cNvPr id="8" name="Image 1" descr="../screens/result-screen.png"/>
           <p:cNvPicPr>
             <a:picLocks noChangeAspect="1"/>
           </p:cNvPicPr>
           <p:nvPr/>
         </p:nvPicPr>
         <p:blipFill>
-          <a:blip r:embed="rId2"/>
+          <a:blip r:embed="rId4"/>
           <a:stretch>
             <a:fillRect/>
           </a:stretch>
         </p:blipFill>
         <p:spPr>
           <a:xfrm>
-            <a:off x="5560858" y="1691640"/>
-            <a:ext cx="1862763" cy="2834640"/>
+            <a:off x="3834805" y="1508760"/>
+            <a:ext cx="1588715" cy="2417610"/>
           </a:xfrm>
           <a:prstGeom prst="rect">
             <a:avLst/>
           </a:prstGeom>
         </p:spPr>
       </p:pic>
+      <p:sp>
+        <p:nvSpPr>
+          <p:cNvPr id="9" name="Text 5"/>
+          <p:cNvSpPr/>
+          <p:nvPr/>
+        </p:nvSpPr>
+        <p:spPr>
+          <a:xfrm>
+            <a:off x="3474720" y="4030599"/>
+            <a:ext cx="2194560" cy="470916"/>
+          </a:xfrm>
+          <a:prstGeom prst="rect">
+            <a:avLst/>
+          </a:prstGeom>
+          <a:noFill/>
+          <a:ln/>
+        </p:spPr>
+        <p:txBody>
+          <a:bodyPr wrap="square" lIns="0" tIns="0" rIns="0" bIns="0" rtlCol="0" anchor="t"/>
+          <a:lstStyle/>
+          <a:p>
+            <a:pPr marL="0" indent="0" algn="ctr">
+              <a:buNone/>
+            </a:pPr>
+            <a:r>
+              <a:rPr lang="en-US" sz="950" b="1" dirty="0">
+                <a:solidFill>
+                  <a:srgbClr val="8A6C52"/>
+                </a:solidFill>
+                <a:latin typeface="HYSinMyeongJo-Medium" pitchFamily="34" charset="0"/>
+                <a:ea typeface="HYSinMyeongJo-Medium" pitchFamily="34" charset="-122"/>
+                <a:cs typeface="HYSinMyeongJo-Medium" pitchFamily="34" charset="-120"/>
+              </a:rPr>
+              <a:t>추천 취침 시간과 섭취 카페인량 추천</a:t>
+            </a:r>
+            <a:endParaRPr lang="en-US" sz="950" dirty="0"/>
+          </a:p>
+          <a:p>
+            <a:pPr marL="0" indent="0" algn="ctr">
+              <a:buNone/>
+            </a:pPr>
+            <a:r>
+              <a:rPr lang="en-US" sz="950" dirty="0">
+                <a:solidFill>
+                  <a:srgbClr val="8A6C52"/>
+                </a:solidFill>
+                <a:latin typeface="HYSinMyeongJo-Medium" pitchFamily="34" charset="0"/>
+                <a:ea typeface="HYSinMyeongJo-Medium" pitchFamily="34" charset="-122"/>
+                <a:cs typeface="HYSinMyeongJo-Medium" pitchFamily="34" charset="-120"/>
+              </a:rPr>
+              <a:t>그래프, </a:t>
+            </a:r>
+            <a:r>
+              <a:rPr lang="en-US" sz="950" dirty="0" err="1">
+                <a:solidFill>
+                  <a:srgbClr val="8A6C52"/>
+                </a:solidFill>
+                <a:latin typeface="HYSinMyeongJo-Medium" pitchFamily="34" charset="0"/>
+                <a:ea typeface="HYSinMyeongJo-Medium" pitchFamily="34" charset="-122"/>
+                <a:cs typeface="HYSinMyeongJo-Medium" pitchFamily="34" charset="-120"/>
+              </a:rPr>
+              <a:t>타임라인으로</a:t>
+            </a:r>
+            <a:r>
+              <a:rPr lang="en-US" sz="950" dirty="0">
+                <a:solidFill>
+                  <a:srgbClr val="8A6C52"/>
+                </a:solidFill>
+                <a:latin typeface="HYSinMyeongJo-Medium" pitchFamily="34" charset="0"/>
+                <a:ea typeface="HYSinMyeongJo-Medium" pitchFamily="34" charset="-122"/>
+                <a:cs typeface="HYSinMyeongJo-Medium" pitchFamily="34" charset="-120"/>
+              </a:rPr>
+              <a:t> </a:t>
+            </a:r>
+            <a:r>
+              <a:rPr lang="en-US" sz="950" dirty="0" err="1">
+                <a:solidFill>
+                  <a:srgbClr val="8A6C52"/>
+                </a:solidFill>
+                <a:latin typeface="HYSinMyeongJo-Medium" pitchFamily="34" charset="0"/>
+                <a:ea typeface="HYSinMyeongJo-Medium" pitchFamily="34" charset="-122"/>
+                <a:cs typeface="HYSinMyeongJo-Medium" pitchFamily="34" charset="-120"/>
+              </a:rPr>
+              <a:t>표현된</a:t>
+            </a:r>
+            <a:endParaRPr lang="en-US" sz="950" dirty="0">
+              <a:solidFill>
+                <a:srgbClr val="8A6C52"/>
+              </a:solidFill>
+              <a:latin typeface="HYSinMyeongJo-Medium" pitchFamily="34" charset="0"/>
+              <a:ea typeface="HYSinMyeongJo-Medium" pitchFamily="34" charset="-122"/>
+              <a:cs typeface="HYSinMyeongJo-Medium" pitchFamily="34" charset="-120"/>
+            </a:endParaRPr>
+          </a:p>
+          <a:p>
+            <a:pPr marL="0" indent="0" algn="ctr">
+              <a:buNone/>
+            </a:pPr>
+            <a:r>
+              <a:rPr lang="en-US" sz="950" dirty="0" err="1">
+                <a:solidFill>
+                  <a:srgbClr val="8A6C52"/>
+                </a:solidFill>
+                <a:latin typeface="HYSinMyeongJo-Medium" pitchFamily="34" charset="0"/>
+                <a:ea typeface="HYSinMyeongJo-Medium" pitchFamily="34" charset="-122"/>
+                <a:cs typeface="HYSinMyeongJo-Medium" pitchFamily="34" charset="-120"/>
+              </a:rPr>
+              <a:t>시간대별</a:t>
+            </a:r>
+            <a:r>
+              <a:rPr lang="en-US" sz="950" dirty="0">
+                <a:solidFill>
+                  <a:srgbClr val="8A6C52"/>
+                </a:solidFill>
+                <a:latin typeface="HYSinMyeongJo-Medium" pitchFamily="34" charset="0"/>
+                <a:ea typeface="HYSinMyeongJo-Medium" pitchFamily="34" charset="-122"/>
+                <a:cs typeface="HYSinMyeongJo-Medium" pitchFamily="34" charset="-120"/>
+              </a:rPr>
+              <a:t> 예측 각성도</a:t>
+            </a:r>
+            <a:endParaRPr lang="en-US" sz="950" dirty="0"/>
+          </a:p>
+        </p:txBody>
+      </p:sp>
+      <p:sp>
+        <p:nvSpPr>
+          <p:cNvPr id="10" name="Text 6"/>
+          <p:cNvSpPr/>
+          <p:nvPr/>
+        </p:nvSpPr>
+        <p:spPr>
+          <a:xfrm>
+            <a:off x="5943600" y="1188720"/>
+            <a:ext cx="2377440" cy="320040"/>
+          </a:xfrm>
+          <a:prstGeom prst="rect">
+            <a:avLst/>
+          </a:prstGeom>
+          <a:noFill/>
+          <a:ln/>
+        </p:spPr>
+        <p:txBody>
+          <a:bodyPr wrap="square" lIns="0" tIns="0" rIns="0" bIns="0" rtlCol="0" anchor="ctr"/>
+          <a:lstStyle/>
+          <a:p>
+            <a:pPr marL="0" indent="0" algn="ctr">
+              <a:buNone/>
+            </a:pPr>
+            <a:r>
+              <a:rPr lang="en-US" sz="1600" b="1" dirty="0">
+                <a:solidFill>
+                  <a:srgbClr val="2E1A0F"/>
+                </a:solidFill>
+                <a:latin typeface="HYSinMyeongJo-Medium" pitchFamily="34" charset="0"/>
+                <a:ea typeface="HYSinMyeongJo-Medium" pitchFamily="34" charset="-122"/>
+                <a:cs typeface="HYSinMyeongJo-Medium" pitchFamily="34" charset="-120"/>
+              </a:rPr>
+              <a:t>⑤ 스케줄 조정</a:t>
+            </a:r>
+            <a:endParaRPr lang="en-US" sz="1600" dirty="0"/>
+          </a:p>
+        </p:txBody>
+      </p:sp>
+      <p:pic>
+        <p:nvPicPr>
+          <p:cNvPr id="11" name="Image 2" descr="../screens/adjust-screen.png"/>
+          <p:cNvPicPr>
+            <a:picLocks noChangeAspect="1"/>
+          </p:cNvPicPr>
+          <p:nvPr/>
+        </p:nvPicPr>
+        <p:blipFill>
+          <a:blip r:embed="rId5"/>
+          <a:stretch>
+            <a:fillRect/>
+          </a:stretch>
+        </p:blipFill>
+        <p:spPr>
+          <a:xfrm>
+            <a:off x="6337962" y="1508760"/>
+            <a:ext cx="1588715" cy="2417610"/>
+          </a:xfrm>
+          <a:prstGeom prst="rect">
+            <a:avLst/>
+          </a:prstGeom>
+        </p:spPr>
+      </p:pic>
+      <p:sp>
+        <p:nvSpPr>
+          <p:cNvPr id="12" name="Text 7"/>
+          <p:cNvSpPr/>
+          <p:nvPr/>
+        </p:nvSpPr>
+        <p:spPr>
+          <a:xfrm>
+            <a:off x="6035040" y="4033647"/>
+            <a:ext cx="2194560" cy="361950"/>
+          </a:xfrm>
+          <a:prstGeom prst="rect">
+            <a:avLst/>
+          </a:prstGeom>
+          <a:noFill/>
+          <a:ln/>
+        </p:spPr>
+        <p:txBody>
+          <a:bodyPr wrap="square" lIns="0" tIns="0" rIns="0" bIns="0" rtlCol="0" anchor="t"/>
+          <a:lstStyle/>
+          <a:p>
+            <a:pPr marL="0" indent="0" algn="ctr">
+              <a:buNone/>
+            </a:pPr>
+            <a:r>
+              <a:rPr lang="en-US" sz="950" b="1" dirty="0">
+                <a:solidFill>
+                  <a:srgbClr val="8A6C52"/>
+                </a:solidFill>
+                <a:latin typeface="HYSinMyeongJo-Medium" pitchFamily="34" charset="0"/>
+                <a:ea typeface="HYSinMyeongJo-Medium" pitchFamily="34" charset="-122"/>
+                <a:cs typeface="HYSinMyeongJo-Medium" pitchFamily="34" charset="-120"/>
+              </a:rPr>
+              <a:t>세부적인 사항 변경 가능</a:t>
+            </a:r>
+            <a:endParaRPr lang="en-US" sz="950" dirty="0"/>
+          </a:p>
+          <a:p>
+            <a:pPr marL="0" indent="0" algn="ctr">
+              <a:buNone/>
+            </a:pPr>
+            <a:r>
+              <a:rPr lang="en-US" sz="950" dirty="0">
+                <a:solidFill>
+                  <a:srgbClr val="8A6C52"/>
+                </a:solidFill>
+                <a:latin typeface="HYSinMyeongJo-Medium" pitchFamily="34" charset="0"/>
+                <a:ea typeface="HYSinMyeongJo-Medium" pitchFamily="34" charset="-122"/>
+                <a:cs typeface="HYSinMyeongJo-Medium" pitchFamily="34" charset="-120"/>
+              </a:rPr>
+              <a:t>재계산을 통해 다시 결과 제공</a:t>
+            </a:r>
+            <a:endParaRPr lang="en-US" sz="950" dirty="0"/>
+          </a:p>
+        </p:txBody>
+      </p:sp>
     </p:spTree>
   </p:cSld>
   <p:clrMapOvr>
@@ -4225,8 +3991,9 @@
     <p:bg>
       <p:bgPr>
         <a:solidFill>
-          <a:srgbClr val="FBF7F2"/>
+          <a:srgbClr val="2E1A0F"/>
         </a:solidFill>
+        <a:effectLst/>
       </p:bgPr>
     </p:bg>
     <p:spTree>
@@ -4264,19 +4031,19 @@
           <a:bodyPr wrap="square" lIns="0" tIns="0" rIns="0" bIns="0" rtlCol="0" anchor="ctr"/>
           <a:lstStyle/>
           <a:p>
-            <a:pPr algn="l" indent="0" marL="0">
+            <a:pPr marL="0" indent="0" algn="l">
               <a:buNone/>
             </a:pPr>
             <a:r>
               <a:rPr lang="en-US" sz="3000" b="1" dirty="0">
                 <a:solidFill>
-                  <a:srgbClr val="2E1A0F"/>
-                </a:solidFill>
-                <a:latin typeface="Cambria" pitchFamily="34" charset="0"/>
-                <a:ea typeface="Cambria" pitchFamily="34" charset="-122"/>
-                <a:cs typeface="Cambria" pitchFamily="34" charset="-120"/>
-              </a:rPr>
-              <a:t>와이어프레임 · 처리 중 / 결과</a:t>
+                  <a:srgbClr val="EDE0D0"/>
+                </a:solidFill>
+                <a:latin typeface="HYSinMyeongJo-Medium" pitchFamily="34" charset="0"/>
+                <a:ea typeface="HYSinMyeongJo-Medium" pitchFamily="34" charset="-122"/>
+                <a:cs typeface="HYSinMyeongJo-Medium" pitchFamily="34" charset="-120"/>
+              </a:rPr>
+              <a:t>설계 과정 요약</a:t>
             </a:r>
             <a:endParaRPr lang="en-US" sz="3000" dirty="0"/>
           </a:p>
@@ -4299,16 +4066,9 @@
             </a:avLst>
           </a:prstGeom>
           <a:solidFill>
-            <a:srgbClr val="F3E7D6"/>
+            <a:srgbClr val="F7EEE0"/>
           </a:solidFill>
           <a:ln/>
-          <a:effectLst>
-            <a:outerShdw sx="100000" sy="100000" kx="0" ky="0" algn="bl" rotWithShape="0" blurRad="101600" dist="38100" dir="5400000">
-              <a:srgbClr val="000000">
-                <a:alpha val="10000"/>
-              </a:srgbClr>
-            </a:outerShdw>
-          </a:effectLst>
         </p:spPr>
       </p:sp>
       <p:sp>
@@ -4319,8 +4079,8 @@
         </p:nvSpPr>
         <p:spPr>
           <a:xfrm>
-            <a:off x="822960" y="1234440"/>
-            <a:ext cx="3657600" cy="365760"/>
+            <a:off x="1089660" y="1310640"/>
+            <a:ext cx="6949440" cy="274320"/>
           </a:xfrm>
           <a:prstGeom prst="rect">
             <a:avLst/>
@@ -4332,42 +4092,84 @@
           <a:bodyPr wrap="square" lIns="0" tIns="0" rIns="0" bIns="0" rtlCol="0" anchor="ctr"/>
           <a:lstStyle/>
           <a:p>
-            <a:pPr algn="ctr" indent="0" marL="0">
-              <a:buNone/>
-            </a:pPr>
-            <a:r>
-              <a:rPr lang="en-US" sz="1600" b="1" dirty="0">
-                <a:solidFill>
-                  <a:srgbClr val="2E1A0F"/>
-                </a:solidFill>
-                <a:latin typeface="Cambria" pitchFamily="34" charset="0"/>
-                <a:ea typeface="Cambria" pitchFamily="34" charset="-122"/>
-                <a:cs typeface="Cambria" pitchFamily="34" charset="-120"/>
-              </a:rPr>
-              <a:t>③ 처리 중</a:t>
-            </a:r>
-            <a:endParaRPr lang="en-US" sz="1600" dirty="0"/>
-          </a:p>
-        </p:txBody>
+            <a:pPr marL="0" indent="0" algn="l">
+              <a:buNone/>
+            </a:pPr>
+            <a:r>
+              <a:rPr lang="en-US" sz="1300" b="1" dirty="0">
+                <a:solidFill>
+                  <a:srgbClr val="C17F3E"/>
+                </a:solidFill>
+                <a:latin typeface="HYSinMyeongJo-Medium" pitchFamily="34" charset="0"/>
+                <a:ea typeface="HYSinMyeongJo-Medium" pitchFamily="34" charset="-122"/>
+                <a:cs typeface="HYSinMyeongJo-Medium" pitchFamily="34" charset="-120"/>
+              </a:rPr>
+              <a:t>지금까지 — 기획 완료</a:t>
+            </a:r>
+            <a:endParaRPr lang="en-US" sz="1300" dirty="0"/>
+          </a:p>
+        </p:txBody>
+      </p:sp>
+      <p:sp>
+        <p:nvSpPr>
+          <p:cNvPr id="5" name="Shape 3"/>
+          <p:cNvSpPr/>
+          <p:nvPr/>
+        </p:nvSpPr>
+        <p:spPr>
+          <a:xfrm>
+            <a:off x="1089660" y="1630680"/>
+            <a:ext cx="2130552" cy="960120"/>
+          </a:xfrm>
+          <a:prstGeom prst="roundRect">
+            <a:avLst>
+              <a:gd name="adj" fmla="val 7619"/>
+            </a:avLst>
+          </a:prstGeom>
+          <a:solidFill>
+            <a:srgbClr val="FFFFFF"/>
+          </a:solidFill>
+          <a:ln/>
+        </p:spPr>
+      </p:sp>
+      <p:sp>
+        <p:nvSpPr>
+          <p:cNvPr id="6" name="Shape 4"/>
+          <p:cNvSpPr/>
+          <p:nvPr/>
+        </p:nvSpPr>
+        <p:spPr>
+          <a:xfrm>
+            <a:off x="1226820" y="1767840"/>
+            <a:ext cx="292608" cy="292608"/>
+          </a:xfrm>
+          <a:prstGeom prst="ellipse">
+            <a:avLst/>
+          </a:prstGeom>
+          <a:solidFill>
+            <a:srgbClr val="C17F3E"/>
+          </a:solidFill>
+          <a:ln/>
+        </p:spPr>
       </p:sp>
       <p:pic>
         <p:nvPicPr>
-          <p:cNvPr id="5" name="Image 0" descr="../screens/processing-screen.png">    </p:cNvPr>
+          <p:cNvPr id="7" name="Image 0" descr="preencoded.png"/>
           <p:cNvPicPr>
             <a:picLocks noChangeAspect="1"/>
           </p:cNvPicPr>
           <p:nvPr/>
         </p:nvPicPr>
         <p:blipFill>
-          <a:blip r:embed="rId1"/>
+          <a:blip r:embed="rId3"/>
           <a:stretch>
             <a:fillRect/>
           </a:stretch>
         </p:blipFill>
         <p:spPr>
           <a:xfrm>
-            <a:off x="1720378" y="1691640"/>
-            <a:ext cx="1862763" cy="2834640"/>
+            <a:off x="1290828" y="1831848"/>
+            <a:ext cx="164592" cy="164592"/>
           </a:xfrm>
           <a:prstGeom prst="rect">
             <a:avLst/>
@@ -4376,14 +4178,14 @@
       </p:pic>
       <p:sp>
         <p:nvSpPr>
-          <p:cNvPr id="6" name="Text 3"/>
-          <p:cNvSpPr/>
-          <p:nvPr/>
-        </p:nvSpPr>
-        <p:spPr>
-          <a:xfrm>
-            <a:off x="4663440" y="1234440"/>
-            <a:ext cx="3657600" cy="365760"/>
+          <p:cNvPr id="8" name="Text 5"/>
+          <p:cNvSpPr/>
+          <p:nvPr/>
+        </p:nvSpPr>
+        <p:spPr>
+          <a:xfrm>
+            <a:off x="1546860" y="1740408"/>
+            <a:ext cx="1627632" cy="365760"/>
           </a:xfrm>
           <a:prstGeom prst="rect">
             <a:avLst/>
@@ -4395,48 +4197,981 @@
           <a:bodyPr wrap="square" lIns="0" tIns="0" rIns="0" bIns="0" rtlCol="0" anchor="ctr"/>
           <a:lstStyle/>
           <a:p>
-            <a:pPr algn="ctr" indent="0" marL="0">
-              <a:buNone/>
-            </a:pPr>
-            <a:r>
-              <a:rPr lang="en-US" sz="1600" b="1" dirty="0">
-                <a:solidFill>
-                  <a:srgbClr val="2E1A0F"/>
-                </a:solidFill>
-                <a:latin typeface="Cambria" pitchFamily="34" charset="0"/>
-                <a:ea typeface="Cambria" pitchFamily="34" charset="-122"/>
-                <a:cs typeface="Cambria" pitchFamily="34" charset="-120"/>
-              </a:rPr>
-              <a:t>④ 결과</a:t>
-            </a:r>
-            <a:endParaRPr lang="en-US" sz="1600" dirty="0"/>
-          </a:p>
-        </p:txBody>
+            <a:pPr marL="0" indent="0" algn="l">
+              <a:buNone/>
+            </a:pPr>
+            <a:r>
+              <a:rPr lang="en-US" sz="1100" b="1" dirty="0">
+                <a:solidFill>
+                  <a:srgbClr val="2E1A0F"/>
+                </a:solidFill>
+                <a:latin typeface="HYSinMyeongJo-Medium" pitchFamily="34" charset="0"/>
+                <a:ea typeface="HYSinMyeongJo-Medium" pitchFamily="34" charset="-122"/>
+                <a:cs typeface="HYSinMyeongJo-Medium" pitchFamily="34" charset="-120"/>
+              </a:rPr>
+              <a:t>아이디어 검증</a:t>
+            </a:r>
+            <a:endParaRPr lang="en-US" sz="1100" dirty="0"/>
+          </a:p>
+        </p:txBody>
+      </p:sp>
+      <p:sp>
+        <p:nvSpPr>
+          <p:cNvPr id="9" name="Text 6"/>
+          <p:cNvSpPr/>
+          <p:nvPr/>
+        </p:nvSpPr>
+        <p:spPr>
+          <a:xfrm>
+            <a:off x="1226820" y="2133600"/>
+            <a:ext cx="1856232" cy="411480"/>
+          </a:xfrm>
+          <a:prstGeom prst="rect">
+            <a:avLst/>
+          </a:prstGeom>
+          <a:noFill/>
+          <a:ln/>
+        </p:spPr>
+        <p:txBody>
+          <a:bodyPr wrap="square" lIns="0" tIns="0" rIns="0" bIns="0" rtlCol="0" anchor="ctr"/>
+          <a:lstStyle/>
+          <a:p>
+            <a:pPr marL="0" indent="0" algn="l">
+              <a:buNone/>
+            </a:pPr>
+            <a:r>
+              <a:rPr lang="en-US" sz="950" dirty="0">
+                <a:solidFill>
+                  <a:srgbClr val="8A6C52"/>
+                </a:solidFill>
+                <a:latin typeface="HYSinMyeongJo-Medium" pitchFamily="34" charset="0"/>
+                <a:ea typeface="HYSinMyeongJo-Medium" pitchFamily="34" charset="-122"/>
+                <a:cs typeface="HYSinMyeongJo-Medium" pitchFamily="34" charset="-120"/>
+              </a:rPr>
+              <a:t>실현 가능성과 차별성을 기준으로한 구현 가능성 확인</a:t>
+            </a:r>
+            <a:endParaRPr lang="en-US" sz="950" dirty="0"/>
+          </a:p>
+        </p:txBody>
+      </p:sp>
+      <p:sp>
+        <p:nvSpPr>
+          <p:cNvPr id="10" name="Shape 7"/>
+          <p:cNvSpPr/>
+          <p:nvPr/>
+        </p:nvSpPr>
+        <p:spPr>
+          <a:xfrm>
+            <a:off x="3220212" y="2110740"/>
+            <a:ext cx="274320" cy="0"/>
+          </a:xfrm>
+          <a:prstGeom prst="line">
+            <a:avLst/>
+          </a:prstGeom>
+          <a:noFill/>
+          <a:ln w="19050">
+            <a:solidFill>
+              <a:srgbClr val="C17F3E"/>
+            </a:solidFill>
+            <a:prstDash val="solid"/>
+            <a:tailEnd type="triangle"/>
+          </a:ln>
+        </p:spPr>
+      </p:sp>
+      <p:sp>
+        <p:nvSpPr>
+          <p:cNvPr id="11" name="Shape 8"/>
+          <p:cNvSpPr/>
+          <p:nvPr/>
+        </p:nvSpPr>
+        <p:spPr>
+          <a:xfrm>
+            <a:off x="3494532" y="1630680"/>
+            <a:ext cx="2130552" cy="960120"/>
+          </a:xfrm>
+          <a:prstGeom prst="roundRect">
+            <a:avLst>
+              <a:gd name="adj" fmla="val 7619"/>
+            </a:avLst>
+          </a:prstGeom>
+          <a:solidFill>
+            <a:srgbClr val="FFFFFF"/>
+          </a:solidFill>
+          <a:ln/>
+        </p:spPr>
+      </p:sp>
+      <p:sp>
+        <p:nvSpPr>
+          <p:cNvPr id="12" name="Shape 9"/>
+          <p:cNvSpPr/>
+          <p:nvPr/>
+        </p:nvSpPr>
+        <p:spPr>
+          <a:xfrm>
+            <a:off x="3631692" y="1767840"/>
+            <a:ext cx="292608" cy="292608"/>
+          </a:xfrm>
+          <a:prstGeom prst="ellipse">
+            <a:avLst/>
+          </a:prstGeom>
+          <a:solidFill>
+            <a:srgbClr val="C17F3E"/>
+          </a:solidFill>
+          <a:ln/>
+        </p:spPr>
       </p:sp>
       <p:pic>
         <p:nvPicPr>
-          <p:cNvPr id="7" name="Image 1" descr="../screens/result-screen.png">    </p:cNvPr>
+          <p:cNvPr id="13" name="Image 1" descr="preencoded.png"/>
           <p:cNvPicPr>
             <a:picLocks noChangeAspect="1"/>
           </p:cNvPicPr>
           <p:nvPr/>
         </p:nvPicPr>
         <p:blipFill>
-          <a:blip r:embed="rId2"/>
+          <a:blip r:embed="rId3"/>
           <a:stretch>
             <a:fillRect/>
           </a:stretch>
         </p:blipFill>
         <p:spPr>
           <a:xfrm>
-            <a:off x="5560858" y="1691640"/>
-            <a:ext cx="1862763" cy="2834640"/>
+            <a:off x="3695700" y="1831848"/>
+            <a:ext cx="164592" cy="164592"/>
           </a:xfrm>
           <a:prstGeom prst="rect">
             <a:avLst/>
           </a:prstGeom>
         </p:spPr>
       </p:pic>
+      <p:sp>
+        <p:nvSpPr>
+          <p:cNvPr id="14" name="Text 10"/>
+          <p:cNvSpPr/>
+          <p:nvPr/>
+        </p:nvSpPr>
+        <p:spPr>
+          <a:xfrm>
+            <a:off x="3951732" y="1740408"/>
+            <a:ext cx="1627632" cy="365760"/>
+          </a:xfrm>
+          <a:prstGeom prst="rect">
+            <a:avLst/>
+          </a:prstGeom>
+          <a:noFill/>
+          <a:ln/>
+        </p:spPr>
+        <p:txBody>
+          <a:bodyPr wrap="square" lIns="0" tIns="0" rIns="0" bIns="0" rtlCol="0" anchor="ctr"/>
+          <a:lstStyle/>
+          <a:p>
+            <a:pPr marL="0" indent="0" algn="l">
+              <a:buNone/>
+            </a:pPr>
+            <a:r>
+              <a:rPr lang="en-US" sz="1100" b="1" dirty="0">
+                <a:solidFill>
+                  <a:srgbClr val="2E1A0F"/>
+                </a:solidFill>
+                <a:latin typeface="HYSinMyeongJo-Medium" pitchFamily="34" charset="0"/>
+                <a:ea typeface="HYSinMyeongJo-Medium" pitchFamily="34" charset="-122"/>
+                <a:cs typeface="HYSinMyeongJo-Medium" pitchFamily="34" charset="-120"/>
+              </a:rPr>
+              <a:t>전공 지식 기반 설계</a:t>
+            </a:r>
+            <a:endParaRPr lang="en-US" sz="1100" dirty="0"/>
+          </a:p>
+        </p:txBody>
+      </p:sp>
+      <p:sp>
+        <p:nvSpPr>
+          <p:cNvPr id="15" name="Text 11"/>
+          <p:cNvSpPr/>
+          <p:nvPr/>
+        </p:nvSpPr>
+        <p:spPr>
+          <a:xfrm>
+            <a:off x="3631692" y="2133600"/>
+            <a:ext cx="1856232" cy="411480"/>
+          </a:xfrm>
+          <a:prstGeom prst="rect">
+            <a:avLst/>
+          </a:prstGeom>
+          <a:noFill/>
+          <a:ln/>
+        </p:spPr>
+        <p:txBody>
+          <a:bodyPr wrap="square" lIns="0" tIns="0" rIns="0" bIns="0" rtlCol="0" anchor="ctr"/>
+          <a:lstStyle/>
+          <a:p>
+            <a:pPr marL="0" indent="0" algn="l">
+              <a:buNone/>
+            </a:pPr>
+            <a:r>
+              <a:rPr lang="en-US" sz="950" dirty="0">
+                <a:solidFill>
+                  <a:srgbClr val="8A6C52"/>
+                </a:solidFill>
+                <a:latin typeface="HYSinMyeongJo-Medium" pitchFamily="34" charset="0"/>
+                <a:ea typeface="HYSinMyeongJo-Medium" pitchFamily="34" charset="-122"/>
+                <a:cs typeface="HYSinMyeongJo-Medium" pitchFamily="34" charset="-120"/>
+              </a:rPr>
+              <a:t>수면 과학 논문을 계산 근거로</a:t>
+            </a:r>
+            <a:endParaRPr lang="en-US" sz="950" dirty="0"/>
+          </a:p>
+        </p:txBody>
+      </p:sp>
+      <p:sp>
+        <p:nvSpPr>
+          <p:cNvPr id="16" name="Shape 12"/>
+          <p:cNvSpPr/>
+          <p:nvPr/>
+        </p:nvSpPr>
+        <p:spPr>
+          <a:xfrm>
+            <a:off x="5625084" y="2110740"/>
+            <a:ext cx="274320" cy="0"/>
+          </a:xfrm>
+          <a:prstGeom prst="line">
+            <a:avLst/>
+          </a:prstGeom>
+          <a:noFill/>
+          <a:ln w="19050">
+            <a:solidFill>
+              <a:srgbClr val="C17F3E"/>
+            </a:solidFill>
+            <a:prstDash val="solid"/>
+            <a:tailEnd type="triangle"/>
+          </a:ln>
+        </p:spPr>
+      </p:sp>
+      <p:sp>
+        <p:nvSpPr>
+          <p:cNvPr id="17" name="Shape 13"/>
+          <p:cNvSpPr/>
+          <p:nvPr/>
+        </p:nvSpPr>
+        <p:spPr>
+          <a:xfrm>
+            <a:off x="5899404" y="1630680"/>
+            <a:ext cx="2130552" cy="960120"/>
+          </a:xfrm>
+          <a:prstGeom prst="roundRect">
+            <a:avLst>
+              <a:gd name="adj" fmla="val 7619"/>
+            </a:avLst>
+          </a:prstGeom>
+          <a:solidFill>
+            <a:srgbClr val="FFFFFF"/>
+          </a:solidFill>
+          <a:ln/>
+        </p:spPr>
+      </p:sp>
+      <p:sp>
+        <p:nvSpPr>
+          <p:cNvPr id="18" name="Shape 14"/>
+          <p:cNvSpPr/>
+          <p:nvPr/>
+        </p:nvSpPr>
+        <p:spPr>
+          <a:xfrm>
+            <a:off x="6036564" y="1767840"/>
+            <a:ext cx="292608" cy="292608"/>
+          </a:xfrm>
+          <a:prstGeom prst="ellipse">
+            <a:avLst/>
+          </a:prstGeom>
+          <a:solidFill>
+            <a:srgbClr val="C17F3E"/>
+          </a:solidFill>
+          <a:ln/>
+        </p:spPr>
+      </p:sp>
+      <p:pic>
+        <p:nvPicPr>
+          <p:cNvPr id="19" name="Image 2" descr="preencoded.png"/>
+          <p:cNvPicPr>
+            <a:picLocks noChangeAspect="1"/>
+          </p:cNvPicPr>
+          <p:nvPr/>
+        </p:nvPicPr>
+        <p:blipFill>
+          <a:blip r:embed="rId3"/>
+          <a:stretch>
+            <a:fillRect/>
+          </a:stretch>
+        </p:blipFill>
+        <p:spPr>
+          <a:xfrm>
+            <a:off x="6100572" y="1831848"/>
+            <a:ext cx="164592" cy="164592"/>
+          </a:xfrm>
+          <a:prstGeom prst="rect">
+            <a:avLst/>
+          </a:prstGeom>
+        </p:spPr>
+      </p:pic>
+      <p:sp>
+        <p:nvSpPr>
+          <p:cNvPr id="20" name="Text 15"/>
+          <p:cNvSpPr/>
+          <p:nvPr/>
+        </p:nvSpPr>
+        <p:spPr>
+          <a:xfrm>
+            <a:off x="6356604" y="1740408"/>
+            <a:ext cx="1627632" cy="365760"/>
+          </a:xfrm>
+          <a:prstGeom prst="rect">
+            <a:avLst/>
+          </a:prstGeom>
+          <a:noFill/>
+          <a:ln/>
+        </p:spPr>
+        <p:txBody>
+          <a:bodyPr wrap="square" lIns="0" tIns="0" rIns="0" bIns="0" rtlCol="0" anchor="ctr"/>
+          <a:lstStyle/>
+          <a:p>
+            <a:pPr marL="0" indent="0" algn="l">
+              <a:buNone/>
+            </a:pPr>
+            <a:r>
+              <a:rPr lang="en-US" sz="1100" b="1" dirty="0">
+                <a:solidFill>
+                  <a:srgbClr val="2E1A0F"/>
+                </a:solidFill>
+                <a:latin typeface="HYSinMyeongJo-Medium" pitchFamily="34" charset="0"/>
+                <a:ea typeface="HYSinMyeongJo-Medium" pitchFamily="34" charset="-122"/>
+                <a:cs typeface="HYSinMyeongJo-Medium" pitchFamily="34" charset="-120"/>
+              </a:rPr>
+              <a:t>시나리오·기획서 완성</a:t>
+            </a:r>
+            <a:endParaRPr lang="en-US" sz="1100" dirty="0"/>
+          </a:p>
+        </p:txBody>
+      </p:sp>
+      <p:sp>
+        <p:nvSpPr>
+          <p:cNvPr id="21" name="Text 16"/>
+          <p:cNvSpPr/>
+          <p:nvPr/>
+        </p:nvSpPr>
+        <p:spPr>
+          <a:xfrm>
+            <a:off x="6036564" y="2133600"/>
+            <a:ext cx="1856232" cy="411480"/>
+          </a:xfrm>
+          <a:prstGeom prst="rect">
+            <a:avLst/>
+          </a:prstGeom>
+          <a:noFill/>
+          <a:ln/>
+        </p:spPr>
+        <p:txBody>
+          <a:bodyPr wrap="square" lIns="0" tIns="0" rIns="0" bIns="0" rtlCol="0" anchor="ctr"/>
+          <a:lstStyle/>
+          <a:p>
+            <a:pPr marL="0" indent="0" algn="l">
+              <a:buNone/>
+            </a:pPr>
+            <a:r>
+              <a:rPr lang="en-US" sz="950" dirty="0">
+                <a:solidFill>
+                  <a:srgbClr val="8A6C52"/>
+                </a:solidFill>
+                <a:latin typeface="HYSinMyeongJo-Medium" pitchFamily="34" charset="0"/>
+                <a:ea typeface="HYSinMyeongJo-Medium" pitchFamily="34" charset="-122"/>
+                <a:cs typeface="HYSinMyeongJo-Medium" pitchFamily="34" charset="-120"/>
+              </a:rPr>
+              <a:t>사용자 흐름 중심으로 화면 시각화</a:t>
+            </a:r>
+            <a:endParaRPr lang="en-US" sz="950" dirty="0"/>
+          </a:p>
+        </p:txBody>
+      </p:sp>
+      <p:sp>
+        <p:nvSpPr>
+          <p:cNvPr id="22" name="Text 17"/>
+          <p:cNvSpPr/>
+          <p:nvPr/>
+        </p:nvSpPr>
+        <p:spPr>
+          <a:xfrm>
+            <a:off x="1089660" y="2773680"/>
+            <a:ext cx="6949440" cy="274320"/>
+          </a:xfrm>
+          <a:prstGeom prst="rect">
+            <a:avLst/>
+          </a:prstGeom>
+          <a:noFill/>
+          <a:ln/>
+        </p:spPr>
+        <p:txBody>
+          <a:bodyPr wrap="square" lIns="0" tIns="0" rIns="0" bIns="0" rtlCol="0" anchor="ctr"/>
+          <a:lstStyle/>
+          <a:p>
+            <a:pPr marL="0" indent="0" algn="l">
+              <a:buNone/>
+            </a:pPr>
+            <a:r>
+              <a:rPr lang="en-US" sz="1300" b="1" dirty="0">
+                <a:solidFill>
+                  <a:srgbClr val="8A6C52"/>
+                </a:solidFill>
+                <a:latin typeface="HYSinMyeongJo-Medium" pitchFamily="34" charset="0"/>
+                <a:ea typeface="HYSinMyeongJo-Medium" pitchFamily="34" charset="-122"/>
+                <a:cs typeface="HYSinMyeongJo-Medium" pitchFamily="34" charset="-120"/>
+              </a:rPr>
+              <a:t>앞으로 — 4주 개발 계획</a:t>
+            </a:r>
+            <a:endParaRPr lang="en-US" sz="1300" dirty="0"/>
+          </a:p>
+        </p:txBody>
+      </p:sp>
+      <p:sp>
+        <p:nvSpPr>
+          <p:cNvPr id="23" name="Shape 18"/>
+          <p:cNvSpPr/>
+          <p:nvPr/>
+        </p:nvSpPr>
+        <p:spPr>
+          <a:xfrm>
+            <a:off x="1089660" y="3093720"/>
+            <a:ext cx="1563624" cy="1234440"/>
+          </a:xfrm>
+          <a:prstGeom prst="roundRect">
+            <a:avLst>
+              <a:gd name="adj" fmla="val 5926"/>
+            </a:avLst>
+          </a:prstGeom>
+          <a:solidFill>
+            <a:srgbClr val="FBF7F2"/>
+          </a:solidFill>
+          <a:ln w="12700">
+            <a:solidFill>
+              <a:srgbClr val="C9B8A4"/>
+            </a:solidFill>
+            <a:prstDash val="dash"/>
+          </a:ln>
+        </p:spPr>
+      </p:sp>
+      <p:sp>
+        <p:nvSpPr>
+          <p:cNvPr id="24" name="Text 19"/>
+          <p:cNvSpPr/>
+          <p:nvPr/>
+        </p:nvSpPr>
+        <p:spPr>
+          <a:xfrm>
+            <a:off x="1089660" y="3230880"/>
+            <a:ext cx="1563624" cy="320040"/>
+          </a:xfrm>
+          <a:prstGeom prst="rect">
+            <a:avLst/>
+          </a:prstGeom>
+          <a:noFill/>
+          <a:ln/>
+        </p:spPr>
+        <p:txBody>
+          <a:bodyPr wrap="square" lIns="0" tIns="0" rIns="0" bIns="0" rtlCol="0" anchor="ctr"/>
+          <a:lstStyle/>
+          <a:p>
+            <a:pPr marL="0" indent="0" algn="ctr">
+              <a:buNone/>
+            </a:pPr>
+            <a:r>
+              <a:rPr lang="en-US" sz="1300" b="1" dirty="0">
+                <a:solidFill>
+                  <a:srgbClr val="2E1A0F"/>
+                </a:solidFill>
+                <a:latin typeface="HYSinMyeongJo-Medium" pitchFamily="34" charset="0"/>
+                <a:ea typeface="HYSinMyeongJo-Medium" pitchFamily="34" charset="-122"/>
+                <a:cs typeface="HYSinMyeongJo-Medium" pitchFamily="34" charset="-120"/>
+              </a:rPr>
+              <a:t>1주차</a:t>
+            </a:r>
+            <a:endParaRPr lang="en-US" sz="1300" dirty="0"/>
+          </a:p>
+        </p:txBody>
+      </p:sp>
+      <p:sp>
+        <p:nvSpPr>
+          <p:cNvPr id="25" name="Text 20"/>
+          <p:cNvSpPr/>
+          <p:nvPr/>
+        </p:nvSpPr>
+        <p:spPr>
+          <a:xfrm>
+            <a:off x="1181100" y="3624072"/>
+            <a:ext cx="1380744" cy="640080"/>
+          </a:xfrm>
+          <a:prstGeom prst="rect">
+            <a:avLst/>
+          </a:prstGeom>
+          <a:noFill/>
+          <a:ln/>
+        </p:spPr>
+        <p:txBody>
+          <a:bodyPr wrap="square" lIns="0" tIns="0" rIns="0" bIns="0" rtlCol="0" anchor="ctr"/>
+          <a:lstStyle/>
+          <a:p>
+            <a:pPr marL="0" indent="0" algn="ctr">
+              <a:buNone/>
+            </a:pPr>
+            <a:r>
+              <a:rPr lang="en-US" sz="950" dirty="0">
+                <a:solidFill>
+                  <a:srgbClr val="8A6C52"/>
+                </a:solidFill>
+                <a:latin typeface="HYSinMyeongJo-Medium" pitchFamily="34" charset="0"/>
+                <a:ea typeface="HYSinMyeongJo-Medium" pitchFamily="34" charset="-122"/>
+                <a:cs typeface="HYSinMyeongJo-Medium" pitchFamily="34" charset="-120"/>
+              </a:rPr>
+              <a:t>아이디어 구상</a:t>
+            </a:r>
+            <a:endParaRPr lang="en-US" sz="950" dirty="0"/>
+          </a:p>
+          <a:p>
+            <a:pPr marL="0" indent="0" algn="ctr">
+              <a:buNone/>
+            </a:pPr>
+            <a:r>
+              <a:rPr lang="en-US" sz="950" dirty="0">
+                <a:solidFill>
+                  <a:srgbClr val="8A6C52"/>
+                </a:solidFill>
+                <a:latin typeface="HYSinMyeongJo-Medium" pitchFamily="34" charset="0"/>
+                <a:ea typeface="HYSinMyeongJo-Medium" pitchFamily="34" charset="-122"/>
+                <a:cs typeface="HYSinMyeongJo-Medium" pitchFamily="34" charset="-120"/>
+              </a:rPr>
+              <a:t>및 기획</a:t>
+            </a:r>
+            <a:endParaRPr lang="en-US" sz="950" dirty="0"/>
+          </a:p>
+        </p:txBody>
+      </p:sp>
+      <p:sp>
+        <p:nvSpPr>
+          <p:cNvPr id="26" name="Shape 21"/>
+          <p:cNvSpPr/>
+          <p:nvPr/>
+        </p:nvSpPr>
+        <p:spPr>
+          <a:xfrm>
+            <a:off x="2653284" y="3710940"/>
+            <a:ext cx="228600" cy="0"/>
+          </a:xfrm>
+          <a:prstGeom prst="line">
+            <a:avLst/>
+          </a:prstGeom>
+          <a:noFill/>
+          <a:ln w="19050">
+            <a:solidFill>
+              <a:srgbClr val="8A6C52"/>
+            </a:solidFill>
+            <a:prstDash val="dash"/>
+            <a:tailEnd type="triangle"/>
+          </a:ln>
+        </p:spPr>
+      </p:sp>
+      <p:sp>
+        <p:nvSpPr>
+          <p:cNvPr id="27" name="Shape 22"/>
+          <p:cNvSpPr/>
+          <p:nvPr/>
+        </p:nvSpPr>
+        <p:spPr>
+          <a:xfrm>
+            <a:off x="2881884" y="3093720"/>
+            <a:ext cx="1563624" cy="1234440"/>
+          </a:xfrm>
+          <a:prstGeom prst="roundRect">
+            <a:avLst>
+              <a:gd name="adj" fmla="val 5926"/>
+            </a:avLst>
+          </a:prstGeom>
+          <a:solidFill>
+            <a:srgbClr val="FBF7F2"/>
+          </a:solidFill>
+          <a:ln w="12700">
+            <a:solidFill>
+              <a:srgbClr val="C9B8A4"/>
+            </a:solidFill>
+            <a:prstDash val="dash"/>
+          </a:ln>
+        </p:spPr>
+      </p:sp>
+      <p:sp>
+        <p:nvSpPr>
+          <p:cNvPr id="28" name="Text 23"/>
+          <p:cNvSpPr/>
+          <p:nvPr/>
+        </p:nvSpPr>
+        <p:spPr>
+          <a:xfrm>
+            <a:off x="2881884" y="3230880"/>
+            <a:ext cx="1563624" cy="320040"/>
+          </a:xfrm>
+          <a:prstGeom prst="rect">
+            <a:avLst/>
+          </a:prstGeom>
+          <a:noFill/>
+          <a:ln/>
+        </p:spPr>
+        <p:txBody>
+          <a:bodyPr wrap="square" lIns="0" tIns="0" rIns="0" bIns="0" rtlCol="0" anchor="ctr"/>
+          <a:lstStyle/>
+          <a:p>
+            <a:pPr marL="0" indent="0" algn="ctr">
+              <a:buNone/>
+            </a:pPr>
+            <a:r>
+              <a:rPr lang="en-US" sz="1300" b="1" dirty="0">
+                <a:solidFill>
+                  <a:srgbClr val="2E1A0F"/>
+                </a:solidFill>
+                <a:latin typeface="HYSinMyeongJo-Medium" pitchFamily="34" charset="0"/>
+                <a:ea typeface="HYSinMyeongJo-Medium" pitchFamily="34" charset="-122"/>
+                <a:cs typeface="HYSinMyeongJo-Medium" pitchFamily="34" charset="-120"/>
+              </a:rPr>
+              <a:t>2주차</a:t>
+            </a:r>
+            <a:endParaRPr lang="en-US" sz="1300" dirty="0"/>
+          </a:p>
+        </p:txBody>
+      </p:sp>
+      <p:sp>
+        <p:nvSpPr>
+          <p:cNvPr id="29" name="Text 24"/>
+          <p:cNvSpPr/>
+          <p:nvPr/>
+        </p:nvSpPr>
+        <p:spPr>
+          <a:xfrm>
+            <a:off x="2973324" y="3624072"/>
+            <a:ext cx="1380744" cy="640080"/>
+          </a:xfrm>
+          <a:prstGeom prst="rect">
+            <a:avLst/>
+          </a:prstGeom>
+          <a:noFill/>
+          <a:ln/>
+        </p:spPr>
+        <p:txBody>
+          <a:bodyPr wrap="square" lIns="0" tIns="0" rIns="0" bIns="0" rtlCol="0" anchor="ctr"/>
+          <a:lstStyle/>
+          <a:p>
+            <a:pPr marL="0" indent="0" algn="ctr">
+              <a:buNone/>
+            </a:pPr>
+            <a:r>
+              <a:rPr lang="en-US" sz="950" dirty="0">
+                <a:solidFill>
+                  <a:srgbClr val="8A6C52"/>
+                </a:solidFill>
+                <a:latin typeface="HYSinMyeongJo-Medium" pitchFamily="34" charset="0"/>
+                <a:ea typeface="HYSinMyeongJo-Medium" pitchFamily="34" charset="-122"/>
+                <a:cs typeface="HYSinMyeongJo-Medium" pitchFamily="34" charset="-120"/>
+              </a:rPr>
+              <a:t>계산 엔진 구현</a:t>
+            </a:r>
+            <a:endParaRPr lang="en-US" sz="950" dirty="0"/>
+          </a:p>
+        </p:txBody>
+      </p:sp>
+      <p:sp>
+        <p:nvSpPr>
+          <p:cNvPr id="30" name="Shape 25"/>
+          <p:cNvSpPr/>
+          <p:nvPr/>
+        </p:nvSpPr>
+        <p:spPr>
+          <a:xfrm>
+            <a:off x="4445508" y="3710940"/>
+            <a:ext cx="228600" cy="0"/>
+          </a:xfrm>
+          <a:prstGeom prst="line">
+            <a:avLst/>
+          </a:prstGeom>
+          <a:noFill/>
+          <a:ln w="19050">
+            <a:solidFill>
+              <a:srgbClr val="8A6C52"/>
+            </a:solidFill>
+            <a:prstDash val="dash"/>
+            <a:tailEnd type="triangle"/>
+          </a:ln>
+        </p:spPr>
+      </p:sp>
+      <p:sp>
+        <p:nvSpPr>
+          <p:cNvPr id="31" name="Shape 26"/>
+          <p:cNvSpPr/>
+          <p:nvPr/>
+        </p:nvSpPr>
+        <p:spPr>
+          <a:xfrm>
+            <a:off x="4674108" y="3093720"/>
+            <a:ext cx="1563624" cy="1234440"/>
+          </a:xfrm>
+          <a:prstGeom prst="roundRect">
+            <a:avLst>
+              <a:gd name="adj" fmla="val 5926"/>
+            </a:avLst>
+          </a:prstGeom>
+          <a:solidFill>
+            <a:srgbClr val="FBF7F2"/>
+          </a:solidFill>
+          <a:ln w="12700">
+            <a:solidFill>
+              <a:srgbClr val="C9B8A4"/>
+            </a:solidFill>
+            <a:prstDash val="dash"/>
+          </a:ln>
+        </p:spPr>
+      </p:sp>
+      <p:sp>
+        <p:nvSpPr>
+          <p:cNvPr id="32" name="Text 27"/>
+          <p:cNvSpPr/>
+          <p:nvPr/>
+        </p:nvSpPr>
+        <p:spPr>
+          <a:xfrm>
+            <a:off x="4674108" y="3230880"/>
+            <a:ext cx="1563624" cy="320040"/>
+          </a:xfrm>
+          <a:prstGeom prst="rect">
+            <a:avLst/>
+          </a:prstGeom>
+          <a:noFill/>
+          <a:ln/>
+        </p:spPr>
+        <p:txBody>
+          <a:bodyPr wrap="square" lIns="0" tIns="0" rIns="0" bIns="0" rtlCol="0" anchor="ctr"/>
+          <a:lstStyle/>
+          <a:p>
+            <a:pPr marL="0" indent="0" algn="ctr">
+              <a:buNone/>
+            </a:pPr>
+            <a:r>
+              <a:rPr lang="en-US" sz="1300" b="1" dirty="0">
+                <a:solidFill>
+                  <a:srgbClr val="2E1A0F"/>
+                </a:solidFill>
+                <a:latin typeface="HYSinMyeongJo-Medium" pitchFamily="34" charset="0"/>
+                <a:ea typeface="HYSinMyeongJo-Medium" pitchFamily="34" charset="-122"/>
+                <a:cs typeface="HYSinMyeongJo-Medium" pitchFamily="34" charset="-120"/>
+              </a:rPr>
+              <a:t>3주차</a:t>
+            </a:r>
+            <a:endParaRPr lang="en-US" sz="1300" dirty="0"/>
+          </a:p>
+        </p:txBody>
+      </p:sp>
+      <p:sp>
+        <p:nvSpPr>
+          <p:cNvPr id="33" name="Text 28"/>
+          <p:cNvSpPr/>
+          <p:nvPr/>
+        </p:nvSpPr>
+        <p:spPr>
+          <a:xfrm>
+            <a:off x="4765548" y="3624072"/>
+            <a:ext cx="1380744" cy="640080"/>
+          </a:xfrm>
+          <a:prstGeom prst="rect">
+            <a:avLst/>
+          </a:prstGeom>
+          <a:noFill/>
+          <a:ln/>
+        </p:spPr>
+        <p:txBody>
+          <a:bodyPr wrap="square" lIns="0" tIns="0" rIns="0" bIns="0" rtlCol="0" anchor="ctr"/>
+          <a:lstStyle/>
+          <a:p>
+            <a:pPr marL="0" indent="0" algn="ctr">
+              <a:buNone/>
+            </a:pPr>
+            <a:r>
+              <a:rPr lang="en-US" sz="950" dirty="0">
+                <a:solidFill>
+                  <a:srgbClr val="8A6C52"/>
+                </a:solidFill>
+                <a:latin typeface="HYSinMyeongJo-Medium" pitchFamily="34" charset="0"/>
+                <a:ea typeface="HYSinMyeongJo-Medium" pitchFamily="34" charset="-122"/>
+                <a:cs typeface="HYSinMyeongJo-Medium" pitchFamily="34" charset="-120"/>
+              </a:rPr>
+              <a:t>화면 개발 +</a:t>
+            </a:r>
+            <a:endParaRPr lang="en-US" sz="950" dirty="0"/>
+          </a:p>
+          <a:p>
+            <a:pPr marL="0" indent="0" algn="ctr">
+              <a:buNone/>
+            </a:pPr>
+            <a:r>
+              <a:rPr lang="en-US" sz="950" dirty="0">
+                <a:solidFill>
+                  <a:srgbClr val="8A6C52"/>
+                </a:solidFill>
+                <a:latin typeface="HYSinMyeongJo-Medium" pitchFamily="34" charset="0"/>
+                <a:ea typeface="HYSinMyeongJo-Medium" pitchFamily="34" charset="-122"/>
+                <a:cs typeface="HYSinMyeongJo-Medium" pitchFamily="34" charset="-120"/>
+              </a:rPr>
+              <a:t>시각화 연동</a:t>
+            </a:r>
+            <a:endParaRPr lang="en-US" sz="950" dirty="0"/>
+          </a:p>
+        </p:txBody>
+      </p:sp>
+      <p:sp>
+        <p:nvSpPr>
+          <p:cNvPr id="34" name="Shape 29"/>
+          <p:cNvSpPr/>
+          <p:nvPr/>
+        </p:nvSpPr>
+        <p:spPr>
+          <a:xfrm>
+            <a:off x="6237732" y="3710940"/>
+            <a:ext cx="228600" cy="0"/>
+          </a:xfrm>
+          <a:prstGeom prst="line">
+            <a:avLst/>
+          </a:prstGeom>
+          <a:noFill/>
+          <a:ln w="19050">
+            <a:solidFill>
+              <a:srgbClr val="8A6C52"/>
+            </a:solidFill>
+            <a:prstDash val="dash"/>
+            <a:tailEnd type="triangle"/>
+          </a:ln>
+        </p:spPr>
+      </p:sp>
+      <p:sp>
+        <p:nvSpPr>
+          <p:cNvPr id="35" name="Shape 30"/>
+          <p:cNvSpPr/>
+          <p:nvPr/>
+        </p:nvSpPr>
+        <p:spPr>
+          <a:xfrm>
+            <a:off x="6466332" y="3093720"/>
+            <a:ext cx="1563624" cy="1234440"/>
+          </a:xfrm>
+          <a:prstGeom prst="roundRect">
+            <a:avLst>
+              <a:gd name="adj" fmla="val 5926"/>
+            </a:avLst>
+          </a:prstGeom>
+          <a:solidFill>
+            <a:srgbClr val="FBF7F2"/>
+          </a:solidFill>
+          <a:ln w="12700">
+            <a:solidFill>
+              <a:srgbClr val="C9B8A4"/>
+            </a:solidFill>
+            <a:prstDash val="dash"/>
+          </a:ln>
+        </p:spPr>
+      </p:sp>
+      <p:sp>
+        <p:nvSpPr>
+          <p:cNvPr id="36" name="Text 31"/>
+          <p:cNvSpPr/>
+          <p:nvPr/>
+        </p:nvSpPr>
+        <p:spPr>
+          <a:xfrm>
+            <a:off x="6466332" y="3230880"/>
+            <a:ext cx="1563624" cy="320040"/>
+          </a:xfrm>
+          <a:prstGeom prst="rect">
+            <a:avLst/>
+          </a:prstGeom>
+          <a:noFill/>
+          <a:ln/>
+        </p:spPr>
+        <p:txBody>
+          <a:bodyPr wrap="square" lIns="0" tIns="0" rIns="0" bIns="0" rtlCol="0" anchor="ctr"/>
+          <a:lstStyle/>
+          <a:p>
+            <a:pPr marL="0" indent="0" algn="ctr">
+              <a:buNone/>
+            </a:pPr>
+            <a:r>
+              <a:rPr lang="en-US" sz="1300" b="1" dirty="0">
+                <a:solidFill>
+                  <a:srgbClr val="2E1A0F"/>
+                </a:solidFill>
+                <a:latin typeface="HYSinMyeongJo-Medium" pitchFamily="34" charset="0"/>
+                <a:ea typeface="HYSinMyeongJo-Medium" pitchFamily="34" charset="-122"/>
+                <a:cs typeface="HYSinMyeongJo-Medium" pitchFamily="34" charset="-120"/>
+              </a:rPr>
+              <a:t>4주차</a:t>
+            </a:r>
+            <a:endParaRPr lang="en-US" sz="1300" dirty="0"/>
+          </a:p>
+        </p:txBody>
+      </p:sp>
+      <p:sp>
+        <p:nvSpPr>
+          <p:cNvPr id="37" name="Text 32"/>
+          <p:cNvSpPr/>
+          <p:nvPr/>
+        </p:nvSpPr>
+        <p:spPr>
+          <a:xfrm>
+            <a:off x="6557772" y="3624072"/>
+            <a:ext cx="1380744" cy="640080"/>
+          </a:xfrm>
+          <a:prstGeom prst="rect">
+            <a:avLst/>
+          </a:prstGeom>
+          <a:noFill/>
+          <a:ln/>
+        </p:spPr>
+        <p:txBody>
+          <a:bodyPr wrap="square" lIns="0" tIns="0" rIns="0" bIns="0" rtlCol="0" anchor="ctr"/>
+          <a:lstStyle/>
+          <a:p>
+            <a:pPr marL="0" indent="0" algn="ctr">
+              <a:buNone/>
+            </a:pPr>
+            <a:r>
+              <a:rPr lang="en-US" sz="950" dirty="0">
+                <a:solidFill>
+                  <a:srgbClr val="8A6C52"/>
+                </a:solidFill>
+                <a:latin typeface="HYSinMyeongJo-Medium" pitchFamily="34" charset="0"/>
+                <a:ea typeface="HYSinMyeongJo-Medium" pitchFamily="34" charset="-122"/>
+                <a:cs typeface="HYSinMyeongJo-Medium" pitchFamily="34" charset="-120"/>
+              </a:rPr>
+              <a:t>추가 기능 구현 +</a:t>
+            </a:r>
+            <a:endParaRPr lang="en-US" sz="950" dirty="0"/>
+          </a:p>
+          <a:p>
+            <a:pPr marL="0" indent="0" algn="ctr">
+              <a:buNone/>
+            </a:pPr>
+            <a:r>
+              <a:rPr lang="en-US" sz="950" dirty="0">
+                <a:solidFill>
+                  <a:srgbClr val="8A6C52"/>
+                </a:solidFill>
+                <a:latin typeface="HYSinMyeongJo-Medium" pitchFamily="34" charset="0"/>
+                <a:ea typeface="HYSinMyeongJo-Medium" pitchFamily="34" charset="-122"/>
+                <a:cs typeface="HYSinMyeongJo-Medium" pitchFamily="34" charset="-120"/>
+              </a:rPr>
+              <a:t>테스트·마무리</a:t>
+            </a:r>
+            <a:endParaRPr lang="en-US" sz="950" dirty="0"/>
+          </a:p>
+        </p:txBody>
+      </p:sp>
     </p:spTree>
   </p:cSld>
   <p:clrMapOvr>
@@ -4451,8 +5186,9 @@
     <p:bg>
       <p:bgPr>
         <a:solidFill>
-          <a:srgbClr val="FBF7F2"/>
+          <a:srgbClr val="2E1A0F"/>
         </a:solidFill>
+        <a:effectLst/>
       </p:bgPr>
     </p:bg>
     <p:spTree>
@@ -4490,19 +5226,19 @@
           <a:bodyPr wrap="square" lIns="0" tIns="0" rIns="0" bIns="0" rtlCol="0" anchor="ctr"/>
           <a:lstStyle/>
           <a:p>
-            <a:pPr algn="l" indent="0" marL="0">
+            <a:pPr marL="0" indent="0" algn="l">
               <a:buNone/>
             </a:pPr>
             <a:r>
               <a:rPr lang="en-US" sz="3000" b="1" dirty="0">
                 <a:solidFill>
-                  <a:srgbClr val="2E1A0F"/>
-                </a:solidFill>
-                <a:latin typeface="Cambria" pitchFamily="34" charset="0"/>
-                <a:ea typeface="Cambria" pitchFamily="34" charset="-122"/>
-                <a:cs typeface="Cambria" pitchFamily="34" charset="-120"/>
-              </a:rPr>
-              <a:t>와이어프레임 · 스케줄 조정</a:t>
+                  <a:srgbClr val="EDE0D0"/>
+                </a:solidFill>
+                <a:latin typeface="HYSinMyeongJo-Medium" pitchFamily="34" charset="0"/>
+                <a:ea typeface="HYSinMyeongJo-Medium" pitchFamily="34" charset="-122"/>
+                <a:cs typeface="HYSinMyeongJo-Medium" pitchFamily="34" charset="-120"/>
+              </a:rPr>
+              <a:t>향후 고려 기능</a:t>
             </a:r>
             <a:endParaRPr lang="en-US" sz="3000" dirty="0"/>
           </a:p>
@@ -4525,1329 +5261,9 @@
             </a:avLst>
           </a:prstGeom>
           <a:solidFill>
-            <a:srgbClr val="F3E7D6"/>
+            <a:srgbClr val="F7EEE0"/>
           </a:solidFill>
           <a:ln/>
-          <a:effectLst>
-            <a:outerShdw sx="100000" sy="100000" kx="0" ky="0" algn="bl" rotWithShape="0" blurRad="101600" dist="38100" dir="5400000">
-              <a:srgbClr val="000000">
-                <a:alpha val="10000"/>
-              </a:srgbClr>
-            </a:outerShdw>
-          </a:effectLst>
-        </p:spPr>
-      </p:sp>
-      <p:sp>
-        <p:nvSpPr>
-          <p:cNvPr id="4" name="Text 2"/>
-          <p:cNvSpPr/>
-          <p:nvPr/>
-        </p:nvSpPr>
-        <p:spPr>
-          <a:xfrm>
-            <a:off x="457200" y="1280160"/>
-            <a:ext cx="8229600" cy="365760"/>
-          </a:xfrm>
-          <a:prstGeom prst="rect">
-            <a:avLst/>
-          </a:prstGeom>
-          <a:noFill/>
-          <a:ln/>
-        </p:spPr>
-        <p:txBody>
-          <a:bodyPr wrap="square" lIns="0" tIns="0" rIns="0" bIns="0" rtlCol="0" anchor="ctr"/>
-          <a:lstStyle/>
-          <a:p>
-            <a:pPr algn="ctr" indent="0" marL="0">
-              <a:buNone/>
-            </a:pPr>
-            <a:r>
-              <a:rPr lang="en-US" sz="1800" b="1" dirty="0">
-                <a:solidFill>
-                  <a:srgbClr val="2E1A0F"/>
-                </a:solidFill>
-                <a:latin typeface="Cambria" pitchFamily="34" charset="0"/>
-                <a:ea typeface="Cambria" pitchFamily="34" charset="-122"/>
-                <a:cs typeface="Cambria" pitchFamily="34" charset="-120"/>
-              </a:rPr>
-              <a:t>⑤ 스케줄 조정</a:t>
-            </a:r>
-            <a:endParaRPr lang="en-US" sz="1800" dirty="0"/>
-          </a:p>
-        </p:txBody>
-      </p:sp>
-      <p:pic>
-        <p:nvPicPr>
-          <p:cNvPr id="5" name="Image 0" descr="../screens/adjust-screen.png">    </p:cNvPr>
-          <p:cNvPicPr>
-            <a:picLocks noChangeAspect="1"/>
-          </p:cNvPicPr>
-          <p:nvPr/>
-        </p:nvPicPr>
-        <p:blipFill>
-          <a:blip r:embed="rId1"/>
-          <a:stretch>
-            <a:fillRect/>
-          </a:stretch>
-        </p:blipFill>
-        <p:spPr>
-          <a:xfrm>
-            <a:off x="3550485" y="1737360"/>
-            <a:ext cx="2043031" cy="3108960"/>
-          </a:xfrm>
-          <a:prstGeom prst="rect">
-            <a:avLst/>
-          </a:prstGeom>
-        </p:spPr>
-      </p:pic>
-    </p:spTree>
-  </p:cSld>
-  <p:clrMapOvr>
-    <a:masterClrMapping/>
-  </p:clrMapOvr>
-</p:sld>
-</file>
-
-<file path=ppt/slides/slide8.xml><?xml version="1.0" encoding="utf-8"?>
-<p:sld xmlns:a="http://schemas.openxmlformats.org/drawingml/2006/main" xmlns:r="http://schemas.openxmlformats.org/officeDocument/2006/relationships" xmlns:p="http://schemas.openxmlformats.org/presentationml/2006/main">
-  <p:cSld name="Slide 8">
-    <p:bg>
-      <p:bgPr>
-        <a:solidFill>
-          <a:srgbClr val="FBF7F2"/>
-        </a:solidFill>
-      </p:bgPr>
-    </p:bg>
-    <p:spTree>
-      <p:nvGrpSpPr>
-        <p:cNvPr id="1" name=""/>
-        <p:cNvGrpSpPr/>
-        <p:nvPr/>
-      </p:nvGrpSpPr>
-      <p:grpSpPr>
-        <a:xfrm>
-          <a:off x="0" y="0"/>
-          <a:ext cx="0" cy="0"/>
-          <a:chOff x="0" y="0"/>
-          <a:chExt cx="0" cy="0"/>
-        </a:xfrm>
-      </p:grpSpPr>
-      <p:sp>
-        <p:nvSpPr>
-          <p:cNvPr id="2" name="Text 0"/>
-          <p:cNvSpPr/>
-          <p:nvPr/>
-        </p:nvSpPr>
-        <p:spPr>
-          <a:xfrm>
-            <a:off x="457200" y="320040"/>
-            <a:ext cx="8229600" cy="548640"/>
-          </a:xfrm>
-          <a:prstGeom prst="rect">
-            <a:avLst/>
-          </a:prstGeom>
-          <a:noFill/>
-          <a:ln/>
-        </p:spPr>
-        <p:txBody>
-          <a:bodyPr wrap="square" lIns="0" tIns="0" rIns="0" bIns="0" rtlCol="0" anchor="ctr"/>
-          <a:lstStyle/>
-          <a:p>
-            <a:pPr algn="l" indent="0" marL="0">
-              <a:buNone/>
-            </a:pPr>
-            <a:r>
-              <a:rPr lang="en-US" sz="3000" b="1" dirty="0">
-                <a:solidFill>
-                  <a:srgbClr val="2E1A0F"/>
-                </a:solidFill>
-                <a:latin typeface="Cambria" pitchFamily="34" charset="0"/>
-                <a:ea typeface="Cambria" pitchFamily="34" charset="-122"/>
-                <a:cs typeface="Cambria" pitchFamily="34" charset="-120"/>
-              </a:rPr>
-              <a:t>설계 과정 요약</a:t>
-            </a:r>
-            <a:endParaRPr lang="en-US" sz="3000" dirty="0"/>
-          </a:p>
-        </p:txBody>
-      </p:sp>
-      <p:sp>
-        <p:nvSpPr>
-          <p:cNvPr id="3" name="Shape 1"/>
-          <p:cNvSpPr/>
-          <p:nvPr/>
-        </p:nvSpPr>
-        <p:spPr>
-          <a:xfrm>
-            <a:off x="457200" y="1051560"/>
-            <a:ext cx="8229600" cy="3703320"/>
-          </a:xfrm>
-          <a:prstGeom prst="roundRect">
-            <a:avLst>
-              <a:gd name="adj" fmla="val 2963"/>
-            </a:avLst>
-          </a:prstGeom>
-          <a:solidFill>
-            <a:srgbClr val="F3E7D6"/>
-          </a:solidFill>
-          <a:ln/>
-          <a:effectLst>
-            <a:outerShdw sx="100000" sy="100000" kx="0" ky="0" algn="bl" rotWithShape="0" blurRad="101600" dist="38100" dir="5400000">
-              <a:srgbClr val="000000">
-                <a:alpha val="10000"/>
-              </a:srgbClr>
-            </a:outerShdw>
-          </a:effectLst>
-        </p:spPr>
-      </p:sp>
-      <p:sp>
-        <p:nvSpPr>
-          <p:cNvPr id="4" name="Text 2"/>
-          <p:cNvSpPr/>
-          <p:nvPr/>
-        </p:nvSpPr>
-        <p:spPr>
-          <a:xfrm>
-            <a:off x="822960" y="1234440"/>
-            <a:ext cx="6949440" cy="274320"/>
-          </a:xfrm>
-          <a:prstGeom prst="rect">
-            <a:avLst/>
-          </a:prstGeom>
-          <a:noFill/>
-          <a:ln/>
-        </p:spPr>
-        <p:txBody>
-          <a:bodyPr wrap="square" lIns="0" tIns="0" rIns="0" bIns="0" rtlCol="0" anchor="ctr"/>
-          <a:lstStyle/>
-          <a:p>
-            <a:pPr algn="l" indent="0" marL="0">
-              <a:buNone/>
-            </a:pPr>
-            <a:r>
-              <a:rPr lang="en-US" sz="1300" b="1" dirty="0">
-                <a:solidFill>
-                  <a:srgbClr val="C17F3E"/>
-                </a:solidFill>
-                <a:latin typeface="Calibri" pitchFamily="34" charset="0"/>
-                <a:ea typeface="Calibri" pitchFamily="34" charset="-122"/>
-                <a:cs typeface="Calibri" pitchFamily="34" charset="-120"/>
-              </a:rPr>
-              <a:t>지금까지 — 기획 완료</a:t>
-            </a:r>
-            <a:endParaRPr lang="en-US" sz="1300" dirty="0"/>
-          </a:p>
-        </p:txBody>
-      </p:sp>
-      <p:sp>
-        <p:nvSpPr>
-          <p:cNvPr id="5" name="Shape 3"/>
-          <p:cNvSpPr/>
-          <p:nvPr/>
-        </p:nvSpPr>
-        <p:spPr>
-          <a:xfrm>
-            <a:off x="822960" y="1554480"/>
-            <a:ext cx="2130552" cy="960120"/>
-          </a:xfrm>
-          <a:prstGeom prst="roundRect">
-            <a:avLst>
-              <a:gd name="adj" fmla="val 7619"/>
-            </a:avLst>
-          </a:prstGeom>
-          <a:solidFill>
-            <a:srgbClr val="FBF5EB"/>
-          </a:solidFill>
-          <a:ln/>
-        </p:spPr>
-      </p:sp>
-      <p:sp>
-        <p:nvSpPr>
-          <p:cNvPr id="6" name="Shape 4"/>
-          <p:cNvSpPr/>
-          <p:nvPr/>
-        </p:nvSpPr>
-        <p:spPr>
-          <a:xfrm>
-            <a:off x="960120" y="1691640"/>
-            <a:ext cx="292608" cy="292608"/>
-          </a:xfrm>
-          <a:prstGeom prst="ellipse">
-            <a:avLst/>
-          </a:prstGeom>
-          <a:solidFill>
-            <a:srgbClr val="C17F3E"/>
-          </a:solidFill>
-          <a:ln/>
-        </p:spPr>
-      </p:sp>
-      <p:pic>
-        <p:nvPicPr>
-          <p:cNvPr id="7" name="Image 0" descr="preencoded.png">    </p:cNvPr>
-          <p:cNvPicPr>
-            <a:picLocks noChangeAspect="1"/>
-          </p:cNvPicPr>
-          <p:nvPr/>
-        </p:nvPicPr>
-        <p:blipFill>
-          <a:blip r:embed="rId1"/>
-          <a:stretch>
-            <a:fillRect/>
-          </a:stretch>
-        </p:blipFill>
-        <p:spPr>
-          <a:xfrm>
-            <a:off x="1024128" y="1755648"/>
-            <a:ext cx="164592" cy="164592"/>
-          </a:xfrm>
-          <a:prstGeom prst="rect">
-            <a:avLst/>
-          </a:prstGeom>
-        </p:spPr>
-      </p:pic>
-      <p:sp>
-        <p:nvSpPr>
-          <p:cNvPr id="8" name="Text 5"/>
-          <p:cNvSpPr/>
-          <p:nvPr/>
-        </p:nvSpPr>
-        <p:spPr>
-          <a:xfrm>
-            <a:off x="1325880" y="1664208"/>
-            <a:ext cx="1536192" cy="365760"/>
-          </a:xfrm>
-          <a:prstGeom prst="rect">
-            <a:avLst/>
-          </a:prstGeom>
-          <a:noFill/>
-          <a:ln/>
-        </p:spPr>
-        <p:txBody>
-          <a:bodyPr wrap="square" lIns="0" tIns="0" rIns="0" bIns="0" rtlCol="0" anchor="ctr"/>
-          <a:lstStyle/>
-          <a:p>
-            <a:pPr algn="l" indent="0" marL="0">
-              <a:buNone/>
-            </a:pPr>
-            <a:r>
-              <a:rPr lang="en-US" sz="1300" b="1" dirty="0">
-                <a:solidFill>
-                  <a:srgbClr val="2E1A0F"/>
-                </a:solidFill>
-                <a:latin typeface="Cambria" pitchFamily="34" charset="0"/>
-                <a:ea typeface="Cambria" pitchFamily="34" charset="-122"/>
-                <a:cs typeface="Cambria" pitchFamily="34" charset="-120"/>
-              </a:rPr>
-              <a:t>아이디어 검증</a:t>
-            </a:r>
-            <a:endParaRPr lang="en-US" sz="1300" dirty="0"/>
-          </a:p>
-        </p:txBody>
-      </p:sp>
-      <p:sp>
-        <p:nvSpPr>
-          <p:cNvPr id="9" name="Text 6"/>
-          <p:cNvSpPr/>
-          <p:nvPr/>
-        </p:nvSpPr>
-        <p:spPr>
-          <a:xfrm>
-            <a:off x="960120" y="2057400"/>
-            <a:ext cx="1856232" cy="411480"/>
-          </a:xfrm>
-          <a:prstGeom prst="rect">
-            <a:avLst/>
-          </a:prstGeom>
-          <a:noFill/>
-          <a:ln/>
-        </p:spPr>
-        <p:txBody>
-          <a:bodyPr wrap="square" lIns="0" tIns="0" rIns="0" bIns="0" rtlCol="0" anchor="ctr"/>
-          <a:lstStyle/>
-          <a:p>
-            <a:pPr algn="l" indent="0" marL="0">
-              <a:buNone/>
-            </a:pPr>
-            <a:r>
-              <a:rPr lang="en-US" sz="950" dirty="0">
-                <a:solidFill>
-                  <a:srgbClr val="8A6C52"/>
-                </a:solidFill>
-                <a:latin typeface="Calibri" pitchFamily="34" charset="0"/>
-                <a:ea typeface="Calibri" pitchFamily="34" charset="-122"/>
-                <a:cs typeface="Calibri" pitchFamily="34" charset="-120"/>
-              </a:rPr>
-              <a:t>여러 후보를 실현가능성·차별성 기준으로 좁혀감</a:t>
-            </a:r>
-            <a:endParaRPr lang="en-US" sz="950" dirty="0"/>
-          </a:p>
-        </p:txBody>
-      </p:sp>
-      <p:sp>
-        <p:nvSpPr>
-          <p:cNvPr id="10" name="Shape 7"/>
-          <p:cNvSpPr/>
-          <p:nvPr/>
-        </p:nvSpPr>
-        <p:spPr>
-          <a:xfrm>
-            <a:off x="2953512" y="2034540"/>
-            <a:ext cx="274320" cy="0"/>
-          </a:xfrm>
-          <a:prstGeom prst="line">
-            <a:avLst/>
-          </a:prstGeom>
-          <a:noFill/>
-          <a:ln w="19050">
-            <a:solidFill>
-              <a:srgbClr val="C17F3E"/>
-            </a:solidFill>
-            <a:prstDash val="solid"/>
-            <a:tailEnd type="triangle"/>
-          </a:ln>
-        </p:spPr>
-      </p:sp>
-      <p:sp>
-        <p:nvSpPr>
-          <p:cNvPr id="11" name="Shape 8"/>
-          <p:cNvSpPr/>
-          <p:nvPr/>
-        </p:nvSpPr>
-        <p:spPr>
-          <a:xfrm>
-            <a:off x="3227832" y="1554480"/>
-            <a:ext cx="2130552" cy="960120"/>
-          </a:xfrm>
-          <a:prstGeom prst="roundRect">
-            <a:avLst>
-              <a:gd name="adj" fmla="val 7619"/>
-            </a:avLst>
-          </a:prstGeom>
-          <a:solidFill>
-            <a:srgbClr val="FBF5EB"/>
-          </a:solidFill>
-          <a:ln/>
-        </p:spPr>
-      </p:sp>
-      <p:sp>
-        <p:nvSpPr>
-          <p:cNvPr id="12" name="Shape 9"/>
-          <p:cNvSpPr/>
-          <p:nvPr/>
-        </p:nvSpPr>
-        <p:spPr>
-          <a:xfrm>
-            <a:off x="3364992" y="1691640"/>
-            <a:ext cx="292608" cy="292608"/>
-          </a:xfrm>
-          <a:prstGeom prst="ellipse">
-            <a:avLst/>
-          </a:prstGeom>
-          <a:solidFill>
-            <a:srgbClr val="C17F3E"/>
-          </a:solidFill>
-          <a:ln/>
-        </p:spPr>
-      </p:sp>
-      <p:pic>
-        <p:nvPicPr>
-          <p:cNvPr id="13" name="Image 1" descr="preencoded.png">    </p:cNvPr>
-          <p:cNvPicPr>
-            <a:picLocks noChangeAspect="1"/>
-          </p:cNvPicPr>
-          <p:nvPr/>
-        </p:nvPicPr>
-        <p:blipFill>
-          <a:blip r:embed="rId2"/>
-          <a:stretch>
-            <a:fillRect/>
-          </a:stretch>
-        </p:blipFill>
-        <p:spPr>
-          <a:xfrm>
-            <a:off x="3429000" y="1755648"/>
-            <a:ext cx="164592" cy="164592"/>
-          </a:xfrm>
-          <a:prstGeom prst="rect">
-            <a:avLst/>
-          </a:prstGeom>
-        </p:spPr>
-      </p:pic>
-      <p:sp>
-        <p:nvSpPr>
-          <p:cNvPr id="14" name="Text 10"/>
-          <p:cNvSpPr/>
-          <p:nvPr/>
-        </p:nvSpPr>
-        <p:spPr>
-          <a:xfrm>
-            <a:off x="3730752" y="1664208"/>
-            <a:ext cx="1536192" cy="365760"/>
-          </a:xfrm>
-          <a:prstGeom prst="rect">
-            <a:avLst/>
-          </a:prstGeom>
-          <a:noFill/>
-          <a:ln/>
-        </p:spPr>
-        <p:txBody>
-          <a:bodyPr wrap="square" lIns="0" tIns="0" rIns="0" bIns="0" rtlCol="0" anchor="ctr"/>
-          <a:lstStyle/>
-          <a:p>
-            <a:pPr algn="l" indent="0" marL="0">
-              <a:buNone/>
-            </a:pPr>
-            <a:r>
-              <a:rPr lang="en-US" sz="1300" b="1" dirty="0">
-                <a:solidFill>
-                  <a:srgbClr val="2E1A0F"/>
-                </a:solidFill>
-                <a:latin typeface="Cambria" pitchFamily="34" charset="0"/>
-                <a:ea typeface="Cambria" pitchFamily="34" charset="-122"/>
-                <a:cs typeface="Cambria" pitchFamily="34" charset="-120"/>
-              </a:rPr>
-              <a:t>전공 지식 기반 설계</a:t>
-            </a:r>
-            <a:endParaRPr lang="en-US" sz="1300" dirty="0"/>
-          </a:p>
-        </p:txBody>
-      </p:sp>
-      <p:sp>
-        <p:nvSpPr>
-          <p:cNvPr id="15" name="Text 11"/>
-          <p:cNvSpPr/>
-          <p:nvPr/>
-        </p:nvSpPr>
-        <p:spPr>
-          <a:xfrm>
-            <a:off x="3364992" y="2057400"/>
-            <a:ext cx="1856232" cy="411480"/>
-          </a:xfrm>
-          <a:prstGeom prst="rect">
-            <a:avLst/>
-          </a:prstGeom>
-          <a:noFill/>
-          <a:ln/>
-        </p:spPr>
-        <p:txBody>
-          <a:bodyPr wrap="square" lIns="0" tIns="0" rIns="0" bIns="0" rtlCol="0" anchor="ctr"/>
-          <a:lstStyle/>
-          <a:p>
-            <a:pPr algn="l" indent="0" marL="0">
-              <a:buNone/>
-            </a:pPr>
-            <a:r>
-              <a:rPr lang="en-US" sz="950" dirty="0">
-                <a:solidFill>
-                  <a:srgbClr val="8A6C52"/>
-                </a:solidFill>
-                <a:latin typeface="Calibri" pitchFamily="34" charset="0"/>
-                <a:ea typeface="Calibri" pitchFamily="34" charset="-122"/>
-                <a:cs typeface="Calibri" pitchFamily="34" charset="-120"/>
-              </a:rPr>
-              <a:t>검증된 수면과학 논문을 계산 근거로 채택</a:t>
-            </a:r>
-            <a:endParaRPr lang="en-US" sz="950" dirty="0"/>
-          </a:p>
-        </p:txBody>
-      </p:sp>
-      <p:sp>
-        <p:nvSpPr>
-          <p:cNvPr id="16" name="Shape 12"/>
-          <p:cNvSpPr/>
-          <p:nvPr/>
-        </p:nvSpPr>
-        <p:spPr>
-          <a:xfrm>
-            <a:off x="5358384" y="2034540"/>
-            <a:ext cx="274320" cy="0"/>
-          </a:xfrm>
-          <a:prstGeom prst="line">
-            <a:avLst/>
-          </a:prstGeom>
-          <a:noFill/>
-          <a:ln w="19050">
-            <a:solidFill>
-              <a:srgbClr val="C17F3E"/>
-            </a:solidFill>
-            <a:prstDash val="solid"/>
-            <a:tailEnd type="triangle"/>
-          </a:ln>
-        </p:spPr>
-      </p:sp>
-      <p:sp>
-        <p:nvSpPr>
-          <p:cNvPr id="17" name="Shape 13"/>
-          <p:cNvSpPr/>
-          <p:nvPr/>
-        </p:nvSpPr>
-        <p:spPr>
-          <a:xfrm>
-            <a:off x="5632704" y="1554480"/>
-            <a:ext cx="2130552" cy="960120"/>
-          </a:xfrm>
-          <a:prstGeom prst="roundRect">
-            <a:avLst>
-              <a:gd name="adj" fmla="val 7619"/>
-            </a:avLst>
-          </a:prstGeom>
-          <a:solidFill>
-            <a:srgbClr val="FBF5EB"/>
-          </a:solidFill>
-          <a:ln/>
-        </p:spPr>
-      </p:sp>
-      <p:sp>
-        <p:nvSpPr>
-          <p:cNvPr id="18" name="Shape 14"/>
-          <p:cNvSpPr/>
-          <p:nvPr/>
-        </p:nvSpPr>
-        <p:spPr>
-          <a:xfrm>
-            <a:off x="5769864" y="1691640"/>
-            <a:ext cx="292608" cy="292608"/>
-          </a:xfrm>
-          <a:prstGeom prst="ellipse">
-            <a:avLst/>
-          </a:prstGeom>
-          <a:solidFill>
-            <a:srgbClr val="C17F3E"/>
-          </a:solidFill>
-          <a:ln/>
-        </p:spPr>
-      </p:sp>
-      <p:pic>
-        <p:nvPicPr>
-          <p:cNvPr id="19" name="Image 2" descr="preencoded.png">    </p:cNvPr>
-          <p:cNvPicPr>
-            <a:picLocks noChangeAspect="1"/>
-          </p:cNvPicPr>
-          <p:nvPr/>
-        </p:nvPicPr>
-        <p:blipFill>
-          <a:blip r:embed="rId3"/>
-          <a:stretch>
-            <a:fillRect/>
-          </a:stretch>
-        </p:blipFill>
-        <p:spPr>
-          <a:xfrm>
-            <a:off x="5833872" y="1755648"/>
-            <a:ext cx="164592" cy="164592"/>
-          </a:xfrm>
-          <a:prstGeom prst="rect">
-            <a:avLst/>
-          </a:prstGeom>
-        </p:spPr>
-      </p:pic>
-      <p:sp>
-        <p:nvSpPr>
-          <p:cNvPr id="20" name="Text 15"/>
-          <p:cNvSpPr/>
-          <p:nvPr/>
-        </p:nvSpPr>
-        <p:spPr>
-          <a:xfrm>
-            <a:off x="6135624" y="1664208"/>
-            <a:ext cx="1536192" cy="365760"/>
-          </a:xfrm>
-          <a:prstGeom prst="rect">
-            <a:avLst/>
-          </a:prstGeom>
-          <a:noFill/>
-          <a:ln/>
-        </p:spPr>
-        <p:txBody>
-          <a:bodyPr wrap="square" lIns="0" tIns="0" rIns="0" bIns="0" rtlCol="0" anchor="ctr"/>
-          <a:lstStyle/>
-          <a:p>
-            <a:pPr algn="l" indent="0" marL="0">
-              <a:buNone/>
-            </a:pPr>
-            <a:r>
-              <a:rPr lang="en-US" sz="1300" b="1" dirty="0">
-                <a:solidFill>
-                  <a:srgbClr val="2E1A0F"/>
-                </a:solidFill>
-                <a:latin typeface="Cambria" pitchFamily="34" charset="0"/>
-                <a:ea typeface="Cambria" pitchFamily="34" charset="-122"/>
-                <a:cs typeface="Cambria" pitchFamily="34" charset="-120"/>
-              </a:rPr>
-              <a:t>시나리오·기획서 완성</a:t>
-            </a:r>
-            <a:endParaRPr lang="en-US" sz="1300" dirty="0"/>
-          </a:p>
-        </p:txBody>
-      </p:sp>
-      <p:sp>
-        <p:nvSpPr>
-          <p:cNvPr id="21" name="Text 16"/>
-          <p:cNvSpPr/>
-          <p:nvPr/>
-        </p:nvSpPr>
-        <p:spPr>
-          <a:xfrm>
-            <a:off x="5769864" y="2057400"/>
-            <a:ext cx="1856232" cy="411480"/>
-          </a:xfrm>
-          <a:prstGeom prst="rect">
-            <a:avLst/>
-          </a:prstGeom>
-          <a:noFill/>
-          <a:ln/>
-        </p:spPr>
-        <p:txBody>
-          <a:bodyPr wrap="square" lIns="0" tIns="0" rIns="0" bIns="0" rtlCol="0" anchor="ctr"/>
-          <a:lstStyle/>
-          <a:p>
-            <a:pPr algn="l" indent="0" marL="0">
-              <a:buNone/>
-            </a:pPr>
-            <a:r>
-              <a:rPr lang="en-US" sz="950" dirty="0">
-                <a:solidFill>
-                  <a:srgbClr val="8A6C52"/>
-                </a:solidFill>
-                <a:latin typeface="Calibri" pitchFamily="34" charset="0"/>
-                <a:ea typeface="Calibri" pitchFamily="34" charset="-122"/>
-                <a:cs typeface="Calibri" pitchFamily="34" charset="-120"/>
-              </a:rPr>
-              <a:t>사용자 흐름 중심으로 화면·기획서 설계</a:t>
-            </a:r>
-            <a:endParaRPr lang="en-US" sz="950" dirty="0"/>
-          </a:p>
-        </p:txBody>
-      </p:sp>
-      <p:sp>
-        <p:nvSpPr>
-          <p:cNvPr id="22" name="Text 17"/>
-          <p:cNvSpPr/>
-          <p:nvPr/>
-        </p:nvSpPr>
-        <p:spPr>
-          <a:xfrm>
-            <a:off x="822960" y="2697480"/>
-            <a:ext cx="6949440" cy="274320"/>
-          </a:xfrm>
-          <a:prstGeom prst="rect">
-            <a:avLst/>
-          </a:prstGeom>
-          <a:noFill/>
-          <a:ln/>
-        </p:spPr>
-        <p:txBody>
-          <a:bodyPr wrap="square" lIns="0" tIns="0" rIns="0" bIns="0" rtlCol="0" anchor="ctr"/>
-          <a:lstStyle/>
-          <a:p>
-            <a:pPr algn="l" indent="0" marL="0">
-              <a:buNone/>
-            </a:pPr>
-            <a:r>
-              <a:rPr lang="en-US" sz="1300" b="1" dirty="0">
-                <a:solidFill>
-                  <a:srgbClr val="8A6C52"/>
-                </a:solidFill>
-                <a:latin typeface="Calibri" pitchFamily="34" charset="0"/>
-                <a:ea typeface="Calibri" pitchFamily="34" charset="-122"/>
-                <a:cs typeface="Calibri" pitchFamily="34" charset="-120"/>
-              </a:rPr>
-              <a:t>앞으로 — 4주 개발 계획</a:t>
-            </a:r>
-            <a:endParaRPr lang="en-US" sz="1300" dirty="0"/>
-          </a:p>
-        </p:txBody>
-      </p:sp>
-      <p:sp>
-        <p:nvSpPr>
-          <p:cNvPr id="23" name="Shape 18"/>
-          <p:cNvSpPr/>
-          <p:nvPr/>
-        </p:nvSpPr>
-        <p:spPr>
-          <a:xfrm>
-            <a:off x="822960" y="3017520"/>
-            <a:ext cx="1563624" cy="1234440"/>
-          </a:xfrm>
-          <a:prstGeom prst="roundRect">
-            <a:avLst>
-              <a:gd name="adj" fmla="val 5926"/>
-            </a:avLst>
-          </a:prstGeom>
-          <a:solidFill>
-            <a:srgbClr val="FBF7F2"/>
-          </a:solidFill>
-          <a:ln w="12700">
-            <a:solidFill>
-              <a:srgbClr val="C9B8A4"/>
-            </a:solidFill>
-            <a:prstDash val="dash"/>
-          </a:ln>
-        </p:spPr>
-      </p:sp>
-      <p:sp>
-        <p:nvSpPr>
-          <p:cNvPr id="24" name="Text 19"/>
-          <p:cNvSpPr/>
-          <p:nvPr/>
-        </p:nvSpPr>
-        <p:spPr>
-          <a:xfrm>
-            <a:off x="822960" y="3154680"/>
-            <a:ext cx="1563624" cy="320040"/>
-          </a:xfrm>
-          <a:prstGeom prst="rect">
-            <a:avLst/>
-          </a:prstGeom>
-          <a:noFill/>
-          <a:ln/>
-        </p:spPr>
-        <p:txBody>
-          <a:bodyPr wrap="square" lIns="0" tIns="0" rIns="0" bIns="0" rtlCol="0" anchor="ctr"/>
-          <a:lstStyle/>
-          <a:p>
-            <a:pPr algn="ctr" indent="0" marL="0">
-              <a:buNone/>
-            </a:pPr>
-            <a:r>
-              <a:rPr lang="en-US" sz="1300" b="1" dirty="0">
-                <a:solidFill>
-                  <a:srgbClr val="2E1A0F"/>
-                </a:solidFill>
-                <a:latin typeface="Cambria" pitchFamily="34" charset="0"/>
-                <a:ea typeface="Cambria" pitchFamily="34" charset="-122"/>
-                <a:cs typeface="Cambria" pitchFamily="34" charset="-120"/>
-              </a:rPr>
-              <a:t>1주차</a:t>
-            </a:r>
-            <a:endParaRPr lang="en-US" sz="1300" dirty="0"/>
-          </a:p>
-        </p:txBody>
-      </p:sp>
-      <p:sp>
-        <p:nvSpPr>
-          <p:cNvPr id="25" name="Text 20"/>
-          <p:cNvSpPr/>
-          <p:nvPr/>
-        </p:nvSpPr>
-        <p:spPr>
-          <a:xfrm>
-            <a:off x="914400" y="3547872"/>
-            <a:ext cx="1380744" cy="640080"/>
-          </a:xfrm>
-          <a:prstGeom prst="rect">
-            <a:avLst/>
-          </a:prstGeom>
-          <a:noFill/>
-          <a:ln/>
-        </p:spPr>
-        <p:txBody>
-          <a:bodyPr wrap="square" lIns="0" tIns="0" rIns="0" bIns="0" rtlCol="0" anchor="ctr"/>
-          <a:lstStyle/>
-          <a:p>
-            <a:pPr algn="ctr" indent="0" marL="0">
-              <a:buNone/>
-            </a:pPr>
-            <a:r>
-              <a:rPr lang="en-US" sz="950" dirty="0">
-                <a:solidFill>
-                  <a:srgbClr val="8A6C52"/>
-                </a:solidFill>
-                <a:latin typeface="Calibri" pitchFamily="34" charset="0"/>
-                <a:ea typeface="Calibri" pitchFamily="34" charset="-122"/>
-                <a:cs typeface="Calibri" pitchFamily="34" charset="-120"/>
-              </a:rPr>
-              <a:t>계산 엔진 구현</a:t>
-            </a:r>
-            <a:endParaRPr lang="en-US" sz="950" dirty="0"/>
-          </a:p>
-        </p:txBody>
-      </p:sp>
-      <p:sp>
-        <p:nvSpPr>
-          <p:cNvPr id="26" name="Shape 21"/>
-          <p:cNvSpPr/>
-          <p:nvPr/>
-        </p:nvSpPr>
-        <p:spPr>
-          <a:xfrm>
-            <a:off x="2386584" y="3634740"/>
-            <a:ext cx="228600" cy="0"/>
-          </a:xfrm>
-          <a:prstGeom prst="line">
-            <a:avLst/>
-          </a:prstGeom>
-          <a:noFill/>
-          <a:ln w="19050">
-            <a:solidFill>
-              <a:srgbClr val="8A6C52"/>
-            </a:solidFill>
-            <a:prstDash val="dash"/>
-            <a:tailEnd type="triangle"/>
-          </a:ln>
-        </p:spPr>
-      </p:sp>
-      <p:sp>
-        <p:nvSpPr>
-          <p:cNvPr id="27" name="Shape 22"/>
-          <p:cNvSpPr/>
-          <p:nvPr/>
-        </p:nvSpPr>
-        <p:spPr>
-          <a:xfrm>
-            <a:off x="2615184" y="3017520"/>
-            <a:ext cx="1563624" cy="1234440"/>
-          </a:xfrm>
-          <a:prstGeom prst="roundRect">
-            <a:avLst>
-              <a:gd name="adj" fmla="val 5926"/>
-            </a:avLst>
-          </a:prstGeom>
-          <a:solidFill>
-            <a:srgbClr val="FBF7F2"/>
-          </a:solidFill>
-          <a:ln w="12700">
-            <a:solidFill>
-              <a:srgbClr val="C9B8A4"/>
-            </a:solidFill>
-            <a:prstDash val="dash"/>
-          </a:ln>
-        </p:spPr>
-      </p:sp>
-      <p:sp>
-        <p:nvSpPr>
-          <p:cNvPr id="28" name="Text 23"/>
-          <p:cNvSpPr/>
-          <p:nvPr/>
-        </p:nvSpPr>
-        <p:spPr>
-          <a:xfrm>
-            <a:off x="2615184" y="3154680"/>
-            <a:ext cx="1563624" cy="320040"/>
-          </a:xfrm>
-          <a:prstGeom prst="rect">
-            <a:avLst/>
-          </a:prstGeom>
-          <a:noFill/>
-          <a:ln/>
-        </p:spPr>
-        <p:txBody>
-          <a:bodyPr wrap="square" lIns="0" tIns="0" rIns="0" bIns="0" rtlCol="0" anchor="ctr"/>
-          <a:lstStyle/>
-          <a:p>
-            <a:pPr algn="ctr" indent="0" marL="0">
-              <a:buNone/>
-            </a:pPr>
-            <a:r>
-              <a:rPr lang="en-US" sz="1300" b="1" dirty="0">
-                <a:solidFill>
-                  <a:srgbClr val="2E1A0F"/>
-                </a:solidFill>
-                <a:latin typeface="Cambria" pitchFamily="34" charset="0"/>
-                <a:ea typeface="Cambria" pitchFamily="34" charset="-122"/>
-                <a:cs typeface="Cambria" pitchFamily="34" charset="-120"/>
-              </a:rPr>
-              <a:t>2주차</a:t>
-            </a:r>
-            <a:endParaRPr lang="en-US" sz="1300" dirty="0"/>
-          </a:p>
-        </p:txBody>
-      </p:sp>
-      <p:sp>
-        <p:nvSpPr>
-          <p:cNvPr id="29" name="Text 24"/>
-          <p:cNvSpPr/>
-          <p:nvPr/>
-        </p:nvSpPr>
-        <p:spPr>
-          <a:xfrm>
-            <a:off x="2706624" y="3547872"/>
-            <a:ext cx="1380744" cy="640080"/>
-          </a:xfrm>
-          <a:prstGeom prst="rect">
-            <a:avLst/>
-          </a:prstGeom>
-          <a:noFill/>
-          <a:ln/>
-        </p:spPr>
-        <p:txBody>
-          <a:bodyPr wrap="square" lIns="0" tIns="0" rIns="0" bIns="0" rtlCol="0" anchor="ctr"/>
-          <a:lstStyle/>
-          <a:p>
-            <a:pPr algn="ctr" indent="0" marL="0">
-              <a:buNone/>
-            </a:pPr>
-            <a:r>
-              <a:rPr lang="en-US" sz="950" dirty="0">
-                <a:solidFill>
-                  <a:srgbClr val="8A6C52"/>
-                </a:solidFill>
-                <a:latin typeface="Calibri" pitchFamily="34" charset="0"/>
-                <a:ea typeface="Calibri" pitchFamily="34" charset="-122"/>
-                <a:cs typeface="Calibri" pitchFamily="34" charset="-120"/>
-              </a:rPr>
-              <a:t>자연어 처리 + 화면 개발</a:t>
-            </a:r>
-            <a:endParaRPr lang="en-US" sz="950" dirty="0"/>
-          </a:p>
-        </p:txBody>
-      </p:sp>
-      <p:sp>
-        <p:nvSpPr>
-          <p:cNvPr id="30" name="Shape 25"/>
-          <p:cNvSpPr/>
-          <p:nvPr/>
-        </p:nvSpPr>
-        <p:spPr>
-          <a:xfrm>
-            <a:off x="4178808" y="3634740"/>
-            <a:ext cx="228600" cy="0"/>
-          </a:xfrm>
-          <a:prstGeom prst="line">
-            <a:avLst/>
-          </a:prstGeom>
-          <a:noFill/>
-          <a:ln w="19050">
-            <a:solidFill>
-              <a:srgbClr val="8A6C52"/>
-            </a:solidFill>
-            <a:prstDash val="dash"/>
-            <a:tailEnd type="triangle"/>
-          </a:ln>
-        </p:spPr>
-      </p:sp>
-      <p:sp>
-        <p:nvSpPr>
-          <p:cNvPr id="31" name="Shape 26"/>
-          <p:cNvSpPr/>
-          <p:nvPr/>
-        </p:nvSpPr>
-        <p:spPr>
-          <a:xfrm>
-            <a:off x="4407408" y="3017520"/>
-            <a:ext cx="1563624" cy="1234440"/>
-          </a:xfrm>
-          <a:prstGeom prst="roundRect">
-            <a:avLst>
-              <a:gd name="adj" fmla="val 5926"/>
-            </a:avLst>
-          </a:prstGeom>
-          <a:solidFill>
-            <a:srgbClr val="FBF7F2"/>
-          </a:solidFill>
-          <a:ln w="12700">
-            <a:solidFill>
-              <a:srgbClr val="C9B8A4"/>
-            </a:solidFill>
-            <a:prstDash val="dash"/>
-          </a:ln>
-        </p:spPr>
-      </p:sp>
-      <p:sp>
-        <p:nvSpPr>
-          <p:cNvPr id="32" name="Text 27"/>
-          <p:cNvSpPr/>
-          <p:nvPr/>
-        </p:nvSpPr>
-        <p:spPr>
-          <a:xfrm>
-            <a:off x="4407408" y="3154680"/>
-            <a:ext cx="1563624" cy="320040"/>
-          </a:xfrm>
-          <a:prstGeom prst="rect">
-            <a:avLst/>
-          </a:prstGeom>
-          <a:noFill/>
-          <a:ln/>
-        </p:spPr>
-        <p:txBody>
-          <a:bodyPr wrap="square" lIns="0" tIns="0" rIns="0" bIns="0" rtlCol="0" anchor="ctr"/>
-          <a:lstStyle/>
-          <a:p>
-            <a:pPr algn="ctr" indent="0" marL="0">
-              <a:buNone/>
-            </a:pPr>
-            <a:r>
-              <a:rPr lang="en-US" sz="1300" b="1" dirty="0">
-                <a:solidFill>
-                  <a:srgbClr val="2E1A0F"/>
-                </a:solidFill>
-                <a:latin typeface="Cambria" pitchFamily="34" charset="0"/>
-                <a:ea typeface="Cambria" pitchFamily="34" charset="-122"/>
-                <a:cs typeface="Cambria" pitchFamily="34" charset="-120"/>
-              </a:rPr>
-              <a:t>3주차</a:t>
-            </a:r>
-            <a:endParaRPr lang="en-US" sz="1300" dirty="0"/>
-          </a:p>
-        </p:txBody>
-      </p:sp>
-      <p:sp>
-        <p:nvSpPr>
-          <p:cNvPr id="33" name="Text 28"/>
-          <p:cNvSpPr/>
-          <p:nvPr/>
-        </p:nvSpPr>
-        <p:spPr>
-          <a:xfrm>
-            <a:off x="4498848" y="3547872"/>
-            <a:ext cx="1380744" cy="640080"/>
-          </a:xfrm>
-          <a:prstGeom prst="rect">
-            <a:avLst/>
-          </a:prstGeom>
-          <a:noFill/>
-          <a:ln/>
-        </p:spPr>
-        <p:txBody>
-          <a:bodyPr wrap="square" lIns="0" tIns="0" rIns="0" bIns="0" rtlCol="0" anchor="ctr"/>
-          <a:lstStyle/>
-          <a:p>
-            <a:pPr algn="ctr" indent="0" marL="0">
-              <a:buNone/>
-            </a:pPr>
-            <a:r>
-              <a:rPr lang="en-US" sz="950" dirty="0">
-                <a:solidFill>
-                  <a:srgbClr val="8A6C52"/>
-                </a:solidFill>
-                <a:latin typeface="Calibri" pitchFamily="34" charset="0"/>
-                <a:ea typeface="Calibri" pitchFamily="34" charset="-122"/>
-                <a:cs typeface="Calibri" pitchFamily="34" charset="-120"/>
-              </a:rPr>
-              <a:t>시각화 연동 + 추가 기능</a:t>
-            </a:r>
-            <a:endParaRPr lang="en-US" sz="950" dirty="0"/>
-          </a:p>
-        </p:txBody>
-      </p:sp>
-      <p:sp>
-        <p:nvSpPr>
-          <p:cNvPr id="34" name="Shape 29"/>
-          <p:cNvSpPr/>
-          <p:nvPr/>
-        </p:nvSpPr>
-        <p:spPr>
-          <a:xfrm>
-            <a:off x="5971032" y="3634740"/>
-            <a:ext cx="228600" cy="0"/>
-          </a:xfrm>
-          <a:prstGeom prst="line">
-            <a:avLst/>
-          </a:prstGeom>
-          <a:noFill/>
-          <a:ln w="19050">
-            <a:solidFill>
-              <a:srgbClr val="8A6C52"/>
-            </a:solidFill>
-            <a:prstDash val="dash"/>
-            <a:tailEnd type="triangle"/>
-          </a:ln>
-        </p:spPr>
-      </p:sp>
-      <p:sp>
-        <p:nvSpPr>
-          <p:cNvPr id="35" name="Shape 30"/>
-          <p:cNvSpPr/>
-          <p:nvPr/>
-        </p:nvSpPr>
-        <p:spPr>
-          <a:xfrm>
-            <a:off x="6199632" y="3017520"/>
-            <a:ext cx="1563624" cy="1234440"/>
-          </a:xfrm>
-          <a:prstGeom prst="roundRect">
-            <a:avLst>
-              <a:gd name="adj" fmla="val 5926"/>
-            </a:avLst>
-          </a:prstGeom>
-          <a:solidFill>
-            <a:srgbClr val="FBF7F2"/>
-          </a:solidFill>
-          <a:ln w="12700">
-            <a:solidFill>
-              <a:srgbClr val="C9B8A4"/>
-            </a:solidFill>
-            <a:prstDash val="dash"/>
-          </a:ln>
-        </p:spPr>
-      </p:sp>
-      <p:sp>
-        <p:nvSpPr>
-          <p:cNvPr id="36" name="Text 31"/>
-          <p:cNvSpPr/>
-          <p:nvPr/>
-        </p:nvSpPr>
-        <p:spPr>
-          <a:xfrm>
-            <a:off x="6199632" y="3154680"/>
-            <a:ext cx="1563624" cy="320040"/>
-          </a:xfrm>
-          <a:prstGeom prst="rect">
-            <a:avLst/>
-          </a:prstGeom>
-          <a:noFill/>
-          <a:ln/>
-        </p:spPr>
-        <p:txBody>
-          <a:bodyPr wrap="square" lIns="0" tIns="0" rIns="0" bIns="0" rtlCol="0" anchor="ctr"/>
-          <a:lstStyle/>
-          <a:p>
-            <a:pPr algn="ctr" indent="0" marL="0">
-              <a:buNone/>
-            </a:pPr>
-            <a:r>
-              <a:rPr lang="en-US" sz="1300" b="1" dirty="0">
-                <a:solidFill>
-                  <a:srgbClr val="2E1A0F"/>
-                </a:solidFill>
-                <a:latin typeface="Cambria" pitchFamily="34" charset="0"/>
-                <a:ea typeface="Cambria" pitchFamily="34" charset="-122"/>
-                <a:cs typeface="Cambria" pitchFamily="34" charset="-120"/>
-              </a:rPr>
-              <a:t>4주차</a:t>
-            </a:r>
-            <a:endParaRPr lang="en-US" sz="1300" dirty="0"/>
-          </a:p>
-        </p:txBody>
-      </p:sp>
-      <p:sp>
-        <p:nvSpPr>
-          <p:cNvPr id="37" name="Text 32"/>
-          <p:cNvSpPr/>
-          <p:nvPr/>
-        </p:nvSpPr>
-        <p:spPr>
-          <a:xfrm>
-            <a:off x="6291072" y="3547872"/>
-            <a:ext cx="1380744" cy="640080"/>
-          </a:xfrm>
-          <a:prstGeom prst="rect">
-            <a:avLst/>
-          </a:prstGeom>
-          <a:noFill/>
-          <a:ln/>
-        </p:spPr>
-        <p:txBody>
-          <a:bodyPr wrap="square" lIns="0" tIns="0" rIns="0" bIns="0" rtlCol="0" anchor="ctr"/>
-          <a:lstStyle/>
-          <a:p>
-            <a:pPr algn="ctr" indent="0" marL="0">
-              <a:buNone/>
-            </a:pPr>
-            <a:r>
-              <a:rPr lang="en-US" sz="950" dirty="0">
-                <a:solidFill>
-                  <a:srgbClr val="8A6C52"/>
-                </a:solidFill>
-                <a:latin typeface="Calibri" pitchFamily="34" charset="0"/>
-                <a:ea typeface="Calibri" pitchFamily="34" charset="-122"/>
-                <a:cs typeface="Calibri" pitchFamily="34" charset="-120"/>
-              </a:rPr>
-              <a:t>테스트 및 마무리</a:t>
-            </a:r>
-            <a:endParaRPr lang="en-US" sz="950" dirty="0"/>
-          </a:p>
-        </p:txBody>
-      </p:sp>
-    </p:spTree>
-  </p:cSld>
-  <p:clrMapOvr>
-    <a:masterClrMapping/>
-  </p:clrMapOvr>
-</p:sld>
-</file>
-
-<file path=ppt/slides/slide9.xml><?xml version="1.0" encoding="utf-8"?>
-<p:sld xmlns:a="http://schemas.openxmlformats.org/drawingml/2006/main" xmlns:r="http://schemas.openxmlformats.org/officeDocument/2006/relationships" xmlns:p="http://schemas.openxmlformats.org/presentationml/2006/main">
-  <p:cSld name="Slide 9">
-    <p:bg>
-      <p:bgPr>
-        <a:solidFill>
-          <a:srgbClr val="FBF7F2"/>
-        </a:solidFill>
-      </p:bgPr>
-    </p:bg>
-    <p:spTree>
-      <p:nvGrpSpPr>
-        <p:cNvPr id="1" name=""/>
-        <p:cNvGrpSpPr/>
-        <p:nvPr/>
-      </p:nvGrpSpPr>
-      <p:grpSpPr>
-        <a:xfrm>
-          <a:off x="0" y="0"/>
-          <a:ext cx="0" cy="0"/>
-          <a:chOff x="0" y="0"/>
-          <a:chExt cx="0" cy="0"/>
-        </a:xfrm>
-      </p:grpSpPr>
-      <p:sp>
-        <p:nvSpPr>
-          <p:cNvPr id="2" name="Text 0"/>
-          <p:cNvSpPr/>
-          <p:nvPr/>
-        </p:nvSpPr>
-        <p:spPr>
-          <a:xfrm>
-            <a:off x="457200" y="320040"/>
-            <a:ext cx="8229600" cy="548640"/>
-          </a:xfrm>
-          <a:prstGeom prst="rect">
-            <a:avLst/>
-          </a:prstGeom>
-          <a:noFill/>
-          <a:ln/>
-        </p:spPr>
-        <p:txBody>
-          <a:bodyPr wrap="square" lIns="0" tIns="0" rIns="0" bIns="0" rtlCol="0" anchor="ctr"/>
-          <a:lstStyle/>
-          <a:p>
-            <a:pPr algn="l" indent="0" marL="0">
-              <a:buNone/>
-            </a:pPr>
-            <a:r>
-              <a:rPr lang="en-US" sz="3000" b="1" dirty="0">
-                <a:solidFill>
-                  <a:srgbClr val="2E1A0F"/>
-                </a:solidFill>
-                <a:latin typeface="Cambria" pitchFamily="34" charset="0"/>
-                <a:ea typeface="Cambria" pitchFamily="34" charset="-122"/>
-                <a:cs typeface="Cambria" pitchFamily="34" charset="-120"/>
-              </a:rPr>
-              <a:t>향후 고려 기능</a:t>
-            </a:r>
-            <a:endParaRPr lang="en-US" sz="3000" dirty="0"/>
-          </a:p>
-        </p:txBody>
-      </p:sp>
-      <p:sp>
-        <p:nvSpPr>
-          <p:cNvPr id="3" name="Shape 1"/>
-          <p:cNvSpPr/>
-          <p:nvPr/>
-        </p:nvSpPr>
-        <p:spPr>
-          <a:xfrm>
-            <a:off x="457200" y="1051560"/>
-            <a:ext cx="8229600" cy="3703320"/>
-          </a:xfrm>
-          <a:prstGeom prst="roundRect">
-            <a:avLst>
-              <a:gd name="adj" fmla="val 2963"/>
-            </a:avLst>
-          </a:prstGeom>
-          <a:solidFill>
-            <a:srgbClr val="F3E7D6"/>
-          </a:solidFill>
-          <a:ln/>
-          <a:effectLst>
-            <a:outerShdw sx="100000" sy="100000" kx="0" ky="0" algn="bl" rotWithShape="0" blurRad="101600" dist="38100" dir="5400000">
-              <a:srgbClr val="000000">
-                <a:alpha val="10000"/>
-              </a:srgbClr>
-            </a:outerShdw>
-          </a:effectLst>
         </p:spPr>
       </p:sp>
       <p:sp>
@@ -5858,7 +5274,7 @@
         </p:nvSpPr>
         <p:spPr>
           <a:xfrm>
-            <a:off x="822960" y="1371600"/>
+            <a:off x="1080135" y="1371600"/>
             <a:ext cx="2133295" cy="3063240"/>
           </a:xfrm>
           <a:prstGeom prst="roundRect">
@@ -5867,7 +5283,7 @@
             </a:avLst>
           </a:prstGeom>
           <a:solidFill>
-            <a:srgbClr val="FBF5EB"/>
+            <a:srgbClr val="FFFFFF"/>
           </a:solidFill>
           <a:ln/>
         </p:spPr>
@@ -5880,7 +5296,7 @@
         </p:nvSpPr>
         <p:spPr>
           <a:xfrm>
-            <a:off x="1638148" y="1572768"/>
+            <a:off x="1895323" y="1572768"/>
             <a:ext cx="502920" cy="502920"/>
           </a:xfrm>
           <a:prstGeom prst="ellipse">
@@ -5899,21 +5315,21 @@
       </p:sp>
       <p:pic>
         <p:nvPicPr>
-          <p:cNvPr id="6" name="Image 0" descr="preencoded.png">    </p:cNvPr>
+          <p:cNvPr id="6" name="Image 0" descr="preencoded.png"/>
           <p:cNvPicPr>
             <a:picLocks noChangeAspect="1"/>
           </p:cNvPicPr>
           <p:nvPr/>
         </p:nvPicPr>
         <p:blipFill>
-          <a:blip r:embed="rId1"/>
+          <a:blip r:embed="rId3"/>
           <a:stretch>
             <a:fillRect/>
           </a:stretch>
         </p:blipFill>
         <p:spPr>
           <a:xfrm>
-            <a:off x="1752448" y="1691640"/>
+            <a:off x="2009623" y="1691640"/>
             <a:ext cx="274320" cy="274320"/>
           </a:xfrm>
           <a:prstGeom prst="rect">
@@ -5929,7 +5345,7 @@
         </p:nvSpPr>
         <p:spPr>
           <a:xfrm>
-            <a:off x="822960" y="2240280"/>
+            <a:off x="1080135" y="2240280"/>
             <a:ext cx="2133295" cy="320040"/>
           </a:xfrm>
           <a:prstGeom prst="rect">
@@ -5942,7 +5358,7 @@
           <a:bodyPr wrap="square" lIns="0" tIns="0" rIns="0" bIns="0" rtlCol="0" anchor="ctr"/>
           <a:lstStyle/>
           <a:p>
-            <a:pPr algn="ctr" indent="0" marL="0">
+            <a:pPr marL="0" indent="0" algn="ctr">
               <a:buNone/>
             </a:pPr>
             <a:r>
@@ -5950,9 +5366,9 @@
                 <a:solidFill>
                   <a:srgbClr val="2E1A0F"/>
                 </a:solidFill>
-                <a:latin typeface="Cambria" pitchFamily="34" charset="0"/>
-                <a:ea typeface="Cambria" pitchFamily="34" charset="-122"/>
-                <a:cs typeface="Cambria" pitchFamily="34" charset="-120"/>
+                <a:latin typeface="HYSinMyeongJo-Medium" pitchFamily="34" charset="0"/>
+                <a:ea typeface="HYSinMyeongJo-Medium" pitchFamily="34" charset="-122"/>
+                <a:cs typeface="HYSinMyeongJo-Medium" pitchFamily="34" charset="-120"/>
               </a:rPr>
               <a:t>시나리오 비교</a:t>
             </a:r>
@@ -5968,7 +5384,7 @@
         </p:nvSpPr>
         <p:spPr>
           <a:xfrm>
-            <a:off x="1005840" y="2651760"/>
+            <a:off x="1263015" y="2651760"/>
             <a:ext cx="1767535" cy="1188720"/>
           </a:xfrm>
           <a:prstGeom prst="rect">
@@ -5981,7 +5397,7 @@
           <a:bodyPr wrap="square" lIns="0" tIns="0" rIns="0" bIns="0" rtlCol="0" anchor="t"/>
           <a:lstStyle/>
           <a:p>
-            <a:pPr algn="l" indent="0" marL="0">
+            <a:pPr marL="0" indent="0" algn="ctr">
               <a:buNone/>
             </a:pPr>
             <a:r>
@@ -5989,14 +5405,92 @@
                 <a:solidFill>
                   <a:srgbClr val="2E1A0F"/>
                 </a:solidFill>
-                <a:latin typeface="Calibri" pitchFamily="34" charset="0"/>
-                <a:ea typeface="Calibri" pitchFamily="34" charset="-122"/>
-                <a:cs typeface="Calibri" pitchFamily="34" charset="-120"/>
-              </a:rPr>
-              <a:t>공부·수면 시간 조합별 각성도 차이를 비교해서 보여줌</a:t>
+                <a:latin typeface="HYSinMyeongJo-Medium" pitchFamily="34" charset="0"/>
+                <a:ea typeface="HYSinMyeongJo-Medium" pitchFamily="34" charset="-122"/>
+                <a:cs typeface="HYSinMyeongJo-Medium" pitchFamily="34" charset="-120"/>
+              </a:rPr>
+              <a:t>공부·수면 시간 조합별</a:t>
             </a:r>
             <a:endParaRPr lang="en-US" sz="1000" dirty="0"/>
           </a:p>
+          <a:p>
+            <a:pPr marL="0" indent="0" algn="ctr">
+              <a:buNone/>
+            </a:pPr>
+            <a:r>
+              <a:rPr lang="en-US" sz="1000" dirty="0" err="1">
+                <a:solidFill>
+                  <a:srgbClr val="2E1A0F"/>
+                </a:solidFill>
+                <a:latin typeface="HYSinMyeongJo-Medium" pitchFamily="34" charset="0"/>
+                <a:ea typeface="HYSinMyeongJo-Medium" pitchFamily="34" charset="-122"/>
+                <a:cs typeface="HYSinMyeongJo-Medium" pitchFamily="34" charset="-120"/>
+              </a:rPr>
+              <a:t>각성도</a:t>
+            </a:r>
+            <a:r>
+              <a:rPr lang="en-US" sz="1000" dirty="0">
+                <a:solidFill>
+                  <a:srgbClr val="2E1A0F"/>
+                </a:solidFill>
+                <a:latin typeface="HYSinMyeongJo-Medium" pitchFamily="34" charset="0"/>
+                <a:ea typeface="HYSinMyeongJo-Medium" pitchFamily="34" charset="-122"/>
+                <a:cs typeface="HYSinMyeongJo-Medium" pitchFamily="34" charset="-120"/>
+              </a:rPr>
+              <a:t> </a:t>
+            </a:r>
+            <a:r>
+              <a:rPr lang="en-US" sz="1000" dirty="0" err="1">
+                <a:solidFill>
+                  <a:srgbClr val="2E1A0F"/>
+                </a:solidFill>
+                <a:latin typeface="HYSinMyeongJo-Medium" pitchFamily="34" charset="0"/>
+                <a:ea typeface="HYSinMyeongJo-Medium" pitchFamily="34" charset="-122"/>
+                <a:cs typeface="HYSinMyeongJo-Medium" pitchFamily="34" charset="-120"/>
+              </a:rPr>
+              <a:t>차이를</a:t>
+            </a:r>
+            <a:endParaRPr lang="en-US" sz="1000" dirty="0">
+              <a:solidFill>
+                <a:srgbClr val="2E1A0F"/>
+              </a:solidFill>
+              <a:latin typeface="HYSinMyeongJo-Medium" pitchFamily="34" charset="0"/>
+              <a:ea typeface="HYSinMyeongJo-Medium" pitchFamily="34" charset="-122"/>
+              <a:cs typeface="HYSinMyeongJo-Medium" pitchFamily="34" charset="-120"/>
+            </a:endParaRPr>
+          </a:p>
+          <a:p>
+            <a:pPr marL="0" indent="0" algn="ctr">
+              <a:buNone/>
+            </a:pPr>
+            <a:r>
+              <a:rPr lang="en-US" sz="1000" dirty="0" err="1">
+                <a:solidFill>
+                  <a:srgbClr val="2E1A0F"/>
+                </a:solidFill>
+                <a:latin typeface="HYSinMyeongJo-Medium" pitchFamily="34" charset="0"/>
+                <a:ea typeface="HYSinMyeongJo-Medium" pitchFamily="34" charset="-122"/>
+                <a:cs typeface="HYSinMyeongJo-Medium" pitchFamily="34" charset="-120"/>
+              </a:rPr>
+              <a:t>비교해서</a:t>
+            </a:r>
+            <a:r>
+              <a:rPr lang="en-US" sz="1000" dirty="0"/>
+              <a:t> </a:t>
+            </a:r>
+            <a:r>
+              <a:rPr lang="en-US" sz="1000" dirty="0" err="1">
+                <a:solidFill>
+                  <a:srgbClr val="2E1A0F"/>
+                </a:solidFill>
+                <a:latin typeface="HYSinMyeongJo-Medium" pitchFamily="34" charset="0"/>
+                <a:ea typeface="HYSinMyeongJo-Medium" pitchFamily="34" charset="-122"/>
+                <a:cs typeface="HYSinMyeongJo-Medium" pitchFamily="34" charset="-120"/>
+              </a:rPr>
+              <a:t>보여줌</a:t>
+            </a:r>
+            <a:endParaRPr lang="en-US" sz="1000" dirty="0"/>
+          </a:p>
         </p:txBody>
       </p:sp>
       <p:sp>
@@ -6007,7 +5501,7 @@
         </p:nvSpPr>
         <p:spPr>
           <a:xfrm>
-            <a:off x="1005840" y="3749040"/>
+            <a:off x="1263015" y="3749040"/>
             <a:ext cx="1767535" cy="594360"/>
           </a:xfrm>
           <a:prstGeom prst="rect">
@@ -6020,7 +5514,7 @@
           <a:bodyPr wrap="square" lIns="0" tIns="0" rIns="0" bIns="0" rtlCol="0" anchor="t"/>
           <a:lstStyle/>
           <a:p>
-            <a:pPr algn="l" indent="0" marL="0">
+            <a:pPr marL="0" indent="0" algn="l">
               <a:buNone/>
             </a:pPr>
             <a:r>
@@ -6028,11 +5522,121 @@
                 <a:solidFill>
                   <a:srgbClr val="8A6C52"/>
                 </a:solidFill>
-                <a:latin typeface="Calibri" pitchFamily="34" charset="0"/>
-                <a:ea typeface="Calibri" pitchFamily="34" charset="-122"/>
-                <a:cs typeface="Calibri" pitchFamily="34" charset="-120"/>
-              </a:rPr>
-              <a:t>이유: 기존 계산 엔진 재사용 가능, 여유 있으면 추가</a:t>
+                <a:latin typeface="HYSinMyeongJo-Medium" pitchFamily="34" charset="0"/>
+                <a:ea typeface="HYSinMyeongJo-Medium" pitchFamily="34" charset="-122"/>
+                <a:cs typeface="HYSinMyeongJo-Medium" pitchFamily="34" charset="-120"/>
+              </a:rPr>
+              <a:t>이유: 기존 </a:t>
+            </a:r>
+            <a:r>
+              <a:rPr lang="en-US" sz="850" i="1" dirty="0" err="1">
+                <a:solidFill>
+                  <a:srgbClr val="8A6C52"/>
+                </a:solidFill>
+                <a:latin typeface="HYSinMyeongJo-Medium" pitchFamily="34" charset="0"/>
+                <a:ea typeface="HYSinMyeongJo-Medium" pitchFamily="34" charset="-122"/>
+                <a:cs typeface="HYSinMyeongJo-Medium" pitchFamily="34" charset="-120"/>
+              </a:rPr>
+              <a:t>계산</a:t>
+            </a:r>
+            <a:r>
+              <a:rPr lang="en-US" sz="850" i="1" dirty="0">
+                <a:solidFill>
+                  <a:srgbClr val="8A6C52"/>
+                </a:solidFill>
+                <a:latin typeface="HYSinMyeongJo-Medium" pitchFamily="34" charset="0"/>
+                <a:ea typeface="HYSinMyeongJo-Medium" pitchFamily="34" charset="-122"/>
+                <a:cs typeface="HYSinMyeongJo-Medium" pitchFamily="34" charset="-120"/>
+              </a:rPr>
+              <a:t> </a:t>
+            </a:r>
+            <a:r>
+              <a:rPr lang="en-US" sz="850" i="1" dirty="0" err="1">
+                <a:solidFill>
+                  <a:srgbClr val="8A6C52"/>
+                </a:solidFill>
+                <a:latin typeface="HYSinMyeongJo-Medium" pitchFamily="34" charset="0"/>
+                <a:ea typeface="HYSinMyeongJo-Medium" pitchFamily="34" charset="-122"/>
+                <a:cs typeface="HYSinMyeongJo-Medium" pitchFamily="34" charset="-120"/>
+              </a:rPr>
+              <a:t>엔진</a:t>
+            </a:r>
+            <a:r>
+              <a:rPr lang="ko-KR" altLang="en-US" sz="850" i="1" dirty="0">
+                <a:solidFill>
+                  <a:srgbClr val="8A6C52"/>
+                </a:solidFill>
+                <a:latin typeface="HYSinMyeongJo-Medium" pitchFamily="34" charset="0"/>
+                <a:ea typeface="HYSinMyeongJo-Medium" pitchFamily="34" charset="-122"/>
+                <a:cs typeface="HYSinMyeongJo-Medium" pitchFamily="34" charset="-120"/>
+              </a:rPr>
+              <a:t>을</a:t>
+            </a:r>
+            <a:r>
+              <a:rPr lang="en-US" sz="850" i="1" dirty="0">
+                <a:solidFill>
+                  <a:srgbClr val="8A6C52"/>
+                </a:solidFill>
+                <a:latin typeface="HYSinMyeongJo-Medium" pitchFamily="34" charset="0"/>
+                <a:ea typeface="HYSinMyeongJo-Medium" pitchFamily="34" charset="-122"/>
+                <a:cs typeface="HYSinMyeongJo-Medium" pitchFamily="34" charset="-120"/>
+              </a:rPr>
+              <a:t> </a:t>
+            </a:r>
+            <a:r>
+              <a:rPr lang="en-US" sz="850" i="1" dirty="0" err="1">
+                <a:solidFill>
+                  <a:srgbClr val="8A6C52"/>
+                </a:solidFill>
+                <a:latin typeface="HYSinMyeongJo-Medium" pitchFamily="34" charset="0"/>
+                <a:ea typeface="HYSinMyeongJo-Medium" pitchFamily="34" charset="-122"/>
+                <a:cs typeface="HYSinMyeongJo-Medium" pitchFamily="34" charset="-120"/>
+              </a:rPr>
+              <a:t>재사용</a:t>
+            </a:r>
+            <a:r>
+              <a:rPr lang="ko-KR" altLang="en-US" sz="850" i="1" dirty="0">
+                <a:solidFill>
+                  <a:srgbClr val="8A6C52"/>
+                </a:solidFill>
+                <a:latin typeface="HYSinMyeongJo-Medium" pitchFamily="34" charset="0"/>
+                <a:ea typeface="HYSinMyeongJo-Medium" pitchFamily="34" charset="-122"/>
+                <a:cs typeface="HYSinMyeongJo-Medium" pitchFamily="34" charset="-120"/>
+              </a:rPr>
+              <a:t>하여 추가할 수 있다</a:t>
+            </a:r>
+            <a:r>
+              <a:rPr lang="en-US" altLang="ko-KR" sz="850" i="1" dirty="0">
+                <a:solidFill>
+                  <a:srgbClr val="8A6C52"/>
+                </a:solidFill>
+                <a:latin typeface="HYSinMyeongJo-Medium" pitchFamily="34" charset="0"/>
+                <a:ea typeface="HYSinMyeongJo-Medium" pitchFamily="34" charset="-122"/>
+                <a:cs typeface="HYSinMyeongJo-Medium" pitchFamily="34" charset="-120"/>
+              </a:rPr>
+              <a:t>. </a:t>
+            </a:r>
+            <a:r>
+              <a:rPr lang="ko-KR" altLang="en-US" sz="850" i="1" dirty="0">
+                <a:solidFill>
+                  <a:srgbClr val="8A6C52"/>
+                </a:solidFill>
+                <a:latin typeface="HYSinMyeongJo-Medium" pitchFamily="34" charset="0"/>
+                <a:ea typeface="HYSinMyeongJo-Medium" pitchFamily="34" charset="-122"/>
+                <a:cs typeface="HYSinMyeongJo-Medium" pitchFamily="34" charset="-120"/>
+              </a:rPr>
+              <a:t>시간적 여유가 있으면 추가할 것</a:t>
+            </a:r>
+            <a:r>
+              <a:rPr lang="en-US" altLang="ko-KR" sz="850" i="1" dirty="0">
+                <a:solidFill>
+                  <a:srgbClr val="8A6C52"/>
+                </a:solidFill>
+                <a:latin typeface="HYSinMyeongJo-Medium" pitchFamily="34" charset="0"/>
+                <a:ea typeface="HYSinMyeongJo-Medium" pitchFamily="34" charset="-122"/>
+                <a:cs typeface="HYSinMyeongJo-Medium" pitchFamily="34" charset="-120"/>
+              </a:rPr>
+              <a:t>.</a:t>
             </a:r>
             <a:endParaRPr lang="en-US" sz="850" dirty="0"/>
           </a:p>
@@ -6046,7 +5650,7 @@
         </p:nvSpPr>
         <p:spPr>
           <a:xfrm>
-            <a:off x="3230575" y="1371600"/>
+            <a:off x="3487750" y="1371600"/>
             <a:ext cx="2133295" cy="3063240"/>
           </a:xfrm>
           <a:prstGeom prst="roundRect">
@@ -6055,7 +5659,7 @@
             </a:avLst>
           </a:prstGeom>
           <a:solidFill>
-            <a:srgbClr val="FBF5EB"/>
+            <a:srgbClr val="FFFFFF"/>
           </a:solidFill>
           <a:ln/>
         </p:spPr>
@@ -6068,7 +5672,7 @@
         </p:nvSpPr>
         <p:spPr>
           <a:xfrm>
-            <a:off x="4045763" y="1572768"/>
+            <a:off x="4302938" y="1572768"/>
             <a:ext cx="502920" cy="502920"/>
           </a:xfrm>
           <a:prstGeom prst="ellipse">
@@ -6087,21 +5691,21 @@
       </p:sp>
       <p:pic>
         <p:nvPicPr>
-          <p:cNvPr id="12" name="Image 1" descr="preencoded.png">    </p:cNvPr>
+          <p:cNvPr id="12" name="Image 1" descr="preencoded.png"/>
           <p:cNvPicPr>
             <a:picLocks noChangeAspect="1"/>
           </p:cNvPicPr>
           <p:nvPr/>
         </p:nvPicPr>
         <p:blipFill>
-          <a:blip r:embed="rId2"/>
+          <a:blip r:embed="rId4"/>
           <a:stretch>
             <a:fillRect/>
           </a:stretch>
         </p:blipFill>
         <p:spPr>
           <a:xfrm>
-            <a:off x="4160063" y="1691640"/>
+            <a:off x="4417238" y="1691640"/>
             <a:ext cx="274320" cy="274320"/>
           </a:xfrm>
           <a:prstGeom prst="rect">
@@ -6117,7 +5721,7 @@
         </p:nvSpPr>
         <p:spPr>
           <a:xfrm>
-            <a:off x="3230575" y="2240280"/>
+            <a:off x="3487750" y="2240280"/>
             <a:ext cx="2133295" cy="320040"/>
           </a:xfrm>
           <a:prstGeom prst="rect">
@@ -6130,7 +5734,7 @@
           <a:bodyPr wrap="square" lIns="0" tIns="0" rIns="0" bIns="0" rtlCol="0" anchor="ctr"/>
           <a:lstStyle/>
           <a:p>
-            <a:pPr algn="ctr" indent="0" marL="0">
+            <a:pPr marL="0" indent="0" algn="ctr">
               <a:buNone/>
             </a:pPr>
             <a:r>
@@ -6138,9 +5742,9 @@
                 <a:solidFill>
                   <a:srgbClr val="2E1A0F"/>
                 </a:solidFill>
-                <a:latin typeface="Cambria" pitchFamily="34" charset="0"/>
-                <a:ea typeface="Cambria" pitchFamily="34" charset="-122"/>
-                <a:cs typeface="Cambria" pitchFamily="34" charset="-120"/>
+                <a:latin typeface="HYSinMyeongJo-Medium" pitchFamily="34" charset="0"/>
+                <a:ea typeface="HYSinMyeongJo-Medium" pitchFamily="34" charset="-122"/>
+                <a:cs typeface="HYSinMyeongJo-Medium" pitchFamily="34" charset="-120"/>
               </a:rPr>
               <a:t>공부 기록 캘린더</a:t>
             </a:r>
@@ -6156,7 +5760,7 @@
         </p:nvSpPr>
         <p:spPr>
           <a:xfrm>
-            <a:off x="3413455" y="2651760"/>
+            <a:off x="3670630" y="2651760"/>
             <a:ext cx="1767535" cy="1188720"/>
           </a:xfrm>
           <a:prstGeom prst="rect">
@@ -6169,7 +5773,7 @@
           <a:bodyPr wrap="square" lIns="0" tIns="0" rIns="0" bIns="0" rtlCol="0" anchor="t"/>
           <a:lstStyle/>
           <a:p>
-            <a:pPr algn="l" indent="0" marL="0">
+            <a:pPr marL="0" indent="0" algn="ctr">
               <a:buNone/>
             </a:pPr>
             <a:r>
@@ -6177,14 +5781,125 @@
                 <a:solidFill>
                   <a:srgbClr val="2E1A0F"/>
                 </a:solidFill>
-                <a:latin typeface="Calibri" pitchFamily="34" charset="0"/>
-                <a:ea typeface="Calibri" pitchFamily="34" charset="-122"/>
-                <a:cs typeface="Calibri" pitchFamily="34" charset="-120"/>
-              </a:rPr>
-              <a:t>공부 시간을 기록하고, 수면압·카페인을 고려해 최적 시작 시각 추천 (예: "내일 오전 10시부터 시작하면 최상의 컨디션")</a:t>
+                <a:latin typeface="HYSinMyeongJo-Medium" pitchFamily="34" charset="0"/>
+                <a:ea typeface="HYSinMyeongJo-Medium" pitchFamily="34" charset="-122"/>
+                <a:cs typeface="HYSinMyeongJo-Medium" pitchFamily="34" charset="-120"/>
+              </a:rPr>
+              <a:t>공부 시간을 기록하고,</a:t>
             </a:r>
             <a:endParaRPr lang="en-US" sz="1000" dirty="0"/>
           </a:p>
+          <a:p>
+            <a:pPr marL="0" indent="0" algn="ctr">
+              <a:buNone/>
+            </a:pPr>
+            <a:r>
+              <a:rPr lang="en-US" sz="1000" dirty="0">
+                <a:solidFill>
+                  <a:srgbClr val="2E1A0F"/>
+                </a:solidFill>
+                <a:latin typeface="HYSinMyeongJo-Medium" pitchFamily="34" charset="0"/>
+                <a:ea typeface="HYSinMyeongJo-Medium" pitchFamily="34" charset="-122"/>
+                <a:cs typeface="HYSinMyeongJo-Medium" pitchFamily="34" charset="-120"/>
+              </a:rPr>
+              <a:t>수면압·카페인을 고려해</a:t>
+            </a:r>
+            <a:endParaRPr lang="en-US" sz="1000" dirty="0"/>
+          </a:p>
+          <a:p>
+            <a:pPr marL="0" indent="0" algn="ctr">
+              <a:buNone/>
+            </a:pPr>
+            <a:r>
+              <a:rPr lang="en-US" sz="1000" dirty="0">
+                <a:solidFill>
+                  <a:srgbClr val="2E1A0F"/>
+                </a:solidFill>
+                <a:latin typeface="HYSinMyeongJo-Medium" pitchFamily="34" charset="0"/>
+                <a:ea typeface="HYSinMyeongJo-Medium" pitchFamily="34" charset="-122"/>
+                <a:cs typeface="HYSinMyeongJo-Medium" pitchFamily="34" charset="-120"/>
+              </a:rPr>
+              <a:t>최적 시작 </a:t>
+            </a:r>
+            <a:r>
+              <a:rPr lang="en-US" sz="1000" dirty="0" err="1">
+                <a:solidFill>
+                  <a:srgbClr val="2E1A0F"/>
+                </a:solidFill>
+                <a:latin typeface="HYSinMyeongJo-Medium" pitchFamily="34" charset="0"/>
+                <a:ea typeface="HYSinMyeongJo-Medium" pitchFamily="34" charset="-122"/>
+                <a:cs typeface="HYSinMyeongJo-Medium" pitchFamily="34" charset="-120"/>
+              </a:rPr>
+              <a:t>시각</a:t>
+            </a:r>
+            <a:r>
+              <a:rPr lang="en-US" sz="1000" dirty="0">
+                <a:solidFill>
+                  <a:srgbClr val="2E1A0F"/>
+                </a:solidFill>
+                <a:latin typeface="HYSinMyeongJo-Medium" pitchFamily="34" charset="0"/>
+                <a:ea typeface="HYSinMyeongJo-Medium" pitchFamily="34" charset="-122"/>
+                <a:cs typeface="HYSinMyeongJo-Medium" pitchFamily="34" charset="-120"/>
+              </a:rPr>
+              <a:t> </a:t>
+            </a:r>
+            <a:r>
+              <a:rPr lang="en-US" sz="1000" dirty="0" err="1">
+                <a:solidFill>
+                  <a:srgbClr val="2E1A0F"/>
+                </a:solidFill>
+                <a:latin typeface="HYSinMyeongJo-Medium" pitchFamily="34" charset="0"/>
+                <a:ea typeface="HYSinMyeongJo-Medium" pitchFamily="34" charset="-122"/>
+                <a:cs typeface="HYSinMyeongJo-Medium" pitchFamily="34" charset="-120"/>
+              </a:rPr>
+              <a:t>추천</a:t>
+            </a:r>
+            <a:br>
+              <a:rPr lang="en-US" sz="1000" dirty="0">
+                <a:solidFill>
+                  <a:srgbClr val="2E1A0F"/>
+                </a:solidFill>
+                <a:latin typeface="HYSinMyeongJo-Medium" pitchFamily="34" charset="0"/>
+                <a:ea typeface="HYSinMyeongJo-Medium" pitchFamily="34" charset="-122"/>
+                <a:cs typeface="HYSinMyeongJo-Medium" pitchFamily="34" charset="-120"/>
+              </a:rPr>
+            </a:br>
+            <a:endParaRPr lang="en-US" sz="1000" dirty="0"/>
+          </a:p>
+          <a:p>
+            <a:pPr marL="0" indent="0" algn="ctr">
+              <a:buNone/>
+            </a:pPr>
+            <a:r>
+              <a:rPr lang="en-US" sz="1000" dirty="0">
+                <a:solidFill>
+                  <a:srgbClr val="2E1A0F"/>
+                </a:solidFill>
+                <a:latin typeface="HYSinMyeongJo-Medium" pitchFamily="34" charset="0"/>
+                <a:ea typeface="HYSinMyeongJo-Medium" pitchFamily="34" charset="-122"/>
+                <a:cs typeface="HYSinMyeongJo-Medium" pitchFamily="34" charset="-120"/>
+              </a:rPr>
+              <a:t>(예: "내일 오전 10시부터</a:t>
+            </a:r>
+            <a:endParaRPr lang="en-US" sz="1000" dirty="0"/>
+          </a:p>
+          <a:p>
+            <a:pPr marL="0" indent="0" algn="ctr">
+              <a:buNone/>
+            </a:pPr>
+            <a:r>
+              <a:rPr lang="en-US" sz="1000" dirty="0">
+                <a:solidFill>
+                  <a:srgbClr val="2E1A0F"/>
+                </a:solidFill>
+                <a:latin typeface="HYSinMyeongJo-Medium" pitchFamily="34" charset="0"/>
+                <a:ea typeface="HYSinMyeongJo-Medium" pitchFamily="34" charset="-122"/>
+                <a:cs typeface="HYSinMyeongJo-Medium" pitchFamily="34" charset="-120"/>
+              </a:rPr>
+              <a:t>시작하면 최상의 컨디션")</a:t>
+            </a:r>
+            <a:endParaRPr lang="en-US" sz="1000" dirty="0"/>
+          </a:p>
         </p:txBody>
       </p:sp>
       <p:sp>
@@ -6195,7 +5910,7 @@
         </p:nvSpPr>
         <p:spPr>
           <a:xfrm>
-            <a:off x="3413455" y="3749040"/>
+            <a:off x="3670630" y="3749040"/>
             <a:ext cx="1767535" cy="594360"/>
           </a:xfrm>
           <a:prstGeom prst="rect">
@@ -6208,7 +5923,7 @@
           <a:bodyPr wrap="square" lIns="0" tIns="0" rIns="0" bIns="0" rtlCol="0" anchor="t"/>
           <a:lstStyle/>
           <a:p>
-            <a:pPr algn="l" indent="0" marL="0">
+            <a:pPr marL="0" indent="0" algn="l">
               <a:buNone/>
             </a:pPr>
             <a:r>
@@ -6216,14 +5931,75 @@
                 <a:solidFill>
                   <a:srgbClr val="8A6C52"/>
                 </a:solidFill>
-                <a:latin typeface="Calibri" pitchFamily="34" charset="0"/>
-                <a:ea typeface="Calibri" pitchFamily="34" charset="-122"/>
-                <a:cs typeface="Calibri" pitchFamily="34" charset="-120"/>
-              </a:rPr>
-              <a:t>이유: 캘린더·기록 저장 등 별도 데이터 구조가 필요해 범위 밖</a:t>
+                <a:latin typeface="HYSinMyeongJo-Medium" pitchFamily="34" charset="0"/>
+                <a:ea typeface="HYSinMyeongJo-Medium" pitchFamily="34" charset="-122"/>
+                <a:cs typeface="HYSinMyeongJo-Medium" pitchFamily="34" charset="-120"/>
+              </a:rPr>
+              <a:t>이유: 캘린더·기록 저장 등 별도</a:t>
             </a:r>
             <a:endParaRPr lang="en-US" sz="850" dirty="0"/>
           </a:p>
+          <a:p>
+            <a:pPr marL="0" indent="0" algn="l">
+              <a:buNone/>
+            </a:pPr>
+            <a:r>
+              <a:rPr lang="en-US" sz="850" i="1" dirty="0">
+                <a:solidFill>
+                  <a:srgbClr val="8A6C52"/>
+                </a:solidFill>
+                <a:latin typeface="HYSinMyeongJo-Medium" pitchFamily="34" charset="0"/>
+                <a:ea typeface="HYSinMyeongJo-Medium" pitchFamily="34" charset="-122"/>
+                <a:cs typeface="HYSinMyeongJo-Medium" pitchFamily="34" charset="-120"/>
+              </a:rPr>
+              <a:t>데이터 </a:t>
+            </a:r>
+            <a:r>
+              <a:rPr lang="en-US" sz="850" i="1" dirty="0" err="1">
+                <a:solidFill>
+                  <a:srgbClr val="8A6C52"/>
+                </a:solidFill>
+                <a:latin typeface="HYSinMyeongJo-Medium" pitchFamily="34" charset="0"/>
+                <a:ea typeface="HYSinMyeongJo-Medium" pitchFamily="34" charset="-122"/>
+                <a:cs typeface="HYSinMyeongJo-Medium" pitchFamily="34" charset="-120"/>
+              </a:rPr>
+              <a:t>구조가</a:t>
+            </a:r>
+            <a:r>
+              <a:rPr lang="en-US" sz="850" i="1" dirty="0">
+                <a:solidFill>
+                  <a:srgbClr val="8A6C52"/>
+                </a:solidFill>
+                <a:latin typeface="HYSinMyeongJo-Medium" pitchFamily="34" charset="0"/>
+                <a:ea typeface="HYSinMyeongJo-Medium" pitchFamily="34" charset="-122"/>
+                <a:cs typeface="HYSinMyeongJo-Medium" pitchFamily="34" charset="-120"/>
+              </a:rPr>
+              <a:t> 필</a:t>
+            </a:r>
+            <a:r>
+              <a:rPr lang="ko-KR" altLang="en-US" sz="850" i="1" dirty="0">
+                <a:solidFill>
+                  <a:srgbClr val="8A6C52"/>
+                </a:solidFill>
+                <a:latin typeface="HYSinMyeongJo-Medium" pitchFamily="34" charset="0"/>
+                <a:ea typeface="HYSinMyeongJo-Medium" pitchFamily="34" charset="-122"/>
+                <a:cs typeface="HYSinMyeongJo-Medium" pitchFamily="34" charset="-120"/>
+              </a:rPr>
+              <a:t>요하여 시간적 여유가 있으면 추가할 것</a:t>
+            </a:r>
+            <a:r>
+              <a:rPr lang="en-US" altLang="ko-KR" sz="850" i="1" dirty="0">
+                <a:solidFill>
+                  <a:srgbClr val="8A6C52"/>
+                </a:solidFill>
+                <a:latin typeface="HYSinMyeongJo-Medium" pitchFamily="34" charset="0"/>
+                <a:ea typeface="HYSinMyeongJo-Medium" pitchFamily="34" charset="-122"/>
+                <a:cs typeface="HYSinMyeongJo-Medium" pitchFamily="34" charset="-120"/>
+              </a:rPr>
+              <a:t>.</a:t>
+            </a:r>
+            <a:endParaRPr lang="en-US" sz="850" dirty="0"/>
+          </a:p>
         </p:txBody>
       </p:sp>
       <p:sp>
@@ -6234,7 +6010,7 @@
         </p:nvSpPr>
         <p:spPr>
           <a:xfrm>
-            <a:off x="5638190" y="1371600"/>
+            <a:off x="5895365" y="1371600"/>
             <a:ext cx="2133295" cy="3063240"/>
           </a:xfrm>
           <a:prstGeom prst="roundRect">
@@ -6243,7 +6019,7 @@
             </a:avLst>
           </a:prstGeom>
           <a:solidFill>
-            <a:srgbClr val="FBF5EB"/>
+            <a:srgbClr val="FFFFFF"/>
           </a:solidFill>
           <a:ln/>
         </p:spPr>
@@ -6256,7 +6032,7 @@
         </p:nvSpPr>
         <p:spPr>
           <a:xfrm>
-            <a:off x="6453378" y="1572768"/>
+            <a:off x="6710553" y="1572768"/>
             <a:ext cx="502920" cy="502920"/>
           </a:xfrm>
           <a:prstGeom prst="ellipse">
@@ -6275,21 +6051,21 @@
       </p:sp>
       <p:pic>
         <p:nvPicPr>
-          <p:cNvPr id="18" name="Image 2" descr="preencoded.png">    </p:cNvPr>
+          <p:cNvPr id="18" name="Image 2" descr="preencoded.png"/>
           <p:cNvPicPr>
             <a:picLocks noChangeAspect="1"/>
           </p:cNvPicPr>
           <p:nvPr/>
         </p:nvPicPr>
         <p:blipFill>
-          <a:blip r:embed="rId3"/>
+          <a:blip r:embed="rId5"/>
           <a:stretch>
             <a:fillRect/>
           </a:stretch>
         </p:blipFill>
         <p:spPr>
           <a:xfrm>
-            <a:off x="6567678" y="1691640"/>
+            <a:off x="6824853" y="1691640"/>
             <a:ext cx="274320" cy="274320"/>
           </a:xfrm>
           <a:prstGeom prst="rect">
@@ -6305,7 +6081,7 @@
         </p:nvSpPr>
         <p:spPr>
           <a:xfrm>
-            <a:off x="5638190" y="2240280"/>
+            <a:off x="5895365" y="2240280"/>
             <a:ext cx="2133295" cy="320040"/>
           </a:xfrm>
           <a:prstGeom prst="rect">
@@ -6318,7 +6094,7 @@
           <a:bodyPr wrap="square" lIns="0" tIns="0" rIns="0" bIns="0" rtlCol="0" anchor="ctr"/>
           <a:lstStyle/>
           <a:p>
-            <a:pPr algn="ctr" indent="0" marL="0">
+            <a:pPr marL="0" indent="0" algn="ctr">
               <a:buNone/>
             </a:pPr>
             <a:r>
@@ -6326,9 +6102,9 @@
                 <a:solidFill>
                   <a:srgbClr val="2E1A0F"/>
                 </a:solidFill>
-                <a:latin typeface="Cambria" pitchFamily="34" charset="0"/>
-                <a:ea typeface="Cambria" pitchFamily="34" charset="-122"/>
-                <a:cs typeface="Cambria" pitchFamily="34" charset="-120"/>
+                <a:latin typeface="HYSinMyeongJo-Medium" pitchFamily="34" charset="0"/>
+                <a:ea typeface="HYSinMyeongJo-Medium" pitchFamily="34" charset="-122"/>
+                <a:cs typeface="HYSinMyeongJo-Medium" pitchFamily="34" charset="-120"/>
               </a:rPr>
               <a:t>개인화 모델</a:t>
             </a:r>
@@ -6344,7 +6120,7 @@
         </p:nvSpPr>
         <p:spPr>
           <a:xfrm>
-            <a:off x="5821070" y="2651760"/>
+            <a:off x="6078245" y="2651760"/>
             <a:ext cx="1767535" cy="1188720"/>
           </a:xfrm>
           <a:prstGeom prst="rect">
@@ -6357,7 +6133,7 @@
           <a:bodyPr wrap="square" lIns="0" tIns="0" rIns="0" bIns="0" rtlCol="0" anchor="t"/>
           <a:lstStyle/>
           <a:p>
-            <a:pPr algn="l" indent="0" marL="0">
+            <a:pPr marL="0" indent="0" algn="ctr">
               <a:buNone/>
             </a:pPr>
             <a:r>
@@ -6365,14 +6141,208 @@
                 <a:solidFill>
                   <a:srgbClr val="2E1A0F"/>
                 </a:solidFill>
-                <a:latin typeface="Calibri" pitchFamily="34" charset="0"/>
-                <a:ea typeface="Calibri" pitchFamily="34" charset="-122"/>
-                <a:cs typeface="Calibri" pitchFamily="34" charset="-120"/>
-              </a:rPr>
-              <a:t>약 6개월 데이터가 쌓이면 집단 평균이 아닌 개인별 수면리듬·카페인 민감도로 보정</a:t>
+                <a:latin typeface="HYSinMyeongJo-Medium" pitchFamily="34" charset="0"/>
+                <a:ea typeface="HYSinMyeongJo-Medium" pitchFamily="34" charset="-122"/>
+                <a:cs typeface="HYSinMyeongJo-Medium" pitchFamily="34" charset="-120"/>
+              </a:rPr>
+              <a:t>약 </a:t>
+            </a:r>
+            <a:r>
+              <a:rPr lang="en-US" sz="1000" dirty="0" err="1">
+                <a:solidFill>
+                  <a:srgbClr val="2E1A0F"/>
+                </a:solidFill>
+                <a:latin typeface="HYSinMyeongJo-Medium" pitchFamily="34" charset="0"/>
+                <a:ea typeface="HYSinMyeongJo-Medium" pitchFamily="34" charset="-122"/>
+                <a:cs typeface="HYSinMyeongJo-Medium" pitchFamily="34" charset="-120"/>
+              </a:rPr>
+              <a:t>n개월</a:t>
+            </a:r>
+            <a:r>
+              <a:rPr lang="en-US" sz="1000" dirty="0">
+                <a:solidFill>
+                  <a:srgbClr val="2E1A0F"/>
+                </a:solidFill>
+                <a:latin typeface="HYSinMyeongJo-Medium" pitchFamily="34" charset="0"/>
+                <a:ea typeface="HYSinMyeongJo-Medium" pitchFamily="34" charset="-122"/>
+                <a:cs typeface="HYSinMyeongJo-Medium" pitchFamily="34" charset="-120"/>
+              </a:rPr>
+              <a:t> </a:t>
+            </a:r>
+            <a:r>
+              <a:rPr lang="en-US" sz="1000" dirty="0" err="1">
+                <a:solidFill>
+                  <a:srgbClr val="2E1A0F"/>
+                </a:solidFill>
+                <a:latin typeface="HYSinMyeongJo-Medium" pitchFamily="34" charset="0"/>
+                <a:ea typeface="HYSinMyeongJo-Medium" pitchFamily="34" charset="-122"/>
+                <a:cs typeface="HYSinMyeongJo-Medium" pitchFamily="34" charset="-120"/>
+              </a:rPr>
+              <a:t>데이터가</a:t>
+            </a:r>
+            <a:r>
+              <a:rPr lang="en-US" sz="1000" dirty="0">
+                <a:solidFill>
+                  <a:srgbClr val="2E1A0F"/>
+                </a:solidFill>
+                <a:latin typeface="HYSinMyeongJo-Medium" pitchFamily="34" charset="0"/>
+                <a:ea typeface="HYSinMyeongJo-Medium" pitchFamily="34" charset="-122"/>
+                <a:cs typeface="HYSinMyeongJo-Medium" pitchFamily="34" charset="-120"/>
+              </a:rPr>
+              <a:t> </a:t>
+            </a:r>
+            <a:r>
+              <a:rPr lang="en-US" sz="1000" dirty="0" err="1">
+                <a:solidFill>
+                  <a:srgbClr val="2E1A0F"/>
+                </a:solidFill>
+                <a:latin typeface="HYSinMyeongJo-Medium" pitchFamily="34" charset="0"/>
+                <a:ea typeface="HYSinMyeongJo-Medium" pitchFamily="34" charset="-122"/>
+                <a:cs typeface="HYSinMyeongJo-Medium" pitchFamily="34" charset="-120"/>
+              </a:rPr>
+              <a:t>쌓이면</a:t>
             </a:r>
             <a:endParaRPr lang="en-US" sz="1000" dirty="0"/>
           </a:p>
+          <a:p>
+            <a:pPr marL="0" indent="0" algn="ctr">
+              <a:buNone/>
+            </a:pPr>
+            <a:r>
+              <a:rPr lang="en-US" sz="1000" dirty="0" err="1">
+                <a:solidFill>
+                  <a:srgbClr val="2E1A0F"/>
+                </a:solidFill>
+                <a:latin typeface="HYSinMyeongJo-Medium" pitchFamily="34" charset="0"/>
+                <a:ea typeface="HYSinMyeongJo-Medium" pitchFamily="34" charset="-122"/>
+                <a:cs typeface="HYSinMyeongJo-Medium" pitchFamily="34" charset="-120"/>
+              </a:rPr>
+              <a:t>집단</a:t>
+            </a:r>
+            <a:r>
+              <a:rPr lang="en-US" sz="1000" dirty="0">
+                <a:solidFill>
+                  <a:srgbClr val="2E1A0F"/>
+                </a:solidFill>
+                <a:latin typeface="HYSinMyeongJo-Medium" pitchFamily="34" charset="0"/>
+                <a:ea typeface="HYSinMyeongJo-Medium" pitchFamily="34" charset="-122"/>
+                <a:cs typeface="HYSinMyeongJo-Medium" pitchFamily="34" charset="-120"/>
+              </a:rPr>
+              <a:t> </a:t>
+            </a:r>
+            <a:r>
+              <a:rPr lang="en-US" sz="1000" dirty="0" err="1">
+                <a:solidFill>
+                  <a:srgbClr val="2E1A0F"/>
+                </a:solidFill>
+                <a:latin typeface="HYSinMyeongJo-Medium" pitchFamily="34" charset="0"/>
+                <a:ea typeface="HYSinMyeongJo-Medium" pitchFamily="34" charset="-122"/>
+                <a:cs typeface="HYSinMyeongJo-Medium" pitchFamily="34" charset="-120"/>
+              </a:rPr>
+              <a:t>평균이</a:t>
+            </a:r>
+            <a:r>
+              <a:rPr lang="en-US" sz="1000" dirty="0">
+                <a:solidFill>
+                  <a:srgbClr val="2E1A0F"/>
+                </a:solidFill>
+                <a:latin typeface="HYSinMyeongJo-Medium" pitchFamily="34" charset="0"/>
+                <a:ea typeface="HYSinMyeongJo-Medium" pitchFamily="34" charset="-122"/>
+                <a:cs typeface="HYSinMyeongJo-Medium" pitchFamily="34" charset="-120"/>
+              </a:rPr>
+              <a:t> </a:t>
+            </a:r>
+            <a:r>
+              <a:rPr lang="en-US" sz="1000" dirty="0" err="1">
+                <a:solidFill>
+                  <a:srgbClr val="2E1A0F"/>
+                </a:solidFill>
+                <a:latin typeface="HYSinMyeongJo-Medium" pitchFamily="34" charset="0"/>
+                <a:ea typeface="HYSinMyeongJo-Medium" pitchFamily="34" charset="-122"/>
+                <a:cs typeface="HYSinMyeongJo-Medium" pitchFamily="34" charset="-120"/>
+              </a:rPr>
+              <a:t>아닌</a:t>
+            </a:r>
+            <a:r>
+              <a:rPr lang="en-US" sz="1000" dirty="0">
+                <a:solidFill>
+                  <a:srgbClr val="2E1A0F"/>
+                </a:solidFill>
+                <a:latin typeface="HYSinMyeongJo-Medium" pitchFamily="34" charset="0"/>
+                <a:ea typeface="HYSinMyeongJo-Medium" pitchFamily="34" charset="-122"/>
+                <a:cs typeface="HYSinMyeongJo-Medium" pitchFamily="34" charset="-120"/>
+              </a:rPr>
+              <a:t> </a:t>
+            </a:r>
+            <a:r>
+              <a:rPr lang="en-US" sz="1000" dirty="0" err="1">
+                <a:solidFill>
+                  <a:srgbClr val="2E1A0F"/>
+                </a:solidFill>
+                <a:latin typeface="HYSinMyeongJo-Medium" pitchFamily="34" charset="0"/>
+                <a:ea typeface="HYSinMyeongJo-Medium" pitchFamily="34" charset="-122"/>
+                <a:cs typeface="HYSinMyeongJo-Medium" pitchFamily="34" charset="-120"/>
+              </a:rPr>
+              <a:t>개인별</a:t>
+            </a:r>
+            <a:endParaRPr lang="en-US" sz="1000" dirty="0"/>
+          </a:p>
+          <a:p>
+            <a:pPr marL="0" indent="0" algn="ctr">
+              <a:buNone/>
+            </a:pPr>
+            <a:r>
+              <a:rPr lang="en-US" sz="1000" dirty="0" err="1">
+                <a:solidFill>
+                  <a:srgbClr val="2E1A0F"/>
+                </a:solidFill>
+                <a:latin typeface="HYSinMyeongJo-Medium" pitchFamily="34" charset="0"/>
+                <a:ea typeface="HYSinMyeongJo-Medium" pitchFamily="34" charset="-122"/>
+                <a:cs typeface="HYSinMyeongJo-Medium" pitchFamily="34" charset="-120"/>
+              </a:rPr>
+              <a:t>수면리듬·카페인</a:t>
+            </a:r>
+            <a:r>
+              <a:rPr lang="en-US" sz="1000" dirty="0">
+                <a:solidFill>
+                  <a:srgbClr val="2E1A0F"/>
+                </a:solidFill>
+                <a:latin typeface="HYSinMyeongJo-Medium" pitchFamily="34" charset="0"/>
+                <a:ea typeface="HYSinMyeongJo-Medium" pitchFamily="34" charset="-122"/>
+                <a:cs typeface="HYSinMyeongJo-Medium" pitchFamily="34" charset="-120"/>
+              </a:rPr>
+              <a:t> </a:t>
+            </a:r>
+            <a:r>
+              <a:rPr lang="en-US" sz="1000" dirty="0" err="1">
+                <a:solidFill>
+                  <a:srgbClr val="2E1A0F"/>
+                </a:solidFill>
+                <a:latin typeface="HYSinMyeongJo-Medium" pitchFamily="34" charset="0"/>
+                <a:ea typeface="HYSinMyeongJo-Medium" pitchFamily="34" charset="-122"/>
+                <a:cs typeface="HYSinMyeongJo-Medium" pitchFamily="34" charset="-120"/>
+              </a:rPr>
+              <a:t>민감도로</a:t>
+            </a:r>
+            <a:endParaRPr lang="en-US" sz="1000" dirty="0"/>
+          </a:p>
+          <a:p>
+            <a:pPr marL="0" indent="0" algn="ctr">
+              <a:buNone/>
+            </a:pPr>
+            <a:r>
+              <a:rPr lang="en-US" sz="1000" dirty="0" err="1">
+                <a:solidFill>
+                  <a:srgbClr val="2E1A0F"/>
+                </a:solidFill>
+                <a:latin typeface="HYSinMyeongJo-Medium" pitchFamily="34" charset="0"/>
+                <a:ea typeface="HYSinMyeongJo-Medium" pitchFamily="34" charset="-122"/>
+                <a:cs typeface="HYSinMyeongJo-Medium" pitchFamily="34" charset="-120"/>
+              </a:rPr>
+              <a:t>보정</a:t>
+            </a:r>
+            <a:endParaRPr lang="en-US" sz="1000" dirty="0"/>
+          </a:p>
         </p:txBody>
       </p:sp>
       <p:sp>
@@ -6383,7 +6353,7 @@
         </p:nvSpPr>
         <p:spPr>
           <a:xfrm>
-            <a:off x="5821070" y="3749040"/>
+            <a:off x="6078245" y="3749040"/>
             <a:ext cx="1767535" cy="594360"/>
           </a:xfrm>
           <a:prstGeom prst="rect">
@@ -6396,7 +6366,7 @@
           <a:bodyPr wrap="square" lIns="0" tIns="0" rIns="0" bIns="0" rtlCol="0" anchor="t"/>
           <a:lstStyle/>
           <a:p>
-            <a:pPr algn="l" indent="0" marL="0">
+            <a:pPr marL="0" indent="0" algn="l">
               <a:buNone/>
             </a:pPr>
             <a:r>
@@ -6404,11 +6374,28 @@
                 <a:solidFill>
                   <a:srgbClr val="8A6C52"/>
                 </a:solidFill>
-                <a:latin typeface="Calibri" pitchFamily="34" charset="0"/>
-                <a:ea typeface="Calibri" pitchFamily="34" charset="-122"/>
-                <a:cs typeface="Calibri" pitchFamily="34" charset="-120"/>
-              </a:rPr>
-              <a:t>이유: 아직 데이터가 없어 불가능, 그 전까진 정확도 저하 경고 필요</a:t>
+                <a:latin typeface="HYSinMyeongJo-Medium" pitchFamily="34" charset="0"/>
+                <a:ea typeface="HYSinMyeongJo-Medium" pitchFamily="34" charset="-122"/>
+                <a:cs typeface="HYSinMyeongJo-Medium" pitchFamily="34" charset="-120"/>
+              </a:rPr>
+              <a:t>이유: 아직 데이터가 없어 불가능,</a:t>
+            </a:r>
+            <a:endParaRPr lang="en-US" sz="850" dirty="0"/>
+          </a:p>
+          <a:p>
+            <a:pPr marL="0" indent="0" algn="l">
+              <a:buNone/>
+            </a:pPr>
+            <a:r>
+              <a:rPr lang="en-US" sz="850" i="1" dirty="0">
+                <a:solidFill>
+                  <a:srgbClr val="8A6C52"/>
+                </a:solidFill>
+                <a:latin typeface="HYSinMyeongJo-Medium" pitchFamily="34" charset="0"/>
+                <a:ea typeface="HYSinMyeongJo-Medium" pitchFamily="34" charset="-122"/>
+                <a:cs typeface="HYSinMyeongJo-Medium" pitchFamily="34" charset="-120"/>
+              </a:rPr>
+              <a:t>그 전까진 정확도 저하 경고 필요</a:t>
             </a:r>
             <a:endParaRPr lang="en-US" sz="850" dirty="0"/>
           </a:p>
@@ -6715,4 +6702,299 @@
     </a:ext>
   </a:extLst>
 </a:theme>
+</file>
+
+<file path=ppt/theme/theme2.xml><?xml version="1.0" encoding="utf-8"?>
+<a:theme xmlns:a="http://schemas.openxmlformats.org/drawingml/2006/main" name="Office 테마">
+  <a:themeElements>
+    <a:clrScheme name="Office">
+      <a:dk1>
+        <a:sysClr val="windowText" lastClr="000000"/>
+      </a:dk1>
+      <a:lt1>
+        <a:sysClr val="window" lastClr="FFFFFF"/>
+      </a:lt1>
+      <a:dk2>
+        <a:srgbClr val="44546A"/>
+      </a:dk2>
+      <a:lt2>
+        <a:srgbClr val="E7E6E6"/>
+      </a:lt2>
+      <a:accent1>
+        <a:srgbClr val="4472C4"/>
+      </a:accent1>
+      <a:accent2>
+        <a:srgbClr val="ED7D31"/>
+      </a:accent2>
+      <a:accent3>
+        <a:srgbClr val="A5A5A5"/>
+      </a:accent3>
+      <a:accent4>
+        <a:srgbClr val="FFC000"/>
+      </a:accent4>
+      <a:accent5>
+        <a:srgbClr val="5B9BD5"/>
+      </a:accent5>
+      <a:accent6>
+        <a:srgbClr val="70AD47"/>
+      </a:accent6>
+      <a:hlink>
+        <a:srgbClr val="0563C1"/>
+      </a:hlink>
+      <a:folHlink>
+        <a:srgbClr val="954F72"/>
+      </a:folHlink>
+    </a:clrScheme>
+    <a:fontScheme name="Office">
+      <a:majorFont>
+        <a:latin typeface="맑은 고딕" panose="020F0302020204030204"/>
+        <a:ea typeface=""/>
+        <a:cs typeface=""/>
+        <a:font script="Jpan" typeface="游ゴシック Light"/>
+        <a:font script="Hang" typeface="맑은 고딕"/>
+        <a:font script="Hans" typeface="等线 Light"/>
+        <a:font script="Hant" typeface="新細明體"/>
+        <a:font script="Arab" typeface="Times New Roman"/>
+        <a:font script="Hebr" typeface="Times New Roman"/>
+        <a:font script="Thai" typeface="Angsana New"/>
+        <a:font script="Ethi" typeface="Nyala"/>
+        <a:font script="Beng" typeface="Vrinda"/>
+        <a:font script="Gujr" typeface="Shruti"/>
+        <a:font script="Khmr" typeface="MoolBoran"/>
+        <a:font script="Knda" typeface="Tunga"/>
+        <a:font script="Guru" typeface="Raavi"/>
+        <a:font script="Cans" typeface="Euphemia"/>
+        <a:font script="Cher" typeface="Plantagenet Cherokee"/>
+        <a:font script="Yiii" typeface="Microsoft Yi Baiti"/>
+        <a:font script="Tibt" typeface="Microsoft Himalaya"/>
+        <a:font script="Thaa" typeface="MV Boli"/>
+        <a:font script="Deva" typeface="Mangal"/>
+        <a:font script="Telu" typeface="Gautami"/>
+        <a:font script="Taml" typeface="Latha"/>
+        <a:font script="Syrc" typeface="Estrangelo Edessa"/>
+        <a:font script="Orya" typeface="Kalinga"/>
+        <a:font script="Mlym" typeface="Kartika"/>
+        <a:font script="Laoo" typeface="DokChampa"/>
+        <a:font script="Sinh" typeface="Iskoola Pota"/>
+        <a:font script="Mong" typeface="Mongolian Baiti"/>
+        <a:font script="Viet" typeface="Times New Roman"/>
+        <a:font script="Uigh" typeface="Microsoft Uighur"/>
+        <a:font script="Geor" typeface="Sylfaen"/>
+        <a:font script="Armn" typeface="Arial"/>
+        <a:font script="Bugi" typeface="Leelawadee UI"/>
+        <a:font script="Bopo" typeface="Microsoft JhengHei"/>
+        <a:font script="Java" typeface="Javanese Text"/>
+        <a:font script="Lisu" typeface="Segoe UI"/>
+        <a:font script="Mymr" typeface="Myanmar Text"/>
+        <a:font script="Nkoo" typeface="Ebrima"/>
+        <a:font script="Olck" typeface="Nirmala UI"/>
+        <a:font script="Osma" typeface="Ebrima"/>
+        <a:font script="Phag" typeface="Phagspa"/>
+        <a:font script="Syrn" typeface="Estrangelo Edessa"/>
+        <a:font script="Syrj" typeface="Estrangelo Edessa"/>
+        <a:font script="Syre" typeface="Estrangelo Edessa"/>
+        <a:font script="Sora" typeface="Nirmala UI"/>
+        <a:font script="Tale" typeface="Microsoft Tai Le"/>
+        <a:font script="Talu" typeface="Microsoft New Tai Lue"/>
+        <a:font script="Tfng" typeface="Ebrima"/>
+      </a:majorFont>
+      <a:minorFont>
+        <a:latin typeface="맑은 고딕" panose="020F0502020204030204"/>
+        <a:ea typeface=""/>
+        <a:cs typeface=""/>
+        <a:font script="Jpan" typeface="游ゴシック"/>
+        <a:font script="Hang" typeface="맑은 고딕"/>
+        <a:font script="Hans" typeface="等线"/>
+        <a:font script="Hant" typeface="新細明體"/>
+        <a:font script="Arab" typeface="Arial"/>
+        <a:font script="Hebr" typeface="Arial"/>
+        <a:font script="Thai" typeface="Cordia New"/>
+        <a:font script="Ethi" typeface="Nyala"/>
+        <a:font script="Beng" typeface="Vrinda"/>
+        <a:font script="Gujr" typeface="Shruti"/>
+        <a:font script="Khmr" typeface="DaunPenh"/>
+        <a:font script="Knda" typeface="Tunga"/>
+        <a:font script="Guru" typeface="Raavi"/>
+        <a:font script="Cans" typeface="Euphemia"/>
+        <a:font script="Cher" typeface="Plantagenet Cherokee"/>
+        <a:font script="Yiii" typeface="Microsoft Yi Baiti"/>
+        <a:font script="Tibt" typeface="Microsoft Himalaya"/>
+        <a:font script="Thaa" typeface="MV Boli"/>
+        <a:font script="Deva" typeface="Mangal"/>
+        <a:font script="Telu" typeface="Gautami"/>
+        <a:font script="Taml" typeface="Latha"/>
+        <a:font script="Syrc" typeface="Estrangelo Edessa"/>
+        <a:font script="Orya" typeface="Kalinga"/>
+        <a:font script="Mlym" typeface="Kartika"/>
+        <a:font script="Laoo" typeface="DokChampa"/>
+        <a:font script="Sinh" typeface="Iskoola Pota"/>
+        <a:font script="Mong" typeface="Mongolian Baiti"/>
+        <a:font script="Viet" typeface="Arial"/>
+        <a:font script="Uigh" typeface="Microsoft Uighur"/>
+        <a:font script="Geor" typeface="Sylfaen"/>
+        <a:font script="Armn" typeface="Arial"/>
+        <a:font script="Bugi" typeface="Leelawadee UI"/>
+        <a:font script="Bopo" typeface="Microsoft JhengHei"/>
+        <a:font script="Java" typeface="Javanese Text"/>
+        <a:font script="Lisu" typeface="Segoe UI"/>
+        <a:font script="Mymr" typeface="Myanmar Text"/>
+        <a:font script="Nkoo" typeface="Ebrima"/>
+        <a:font script="Olck" typeface="Nirmala UI"/>
+        <a:font script="Osma" typeface="Ebrima"/>
+        <a:font script="Phag" typeface="Phagspa"/>
+        <a:font script="Syrn" typeface="Estrangelo Edessa"/>
+        <a:font script="Syrj" typeface="Estrangelo Edessa"/>
+        <a:font script="Syre" typeface="Estrangelo Edessa"/>
+        <a:font script="Sora" typeface="Nirmala UI"/>
+        <a:font script="Tale" typeface="Microsoft Tai Le"/>
+        <a:font script="Talu" typeface="Microsoft New Tai Lue"/>
+        <a:font script="Tfng" typeface="Ebrima"/>
+      </a:minorFont>
+    </a:fontScheme>
+    <a:fmtScheme name="Office">
+      <a:fillStyleLst>
+        <a:solidFill>
+          <a:schemeClr val="phClr"/>
+        </a:solidFill>
+        <a:gradFill rotWithShape="1">
+          <a:gsLst>
+            <a:gs pos="0">
+              <a:schemeClr val="phClr">
+                <a:lumMod val="110000"/>
+                <a:satMod val="105000"/>
+                <a:tint val="67000"/>
+              </a:schemeClr>
+            </a:gs>
+            <a:gs pos="50000">
+              <a:schemeClr val="phClr">
+                <a:lumMod val="105000"/>
+                <a:satMod val="103000"/>
+                <a:tint val="73000"/>
+              </a:schemeClr>
+            </a:gs>
+            <a:gs pos="100000">
+              <a:schemeClr val="phClr">
+                <a:lumMod val="105000"/>
+                <a:satMod val="109000"/>
+                <a:tint val="81000"/>
+              </a:schemeClr>
+            </a:gs>
+          </a:gsLst>
+          <a:lin ang="5400000" scaled="0"/>
+        </a:gradFill>
+        <a:gradFill rotWithShape="1">
+          <a:gsLst>
+            <a:gs pos="0">
+              <a:schemeClr val="phClr">
+                <a:satMod val="103000"/>
+                <a:lumMod val="102000"/>
+                <a:tint val="94000"/>
+              </a:schemeClr>
+            </a:gs>
+            <a:gs pos="50000">
+              <a:schemeClr val="phClr">
+                <a:satMod val="110000"/>
+                <a:lumMod val="100000"/>
+                <a:shade val="100000"/>
+              </a:schemeClr>
+            </a:gs>
+            <a:gs pos="100000">
+              <a:schemeClr val="phClr">
+                <a:lumMod val="99000"/>
+                <a:satMod val="120000"/>
+                <a:shade val="78000"/>
+              </a:schemeClr>
+            </a:gs>
+          </a:gsLst>
+          <a:lin ang="5400000" scaled="0"/>
+        </a:gradFill>
+      </a:fillStyleLst>
+      <a:lnStyleLst>
+        <a:ln w="6350" cap="flat" cmpd="sng" algn="ctr">
+          <a:solidFill>
+            <a:schemeClr val="phClr"/>
+          </a:solidFill>
+          <a:prstDash val="solid"/>
+          <a:miter lim="800000"/>
+        </a:ln>
+        <a:ln w="12700" cap="flat" cmpd="sng" algn="ctr">
+          <a:solidFill>
+            <a:schemeClr val="phClr"/>
+          </a:solidFill>
+          <a:prstDash val="solid"/>
+          <a:miter lim="800000"/>
+        </a:ln>
+        <a:ln w="19050" cap="flat" cmpd="sng" algn="ctr">
+          <a:solidFill>
+            <a:schemeClr val="phClr"/>
+          </a:solidFill>
+          <a:prstDash val="solid"/>
+          <a:miter lim="800000"/>
+        </a:ln>
+      </a:lnStyleLst>
+      <a:effectStyleLst>
+        <a:effectStyle>
+          <a:effectLst/>
+        </a:effectStyle>
+        <a:effectStyle>
+          <a:effectLst/>
+        </a:effectStyle>
+        <a:effectStyle>
+          <a:effectLst>
+            <a:outerShdw blurRad="57150" dist="19050" dir="5400000" algn="ctr" rotWithShape="0">
+              <a:srgbClr val="000000">
+                <a:alpha val="63000"/>
+              </a:srgbClr>
+            </a:outerShdw>
+          </a:effectLst>
+        </a:effectStyle>
+      </a:effectStyleLst>
+      <a:bgFillStyleLst>
+        <a:solidFill>
+          <a:schemeClr val="phClr"/>
+        </a:solidFill>
+        <a:solidFill>
+          <a:schemeClr val="phClr">
+            <a:tint val="95000"/>
+            <a:satMod val="170000"/>
+          </a:schemeClr>
+        </a:solidFill>
+        <a:gradFill rotWithShape="1">
+          <a:gsLst>
+            <a:gs pos="0">
+              <a:schemeClr val="phClr">
+                <a:tint val="93000"/>
+                <a:satMod val="150000"/>
+                <a:shade val="98000"/>
+                <a:lumMod val="102000"/>
+              </a:schemeClr>
+            </a:gs>
+            <a:gs pos="50000">
+              <a:schemeClr val="phClr">
+                <a:tint val="98000"/>
+                <a:satMod val="130000"/>
+                <a:shade val="90000"/>
+                <a:lumMod val="103000"/>
+              </a:schemeClr>
+            </a:gs>
+            <a:gs pos="100000">
+              <a:schemeClr val="phClr">
+                <a:shade val="63000"/>
+                <a:satMod val="120000"/>
+              </a:schemeClr>
+            </a:gs>
+          </a:gsLst>
+          <a:lin ang="5400000" scaled="0"/>
+        </a:gradFill>
+      </a:bgFillStyleLst>
+    </a:fmtScheme>
+  </a:themeElements>
+  <a:objectDefaults/>
+  <a:extraClrSchemeLst/>
+  <a:extLst>
+    <a:ext uri="{05A4C25C-085E-4340-85A3-A5531E510DB2}">
+      <thm15:themeFamily xmlns:thm15="http://schemas.microsoft.com/office/thememl/2012/main" name="Office Theme" id="{62F939B6-93AF-4DB8-9C6B-D6C7DFDC589F}" vid="{4A3C46E8-61CC-4603-A589-7422A47A8E4A}"/>
+    </a:ext>
+  </a:extLst>
+</a:theme>
 </file>